--- a/docs/LT_ユメログ.pptx
+++ b/docs/LT_ユメログ.pptx
@@ -13,6 +13,8 @@
     <p:sldId id="261" r:id="rId12"/>
     <p:sldId id="262" r:id="rId13"/>
     <p:sldId id="263" r:id="rId14"/>
+    <p:sldId id="264" r:id="rId15"/>
+    <p:sldId id="265" r:id="rId16"/>
   </p:sldIdLst>
   <p:sldSz cx="12191695" cy="6858000" type="screen4x3"/>
   <p:notesSz cx="6858000" cy="9144000"/>
@@ -3111,8 +3113,8 @@
         </p:nvSpPr>
         <p:spPr>
           <a:xfrm>
-            <a:off x="1371600" y="1097280"/>
-            <a:ext cx="9144000" cy="914400"/>
+            <a:off x="731520" y="731520"/>
+            <a:ext cx="10515600" cy="1097280"/>
           </a:xfrm>
           <a:prstGeom prst="rect">
             <a:avLst/>
@@ -3126,7 +3128,7 @@
           <a:lstStyle/>
           <a:p>
             <a:pPr algn="ctr">
-              <a:defRPr sz="5200" b="1">
+              <a:defRPr sz="3800" b="1">
                 <a:solidFill>
                   <a:srgbClr val="89B4FA"/>
                 </a:solidFill>
@@ -3134,7 +3136,11 @@
               </a:defRPr>
             </a:pPr>
             <a:r>
-              <a:t>ユメログ (YumeLog)</a:t>
+              <a:t>スクラッチ開発未経験エンジニアが</a:t>
+            </a:r>
+            <a:br/>
+            <a:r>
+              <a:t>AI駆動開発で3週間でアプリを作った話</a:t>
             </a:r>
           </a:p>
         </p:txBody>
@@ -3147,44 +3153,8 @@
         </p:nvSpPr>
         <p:spPr>
           <a:xfrm>
-            <a:off x="1371600" y="2194560"/>
-            <a:ext cx="9144000" cy="731520"/>
-          </a:xfrm>
-          <a:prstGeom prst="rect">
-            <a:avLst/>
-          </a:prstGeom>
-          <a:noFill/>
-        </p:spPr>
-        <p:txBody>
-          <a:bodyPr wrap="square">
-            <a:spAutoFit/>
-          </a:bodyPr>
-          <a:lstStyle/>
-          <a:p>
-            <a:pPr algn="ctr">
-              <a:defRPr sz="2800" b="0">
-                <a:solidFill>
-                  <a:srgbClr val="CDD6F4"/>
-                </a:solidFill>
-                <a:latin typeface="Yu Gothic UI"/>
-              </a:defRPr>
-            </a:pPr>
-            <a:r>
-              <a:t>夢を持つことで、大きな壁も乗り越えられる。</a:t>
-            </a:r>
-          </a:p>
-        </p:txBody>
-      </p:sp>
-      <p:sp>
-        <p:nvSpPr>
-          <p:cNvPr id="4" name="TextBox 3"/>
-          <p:cNvSpPr txBox="1"/>
-          <p:nvPr/>
-        </p:nvSpPr>
-        <p:spPr>
-          <a:xfrm>
-            <a:off x="1371600" y="2926080"/>
-            <a:ext cx="9144000" cy="731520"/>
+            <a:off x="1371600" y="2560320"/>
+            <a:ext cx="9144000" cy="548640"/>
           </a:xfrm>
           <a:prstGeom prst="rect">
             <a:avLst/>
@@ -3206,14 +3176,14 @@
               </a:defRPr>
             </a:pPr>
             <a:r>
-              <a:t>あなたの「やりたいこと」を、行動に変えるアプリ</a:t>
+              <a:t>— ユメログ (YumeLog) 開発記 —</a:t>
             </a:r>
           </a:p>
         </p:txBody>
       </p:sp>
       <p:pic>
         <p:nvPicPr>
-          <p:cNvPr id="5" name="Picture 4" descr="LP用QRコード.png"/>
+          <p:cNvPr id="4" name="Picture 3" descr="LP用QRコード.png"/>
           <p:cNvPicPr>
             <a:picLocks noChangeAspect="1"/>
           </p:cNvPicPr>
@@ -3227,7 +3197,7 @@
         </p:blipFill>
         <p:spPr>
           <a:xfrm>
-            <a:off x="4937760" y="3840480"/>
+            <a:off x="4937760" y="3474720"/>
             <a:ext cx="2286000" cy="2286000"/>
           </a:xfrm>
           <a:prstGeom prst="rect">
@@ -3237,14 +3207,14 @@
       </p:pic>
       <p:sp>
         <p:nvSpPr>
-          <p:cNvPr id="6" name="TextBox 5"/>
-          <p:cNvSpPr txBox="1"/>
-          <p:nvPr/>
-        </p:nvSpPr>
-        <p:spPr>
-          <a:xfrm>
-            <a:off x="3200400" y="6217920"/>
-            <a:ext cx="5486400" cy="457200"/>
+          <p:cNvPr id="5" name="TextBox 4"/>
+          <p:cNvSpPr txBox="1"/>
+          <p:nvPr/>
+        </p:nvSpPr>
+        <p:spPr>
+          <a:xfrm>
+            <a:off x="2743200" y="5943600"/>
+            <a:ext cx="6400800" cy="365760"/>
           </a:xfrm>
           <a:prstGeom prst="rect">
             <a:avLst/>
@@ -3266,7 +3236,554 @@
               </a:defRPr>
             </a:pPr>
             <a:r>
-              <a:t>QRコードからすぐに体験できます（無料・登録不要）</a:t>
+              <a:t>QRコードは最後にもう一度出します。まずは話を聞いてください。</a:t>
+            </a:r>
+          </a:p>
+        </p:txBody>
+      </p:sp>
+    </p:spTree>
+  </p:cSld>
+  <p:clrMapOvr>
+    <a:masterClrMapping/>
+  </p:clrMapOvr>
+</p:sld>
+</file>
+
+<file path=ppt/slides/slide10.xml><?xml version="1.0" encoding="utf-8"?>
+<p:sld xmlns:a="http://schemas.openxmlformats.org/drawingml/2006/main" xmlns:p="http://schemas.openxmlformats.org/presentationml/2006/main" xmlns:r="http://schemas.openxmlformats.org/officeDocument/2006/relationships">
+  <p:cSld>
+    <p:bg>
+      <p:bgPr>
+        <a:solidFill>
+          <a:srgbClr val="1E1E2E"/>
+        </a:solidFill>
+        <a:effectLst/>
+      </p:bgPr>
+    </p:bg>
+    <p:spTree>
+      <p:nvGrpSpPr>
+        <p:cNvPr id="1" name=""/>
+        <p:cNvGrpSpPr/>
+        <p:nvPr/>
+      </p:nvGrpSpPr>
+      <p:grpSpPr/>
+      <p:sp>
+        <p:nvSpPr>
+          <p:cNvPr id="2" name="TextBox 1"/>
+          <p:cNvSpPr txBox="1"/>
+          <p:nvPr/>
+        </p:nvSpPr>
+        <p:spPr>
+          <a:xfrm>
+            <a:off x="731520" y="365760"/>
+            <a:ext cx="9144000" cy="640080"/>
+          </a:xfrm>
+          <a:prstGeom prst="rect">
+            <a:avLst/>
+          </a:prstGeom>
+          <a:noFill/>
+        </p:spPr>
+        <p:txBody>
+          <a:bodyPr wrap="square">
+            <a:spAutoFit/>
+          </a:bodyPr>
+          <a:lstStyle/>
+          <a:p>
+            <a:pPr algn="l">
+              <a:defRPr sz="3600" b="1">
+                <a:solidFill>
+                  <a:srgbClr val="89B4FA"/>
+                </a:solidFill>
+                <a:latin typeface="Yu Gothic UI"/>
+              </a:defRPr>
+            </a:pPr>
+            <a:r>
+              <a:t>まとめ</a:t>
+            </a:r>
+          </a:p>
+        </p:txBody>
+      </p:sp>
+      <p:sp>
+        <p:nvSpPr>
+          <p:cNvPr id="3" name="Rounded Rectangle 2"/>
+          <p:cNvSpPr/>
+          <p:nvPr/>
+        </p:nvSpPr>
+        <p:spPr>
+          <a:xfrm>
+            <a:off x="1097280" y="1371600"/>
+            <a:ext cx="9875520" cy="914400"/>
+          </a:xfrm>
+          <a:prstGeom prst="roundRect">
+            <a:avLst/>
+          </a:prstGeom>
+          <a:solidFill>
+            <a:srgbClr val="313244"/>
+          </a:solidFill>
+          <a:ln>
+            <a:noFill/>
+          </a:ln>
+        </p:spPr>
+        <p:style>
+          <a:lnRef idx="1">
+            <a:schemeClr val="accent1"/>
+          </a:lnRef>
+          <a:fillRef idx="3">
+            <a:schemeClr val="accent1"/>
+          </a:fillRef>
+          <a:effectRef idx="2">
+            <a:schemeClr val="accent1"/>
+          </a:effectRef>
+          <a:fontRef idx="minor">
+            <a:schemeClr val="lt1"/>
+          </a:fontRef>
+        </p:style>
+        <p:txBody>
+          <a:bodyPr rtlCol="0" anchor="ctr"/>
+          <a:lstStyle/>
+          <a:p>
+            <a:pPr algn="ctr"/>
+          </a:p>
+        </p:txBody>
+      </p:sp>
+      <p:sp>
+        <p:nvSpPr>
+          <p:cNvPr id="4" name="Oval 3"/>
+          <p:cNvSpPr/>
+          <p:nvPr/>
+        </p:nvSpPr>
+        <p:spPr>
+          <a:xfrm>
+            <a:off x="1371600" y="1444752"/>
+            <a:ext cx="822960" cy="822960"/>
+          </a:xfrm>
+          <a:prstGeom prst="ellipse">
+            <a:avLst/>
+          </a:prstGeom>
+          <a:solidFill>
+            <a:srgbClr val="A6E3A1"/>
+          </a:solidFill>
+          <a:ln>
+            <a:noFill/>
+          </a:ln>
+        </p:spPr>
+        <p:style>
+          <a:lnRef idx="1">
+            <a:schemeClr val="accent1"/>
+          </a:lnRef>
+          <a:fillRef idx="3">
+            <a:schemeClr val="accent1"/>
+          </a:fillRef>
+          <a:effectRef idx="2">
+            <a:schemeClr val="accent1"/>
+          </a:effectRef>
+          <a:fontRef idx="minor">
+            <a:schemeClr val="lt1"/>
+          </a:fontRef>
+        </p:style>
+        <p:txBody>
+          <a:bodyPr rtlCol="0" anchor="ctr"/>
+          <a:lstStyle/>
+          <a:p>
+            <a:pPr algn="ctr">
+              <a:defRPr sz="3200" b="1">
+                <a:solidFill>
+                  <a:srgbClr val="1E1E2E"/>
+                </a:solidFill>
+                <a:latin typeface="Yu Gothic UI"/>
+              </a:defRPr>
+            </a:pPr>
+            <a:r>
+              <a:t>1</a:t>
+            </a:r>
+          </a:p>
+        </p:txBody>
+      </p:sp>
+      <p:sp>
+        <p:nvSpPr>
+          <p:cNvPr id="5" name="TextBox 4"/>
+          <p:cNvSpPr txBox="1"/>
+          <p:nvPr/>
+        </p:nvSpPr>
+        <p:spPr>
+          <a:xfrm>
+            <a:off x="2560320" y="1554480"/>
+            <a:ext cx="7772400" cy="548640"/>
+          </a:xfrm>
+          <a:prstGeom prst="rect">
+            <a:avLst/>
+          </a:prstGeom>
+          <a:noFill/>
+        </p:spPr>
+        <p:txBody>
+          <a:bodyPr wrap="square">
+            <a:spAutoFit/>
+          </a:bodyPr>
+          <a:lstStyle/>
+          <a:p>
+            <a:pPr algn="l">
+              <a:defRPr sz="2400" b="1">
+                <a:solidFill>
+                  <a:srgbClr val="CDD6F4"/>
+                </a:solidFill>
+                <a:latin typeface="Yu Gothic UI"/>
+              </a:defRPr>
+            </a:pPr>
+            <a:r>
+              <a:t>未経験技術の学習コストがゼロに</a:t>
+            </a:r>
+          </a:p>
+        </p:txBody>
+      </p:sp>
+      <p:sp>
+        <p:nvSpPr>
+          <p:cNvPr id="6" name="Rounded Rectangle 5"/>
+          <p:cNvSpPr/>
+          <p:nvPr/>
+        </p:nvSpPr>
+        <p:spPr>
+          <a:xfrm>
+            <a:off x="1097280" y="2651760"/>
+            <a:ext cx="9875520" cy="914400"/>
+          </a:xfrm>
+          <a:prstGeom prst="roundRect">
+            <a:avLst/>
+          </a:prstGeom>
+          <a:solidFill>
+            <a:srgbClr val="313244"/>
+          </a:solidFill>
+          <a:ln>
+            <a:noFill/>
+          </a:ln>
+        </p:spPr>
+        <p:style>
+          <a:lnRef idx="1">
+            <a:schemeClr val="accent1"/>
+          </a:lnRef>
+          <a:fillRef idx="3">
+            <a:schemeClr val="accent1"/>
+          </a:fillRef>
+          <a:effectRef idx="2">
+            <a:schemeClr val="accent1"/>
+          </a:effectRef>
+          <a:fontRef idx="minor">
+            <a:schemeClr val="lt1"/>
+          </a:fontRef>
+        </p:style>
+        <p:txBody>
+          <a:bodyPr rtlCol="0" anchor="ctr"/>
+          <a:lstStyle/>
+          <a:p>
+            <a:pPr algn="ctr"/>
+          </a:p>
+        </p:txBody>
+      </p:sp>
+      <p:sp>
+        <p:nvSpPr>
+          <p:cNvPr id="7" name="Oval 6"/>
+          <p:cNvSpPr/>
+          <p:nvPr/>
+        </p:nvSpPr>
+        <p:spPr>
+          <a:xfrm>
+            <a:off x="1371600" y="2724912"/>
+            <a:ext cx="822960" cy="822960"/>
+          </a:xfrm>
+          <a:prstGeom prst="ellipse">
+            <a:avLst/>
+          </a:prstGeom>
+          <a:solidFill>
+            <a:srgbClr val="A6E3A1"/>
+          </a:solidFill>
+          <a:ln>
+            <a:noFill/>
+          </a:ln>
+        </p:spPr>
+        <p:style>
+          <a:lnRef idx="1">
+            <a:schemeClr val="accent1"/>
+          </a:lnRef>
+          <a:fillRef idx="3">
+            <a:schemeClr val="accent1"/>
+          </a:fillRef>
+          <a:effectRef idx="2">
+            <a:schemeClr val="accent1"/>
+          </a:effectRef>
+          <a:fontRef idx="minor">
+            <a:schemeClr val="lt1"/>
+          </a:fontRef>
+        </p:style>
+        <p:txBody>
+          <a:bodyPr rtlCol="0" anchor="ctr"/>
+          <a:lstStyle/>
+          <a:p>
+            <a:pPr algn="ctr">
+              <a:defRPr sz="3200" b="1">
+                <a:solidFill>
+                  <a:srgbClr val="1E1E2E"/>
+                </a:solidFill>
+                <a:latin typeface="Yu Gothic UI"/>
+              </a:defRPr>
+            </a:pPr>
+            <a:r>
+              <a:t>2</a:t>
+            </a:r>
+          </a:p>
+        </p:txBody>
+      </p:sp>
+      <p:sp>
+        <p:nvSpPr>
+          <p:cNvPr id="8" name="TextBox 7"/>
+          <p:cNvSpPr txBox="1"/>
+          <p:nvPr/>
+        </p:nvSpPr>
+        <p:spPr>
+          <a:xfrm>
+            <a:off x="2560320" y="2834640"/>
+            <a:ext cx="7772400" cy="548640"/>
+          </a:xfrm>
+          <a:prstGeom prst="rect">
+            <a:avLst/>
+          </a:prstGeom>
+          <a:noFill/>
+        </p:spPr>
+        <p:txBody>
+          <a:bodyPr wrap="square">
+            <a:spAutoFit/>
+          </a:bodyPr>
+          <a:lstStyle/>
+          <a:p>
+            <a:pPr algn="l">
+              <a:defRPr sz="2400" b="1">
+                <a:solidFill>
+                  <a:srgbClr val="CDD6F4"/>
+                </a:solidFill>
+                <a:latin typeface="Yu Gothic UI"/>
+              </a:defRPr>
+            </a:pPr>
+            <a:r>
+              <a:t>テスト工程が消滅（開発と同時に自動生成）</a:t>
+            </a:r>
+          </a:p>
+        </p:txBody>
+      </p:sp>
+      <p:sp>
+        <p:nvSpPr>
+          <p:cNvPr id="9" name="Rounded Rectangle 8"/>
+          <p:cNvSpPr/>
+          <p:nvPr/>
+        </p:nvSpPr>
+        <p:spPr>
+          <a:xfrm>
+            <a:off x="1097280" y="3931920"/>
+            <a:ext cx="9875520" cy="914400"/>
+          </a:xfrm>
+          <a:prstGeom prst="roundRect">
+            <a:avLst/>
+          </a:prstGeom>
+          <a:solidFill>
+            <a:srgbClr val="313244"/>
+          </a:solidFill>
+          <a:ln>
+            <a:noFill/>
+          </a:ln>
+        </p:spPr>
+        <p:style>
+          <a:lnRef idx="1">
+            <a:schemeClr val="accent1"/>
+          </a:lnRef>
+          <a:fillRef idx="3">
+            <a:schemeClr val="accent1"/>
+          </a:fillRef>
+          <a:effectRef idx="2">
+            <a:schemeClr val="accent1"/>
+          </a:effectRef>
+          <a:fontRef idx="minor">
+            <a:schemeClr val="lt1"/>
+          </a:fontRef>
+        </p:style>
+        <p:txBody>
+          <a:bodyPr rtlCol="0" anchor="ctr"/>
+          <a:lstStyle/>
+          <a:p>
+            <a:pPr algn="ctr"/>
+          </a:p>
+        </p:txBody>
+      </p:sp>
+      <p:sp>
+        <p:nvSpPr>
+          <p:cNvPr id="10" name="Oval 9"/>
+          <p:cNvSpPr/>
+          <p:nvPr/>
+        </p:nvSpPr>
+        <p:spPr>
+          <a:xfrm>
+            <a:off x="1371600" y="4005072"/>
+            <a:ext cx="822960" cy="822960"/>
+          </a:xfrm>
+          <a:prstGeom prst="ellipse">
+            <a:avLst/>
+          </a:prstGeom>
+          <a:solidFill>
+            <a:srgbClr val="A6E3A1"/>
+          </a:solidFill>
+          <a:ln>
+            <a:noFill/>
+          </a:ln>
+        </p:spPr>
+        <p:style>
+          <a:lnRef idx="1">
+            <a:schemeClr val="accent1"/>
+          </a:lnRef>
+          <a:fillRef idx="3">
+            <a:schemeClr val="accent1"/>
+          </a:fillRef>
+          <a:effectRef idx="2">
+            <a:schemeClr val="accent1"/>
+          </a:effectRef>
+          <a:fontRef idx="minor">
+            <a:schemeClr val="lt1"/>
+          </a:fontRef>
+        </p:style>
+        <p:txBody>
+          <a:bodyPr rtlCol="0" anchor="ctr"/>
+          <a:lstStyle/>
+          <a:p>
+            <a:pPr algn="ctr">
+              <a:defRPr sz="3200" b="1">
+                <a:solidFill>
+                  <a:srgbClr val="1E1E2E"/>
+                </a:solidFill>
+                <a:latin typeface="Yu Gothic UI"/>
+              </a:defRPr>
+            </a:pPr>
+            <a:r>
+              <a:t>3</a:t>
+            </a:r>
+          </a:p>
+        </p:txBody>
+      </p:sp>
+      <p:sp>
+        <p:nvSpPr>
+          <p:cNvPr id="11" name="TextBox 10"/>
+          <p:cNvSpPr txBox="1"/>
+          <p:nvPr/>
+        </p:nvSpPr>
+        <p:spPr>
+          <a:xfrm>
+            <a:off x="2560320" y="4114800"/>
+            <a:ext cx="7772400" cy="548640"/>
+          </a:xfrm>
+          <a:prstGeom prst="rect">
+            <a:avLst/>
+          </a:prstGeom>
+          <a:noFill/>
+        </p:spPr>
+        <p:txBody>
+          <a:bodyPr wrap="square">
+            <a:spAutoFit/>
+          </a:bodyPr>
+          <a:lstStyle/>
+          <a:p>
+            <a:pPr algn="l">
+              <a:defRPr sz="2400" b="1">
+                <a:solidFill>
+                  <a:srgbClr val="CDD6F4"/>
+                </a:solidFill>
+                <a:latin typeface="Yu Gothic UI"/>
+              </a:defRPr>
+            </a:pPr>
+            <a:r>
+              <a:t>開発期間が 6〜9分の1 に短縮</a:t>
+            </a:r>
+          </a:p>
+        </p:txBody>
+      </p:sp>
+      <p:sp>
+        <p:nvSpPr>
+          <p:cNvPr id="12" name="Rounded Rectangle 11"/>
+          <p:cNvSpPr/>
+          <p:nvPr/>
+        </p:nvSpPr>
+        <p:spPr>
+          <a:xfrm>
+            <a:off x="1828800" y="5303520"/>
+            <a:ext cx="8503920" cy="914400"/>
+          </a:xfrm>
+          <a:prstGeom prst="roundRect">
+            <a:avLst/>
+          </a:prstGeom>
+          <a:solidFill>
+            <a:srgbClr val="89B4FA"/>
+          </a:solidFill>
+          <a:ln>
+            <a:noFill/>
+          </a:ln>
+        </p:spPr>
+        <p:style>
+          <a:lnRef idx="1">
+            <a:schemeClr val="accent1"/>
+          </a:lnRef>
+          <a:fillRef idx="3">
+            <a:schemeClr val="accent1"/>
+          </a:fillRef>
+          <a:effectRef idx="2">
+            <a:schemeClr val="accent1"/>
+          </a:effectRef>
+          <a:fontRef idx="minor">
+            <a:schemeClr val="lt1"/>
+          </a:fontRef>
+        </p:style>
+        <p:txBody>
+          <a:bodyPr rtlCol="0" anchor="ctr" wrap="square"/>
+          <a:lstStyle/>
+          <a:p>
+            <a:pPr algn="ctr">
+              <a:defRPr sz="2200">
+                <a:solidFill>
+                  <a:srgbClr val="1E1E2E"/>
+                </a:solidFill>
+                <a:latin typeface="Yu Gothic UI"/>
+              </a:defRPr>
+            </a:pPr>
+            <a:r>
+              <a:t>AI駆動開発は「人間の潜在能力を引き出すエンジン」</a:t>
+            </a:r>
+          </a:p>
+        </p:txBody>
+      </p:sp>
+      <p:sp>
+        <p:nvSpPr>
+          <p:cNvPr id="13" name="TextBox 12"/>
+          <p:cNvSpPr txBox="1"/>
+          <p:nvPr/>
+        </p:nvSpPr>
+        <p:spPr>
+          <a:xfrm>
+            <a:off x="3200400" y="6400800"/>
+            <a:ext cx="5486400" cy="365760"/>
+          </a:xfrm>
+          <a:prstGeom prst="rect">
+            <a:avLst/>
+          </a:prstGeom>
+          <a:noFill/>
+        </p:spPr>
+        <p:txBody>
+          <a:bodyPr wrap="square">
+            <a:spAutoFit/>
+          </a:bodyPr>
+          <a:lstStyle/>
+          <a:p>
+            <a:pPr algn="ctr">
+              <a:defRPr sz="1800" b="0">
+                <a:solidFill>
+                  <a:srgbClr val="6C7086"/>
+                </a:solidFill>
+                <a:latin typeface="Yu Gothic UI"/>
+              </a:defRPr>
+            </a:pPr>
+            <a:r>
+              <a:t>ご清聴ありがとうございました</a:t>
             </a:r>
           </a:p>
         </p:txBody>
@@ -3306,7 +3823,7 @@
         <p:spPr>
           <a:xfrm>
             <a:off x="731520" y="365760"/>
-            <a:ext cx="9144000" cy="731520"/>
+            <a:ext cx="9144000" cy="640080"/>
           </a:xfrm>
           <a:prstGeom prst="rect">
             <a:avLst/>
@@ -3341,8 +3858,8 @@
         </p:nvSpPr>
         <p:spPr>
           <a:xfrm>
-            <a:off x="731520" y="1371600"/>
-            <a:ext cx="5029200" cy="4754880"/>
+            <a:off x="731520" y="1280160"/>
+            <a:ext cx="5029200" cy="4846320"/>
           </a:xfrm>
           <a:prstGeom prst="roundRect">
             <a:avLst/>
@@ -3384,8 +3901,8 @@
         </p:nvSpPr>
         <p:spPr>
           <a:xfrm>
-            <a:off x="1097280" y="1554480"/>
-            <a:ext cx="4389120" cy="4389120"/>
+            <a:off x="1097280" y="1463040"/>
+            <a:ext cx="4389120" cy="4572000"/>
           </a:xfrm>
           <a:prstGeom prst="rect">
             <a:avLst/>
@@ -3416,7 +3933,7 @@
           <a:p>
             <a:pPr algn="l">
               <a:spcAft>
-                <a:spcPts val="1600"/>
+                <a:spcPts val="2000"/>
               </a:spcAft>
               <a:defRPr sz="2000" b="1">
                 <a:solidFill>
@@ -3427,6 +3944,22 @@
             </a:pPr>
             <a:r>
               <a:t>27歳 / IT業界 5年目</a:t>
+            </a:r>
+          </a:p>
+          <a:p>
+            <a:pPr algn="l">
+              <a:spcAft>
+                <a:spcPts val="200"/>
+              </a:spcAft>
+              <a:defRPr sz="1300" b="0">
+                <a:solidFill>
+                  <a:srgbClr val="6C7086"/>
+                </a:solidFill>
+                <a:latin typeface="Yu Gothic UI"/>
+              </a:defRPr>
+            </a:pPr>
+            <a:r>
+              <a:t>IT業界経験</a:t>
             </a:r>
           </a:p>
           <a:p>
@@ -3434,20 +3967,39 @@
               <a:spcAft>
                 <a:spcPts val="400"/>
               </a:spcAft>
-              <a:defRPr sz="800" b="0">
+              <a:defRPr sz="1600" b="0">
                 <a:solidFill>
                   <a:srgbClr val="CDD6F4"/>
                 </a:solidFill>
                 <a:latin typeface="Yu Gothic UI"/>
               </a:defRPr>
             </a:pPr>
+            <a:r>
+              <a:t>パッケージ開発（約3年）</a:t>
+            </a:r>
+          </a:p>
+          <a:p>
+            <a:pPr algn="l">
+              <a:spcAft>
+                <a:spcPts val="1600"/>
+              </a:spcAft>
+              <a:defRPr sz="1600" b="0">
+                <a:solidFill>
+                  <a:srgbClr val="CDD6F4"/>
+                </a:solidFill>
+                <a:latin typeface="Yu Gothic UI"/>
+              </a:defRPr>
+            </a:pPr>
+            <a:r>
+              <a:t>ローコード開発（約3年）</a:t>
+            </a:r>
           </a:p>
           <a:p>
             <a:pPr algn="l">
               <a:spcAft>
                 <a:spcPts val="200"/>
               </a:spcAft>
-              <a:defRPr sz="1400" b="0">
+              <a:defRPr sz="1300" b="0">
                 <a:solidFill>
                   <a:srgbClr val="6C7086"/>
                 </a:solidFill>
@@ -3455,23 +4007,23 @@
               </a:defRPr>
             </a:pPr>
             <a:r>
-              <a:t>IT業界経験</a:t>
+              <a:t>スクラッチ開発経験</a:t>
             </a:r>
           </a:p>
           <a:p>
             <a:pPr algn="l">
               <a:spcAft>
-                <a:spcPts val="1200"/>
+                <a:spcPts val="1600"/>
               </a:spcAft>
-              <a:defRPr sz="1600" b="0">
-                <a:solidFill>
-                  <a:srgbClr val="CDD6F4"/>
-                </a:solidFill>
-                <a:latin typeface="Yu Gothic UI"/>
-              </a:defRPr>
-            </a:pPr>
-            <a:r>
-              <a:t>パッケージ開発（約3年）/ ローコード開発（約3年）</a:t>
+              <a:defRPr sz="1600" b="1">
+                <a:solidFill>
+                  <a:srgbClr val="F9E2AF"/>
+                </a:solidFill>
+                <a:latin typeface="Yu Gothic UI"/>
+              </a:defRPr>
+            </a:pPr>
+            <a:r>
+              <a:t>なし（ユメログが初）</a:t>
             </a:r>
           </a:p>
           <a:p>
@@ -3479,7 +4031,7 @@
               <a:spcAft>
                 <a:spcPts val="200"/>
               </a:spcAft>
-              <a:defRPr sz="1400" b="0">
+              <a:defRPr sz="1300" b="0">
                 <a:solidFill>
                   <a:srgbClr val="6C7086"/>
                 </a:solidFill>
@@ -3487,13 +4039,13 @@
               </a:defRPr>
             </a:pPr>
             <a:r>
-              <a:t>スクラッチ開発経験</a:t>
+              <a:t>Flutter / Dart 経験</a:t>
             </a:r>
           </a:p>
           <a:p>
             <a:pPr algn="l">
               <a:spcAft>
-                <a:spcPts val="1200"/>
+                <a:spcPts val="600"/>
               </a:spcAft>
               <a:defRPr sz="1600" b="1">
                 <a:solidFill>
@@ -3503,38 +4055,6 @@
               </a:defRPr>
             </a:pPr>
             <a:r>
-              <a:t>なし（ユメログが初のスクラッチ開発）</a:t>
-            </a:r>
-          </a:p>
-          <a:p>
-            <a:pPr algn="l">
-              <a:spcAft>
-                <a:spcPts val="200"/>
-              </a:spcAft>
-              <a:defRPr sz="1400" b="0">
-                <a:solidFill>
-                  <a:srgbClr val="6C7086"/>
-                </a:solidFill>
-                <a:latin typeface="Yu Gothic UI"/>
-              </a:defRPr>
-            </a:pPr>
-            <a:r>
-              <a:t>Flutter / Dart 経験</a:t>
-            </a:r>
-          </a:p>
-          <a:p>
-            <a:pPr algn="l">
-              <a:spcAft>
-                <a:spcPts val="1200"/>
-              </a:spcAft>
-              <a:defRPr sz="1600" b="1">
-                <a:solidFill>
-                  <a:srgbClr val="F9E2AF"/>
-                </a:solidFill>
-                <a:latin typeface="Yu Gothic UI"/>
-              </a:defRPr>
-            </a:pPr>
-            <a:r>
               <a:t>なし（ユメログが初）</a:t>
             </a:r>
           </a:p>
@@ -3548,8 +4068,8 @@
         </p:nvSpPr>
         <p:spPr>
           <a:xfrm>
-            <a:off x="6217920" y="1371600"/>
-            <a:ext cx="5212080" cy="4754880"/>
+            <a:off x="6217920" y="1280160"/>
+            <a:ext cx="5212080" cy="4846320"/>
           </a:xfrm>
           <a:prstGeom prst="roundRect">
             <a:avLst/>
@@ -3591,8 +4111,8 @@
         </p:nvSpPr>
         <p:spPr>
           <a:xfrm>
-            <a:off x="6583680" y="1554480"/>
-            <a:ext cx="4572000" cy="4389120"/>
+            <a:off x="6583680" y="1463040"/>
+            <a:ext cx="4572000" cy="4572000"/>
           </a:xfrm>
           <a:prstGeom prst="rect">
             <a:avLst/>
@@ -3607,7 +4127,7 @@
           <a:p>
             <a:pPr algn="l">
               <a:spcAft>
-                <a:spcPts val="2000"/>
+                <a:spcPts val="2400"/>
               </a:spcAft>
               <a:defRPr sz="2200" b="1">
                 <a:solidFill>
@@ -3617,7 +4137,7 @@
               </a:defRPr>
             </a:pPr>
             <a:r>
-              <a:t>このLTで伝えたいこと</a:t>
+              <a:t>今日のゴール</a:t>
             </a:r>
           </a:p>
           <a:p>
@@ -3636,70 +4156,70 @@
           <a:p>
             <a:pPr algn="l">
               <a:spcAft>
-                <a:spcPts val="1600"/>
+                <a:spcPts val="400"/>
               </a:spcAft>
-              <a:defRPr sz="1800" b="0">
-                <a:solidFill>
-                  <a:srgbClr val="CDD6F4"/>
-                </a:solidFill>
-                <a:latin typeface="Yu Gothic UI"/>
-              </a:defRPr>
-            </a:pPr>
-            <a:r>
-              <a:t>1. 夢を行動に変えるアプリを作った話</a:t>
-            </a:r>
-          </a:p>
-          <a:p>
-            <a:pPr algn="l">
-              <a:spcAft>
-                <a:spcPts val="1600"/>
-              </a:spcAft>
-              <a:defRPr sz="1800" b="0">
-                <a:solidFill>
-                  <a:srgbClr val="CDD6F4"/>
-                </a:solidFill>
-                <a:latin typeface="Yu Gothic UI"/>
-              </a:defRPr>
-            </a:pPr>
-            <a:r>
-              <a:t>2. AI駆動開発で実現した驚異的な生産性</a:t>
-            </a:r>
-          </a:p>
-          <a:p>
-            <a:pPr algn="l">
-              <a:spcAft>
-                <a:spcPts val="1600"/>
-              </a:spcAft>
-              <a:defRPr sz="1800" b="0">
-                <a:solidFill>
-                  <a:srgbClr val="CDD6F4"/>
-                </a:solidFill>
-                <a:latin typeface="Yu Gothic UI"/>
-              </a:defRPr>
-            </a:pPr>
-            <a:r>
-              <a:t>3. 未経験技術でもプロダクトが作れる</a:t>
-            </a:r>
-          </a:p>
-          <a:p>
-            <a:pPr algn="l">
-              <a:spcAft>
-                <a:spcPts val="800"/>
-              </a:spcAft>
-              <a:defRPr sz="1200" b="0">
-                <a:solidFill>
-                  <a:srgbClr val="CDD6F4"/>
-                </a:solidFill>
-                <a:latin typeface="Yu Gothic UI"/>
-              </a:defRPr>
-            </a:pPr>
+              <a:defRPr sz="2000" b="0">
+                <a:solidFill>
+                  <a:srgbClr val="A6ADC8"/>
+                </a:solidFill>
+                <a:latin typeface="Yu Gothic UI"/>
+              </a:defRPr>
+            </a:pPr>
+            <a:r>
+              <a:t>AI駆動開発で</a:t>
+            </a:r>
           </a:p>
           <a:p>
             <a:pPr algn="l">
               <a:spcAft>
                 <a:spcPts val="400"/>
               </a:spcAft>
-              <a:defRPr sz="1600" b="0">
+              <a:defRPr sz="2400" b="1">
+                <a:solidFill>
+                  <a:srgbClr val="CDD6F4"/>
+                </a:solidFill>
+                <a:latin typeface="Yu Gothic UI"/>
+              </a:defRPr>
+            </a:pPr>
+            <a:r>
+              <a:t>何がどれだけ変わるのか</a:t>
+            </a:r>
+          </a:p>
+          <a:p>
+            <a:pPr algn="l">
+              <a:spcAft>
+                <a:spcPts val="2800"/>
+              </a:spcAft>
+              <a:defRPr sz="2000" b="0">
+                <a:solidFill>
+                  <a:srgbClr val="A6ADC8"/>
+                </a:solidFill>
+                <a:latin typeface="Yu Gothic UI"/>
+              </a:defRPr>
+            </a:pPr>
+            <a:r>
+              <a:t>を数字で示す</a:t>
+            </a:r>
+          </a:p>
+          <a:p>
+            <a:pPr algn="l">
+              <a:spcAft>
+                <a:spcPts val="400"/>
+              </a:spcAft>
+              <a:defRPr sz="800" b="0">
+                <a:solidFill>
+                  <a:srgbClr val="CDD6F4"/>
+                </a:solidFill>
+                <a:latin typeface="Yu Gothic UI"/>
+              </a:defRPr>
+            </a:pPr>
+          </a:p>
+          <a:p>
+            <a:pPr algn="l">
+              <a:spcAft>
+                <a:spcPts val="400"/>
+              </a:spcAft>
+              <a:defRPr sz="1800" b="0">
                 <a:solidFill>
                   <a:srgbClr val="6C7086"/>
                 </a:solidFill>
@@ -3707,7 +4227,7 @@
               </a:defRPr>
             </a:pPr>
             <a:r>
-              <a:t>スクラッチ開発未経験 + Flutter未経験</a:t>
+              <a:t>そして、その成果物を</a:t>
             </a:r>
           </a:p>
           <a:p>
@@ -3723,7 +4243,7 @@
               </a:defRPr>
             </a:pPr>
             <a:r>
-              <a:t>→ 3週間でプロダクション品質のアプリを完成</a:t>
+              <a:t>皆さんの目で確かめてもらう</a:t>
             </a:r>
           </a:p>
         </p:txBody>
@@ -3763,7 +4283,7 @@
         <p:spPr>
           <a:xfrm>
             <a:off x="731520" y="365760"/>
-            <a:ext cx="9144000" cy="731520"/>
+            <a:ext cx="9144000" cy="640080"/>
           </a:xfrm>
           <a:prstGeom prst="rect">
             <a:avLst/>
@@ -3785,7 +4305,7 @@
               </a:defRPr>
             </a:pPr>
             <a:r>
-              <a:t>こんな悩み、ありませんか？</a:t>
+              <a:t>Before: もし従来の開発で作ったら？</a:t>
             </a:r>
           </a:p>
         </p:txBody>
@@ -3798,8 +4318,8 @@
         </p:nvSpPr>
         <p:spPr>
           <a:xfrm>
-            <a:off x="1097280" y="1463040"/>
-            <a:ext cx="9875520" cy="822960"/>
+            <a:off x="731520" y="1371600"/>
+            <a:ext cx="10515600" cy="1645920"/>
           </a:xfrm>
           <a:prstGeom prst="roundRect">
             <a:avLst/>
@@ -3841,22 +4361,41 @@
         </p:nvSpPr>
         <p:spPr>
           <a:xfrm>
-            <a:off x="1463040" y="1600200"/>
-            <a:ext cx="9144000" cy="548640"/>
-          </a:xfrm>
-          <a:prstGeom prst="rect">
-            <a:avLst/>
-          </a:prstGeom>
-          <a:noFill/>
-        </p:spPr>
-        <p:txBody>
-          <a:bodyPr wrap="square">
-            <a:spAutoFit/>
-          </a:bodyPr>
-          <a:lstStyle/>
-          <a:p>
-            <a:pPr algn="l">
-              <a:defRPr sz="2200" b="0">
+            <a:off x="1097280" y="1554480"/>
+            <a:ext cx="9875520" cy="1371600"/>
+          </a:xfrm>
+          <a:prstGeom prst="rect">
+            <a:avLst/>
+          </a:prstGeom>
+          <a:noFill/>
+        </p:spPr>
+        <p:txBody>
+          <a:bodyPr wrap="square">
+            <a:spAutoFit/>
+          </a:bodyPr>
+          <a:lstStyle/>
+          <a:p>
+            <a:pPr algn="l">
+              <a:spcAft>
+                <a:spcPts val="1200"/>
+              </a:spcAft>
+              <a:defRPr sz="2000" b="1">
+                <a:solidFill>
+                  <a:srgbClr val="89B4FA"/>
+                </a:solidFill>
+                <a:latin typeface="Yu Gothic UI"/>
+              </a:defRPr>
+            </a:pPr>
+            <a:r>
+              <a:t>今回作ったアプリの規模</a:t>
+            </a:r>
+          </a:p>
+          <a:p>
+            <a:pPr algn="l">
+              <a:spcAft>
+                <a:spcPts val="400"/>
+              </a:spcAft>
+              <a:defRPr sz="1800" b="0">
                 <a:solidFill>
                   <a:srgbClr val="CDD6F4"/>
                 </a:solidFill>
@@ -3864,21 +4403,57 @@
               </a:defRPr>
             </a:pPr>
             <a:r>
-              <a:t>  やりたいことはあるけど、何から始めればいいか分からない</a:t>
-            </a:r>
-          </a:p>
-        </p:txBody>
-      </p:sp>
-      <p:sp>
-        <p:nvSpPr>
-          <p:cNvPr id="5" name="Rounded Rectangle 4"/>
+              <a:t>コード約48,000行  /  テスト813件  /  32機能  /  8画面  /  6テーブル</a:t>
+            </a:r>
+          </a:p>
+        </p:txBody>
+      </p:sp>
+      <p:sp>
+        <p:nvSpPr>
+          <p:cNvPr id="5" name="TextBox 4"/>
+          <p:cNvSpPr txBox="1"/>
+          <p:nvPr/>
+        </p:nvSpPr>
+        <p:spPr>
+          <a:xfrm>
+            <a:off x="731520" y="3474720"/>
+            <a:ext cx="10058400" cy="457200"/>
+          </a:xfrm>
+          <a:prstGeom prst="rect">
+            <a:avLst/>
+          </a:prstGeom>
+          <a:noFill/>
+        </p:spPr>
+        <p:txBody>
+          <a:bodyPr wrap="square">
+            <a:spAutoFit/>
+          </a:bodyPr>
+          <a:lstStyle/>
+          <a:p>
+            <a:pPr algn="l">
+              <a:defRPr sz="1600" b="0">
+                <a:solidFill>
+                  <a:srgbClr val="6C7086"/>
+                </a:solidFill>
+                <a:latin typeface="Yu Gothic UI"/>
+              </a:defRPr>
+            </a:pPr>
+            <a:r>
+              <a:t>IPA ソフトウェア開発データ白書 + COCOMO II モデルで試算すると…</a:t>
+            </a:r>
+          </a:p>
+        </p:txBody>
+      </p:sp>
+      <p:sp>
+        <p:nvSpPr>
+          <p:cNvPr id="6" name="Rounded Rectangle 5"/>
           <p:cNvSpPr/>
           <p:nvPr/>
         </p:nvSpPr>
         <p:spPr>
           <a:xfrm>
-            <a:off x="1097280" y="2560320"/>
-            <a:ext cx="9875520" cy="822960"/>
+            <a:off x="731520" y="3977640"/>
+            <a:ext cx="10515600" cy="731520"/>
           </a:xfrm>
           <a:prstGeom prst="roundRect">
             <a:avLst/>
@@ -3914,28 +4489,28 @@
       </p:sp>
       <p:sp>
         <p:nvSpPr>
-          <p:cNvPr id="6" name="TextBox 5"/>
-          <p:cNvSpPr txBox="1"/>
-          <p:nvPr/>
-        </p:nvSpPr>
-        <p:spPr>
-          <a:xfrm>
-            <a:off x="1463040" y="2697480"/>
-            <a:ext cx="9144000" cy="548640"/>
-          </a:xfrm>
-          <a:prstGeom prst="rect">
-            <a:avLst/>
-          </a:prstGeom>
-          <a:noFill/>
-        </p:spPr>
-        <p:txBody>
-          <a:bodyPr wrap="square">
-            <a:spAutoFit/>
-          </a:bodyPr>
-          <a:lstStyle/>
-          <a:p>
-            <a:pPr algn="l">
-              <a:defRPr sz="2200" b="0">
+          <p:cNvPr id="7" name="TextBox 6"/>
+          <p:cNvSpPr txBox="1"/>
+          <p:nvPr/>
+        </p:nvSpPr>
+        <p:spPr>
+          <a:xfrm>
+            <a:off x="1097280" y="4114800"/>
+            <a:ext cx="2743200" cy="457200"/>
+          </a:xfrm>
+          <a:prstGeom prst="rect">
+            <a:avLst/>
+          </a:prstGeom>
+          <a:noFill/>
+        </p:spPr>
+        <p:txBody>
+          <a:bodyPr wrap="square">
+            <a:spAutoFit/>
+          </a:bodyPr>
+          <a:lstStyle/>
+          <a:p>
+            <a:pPr algn="l">
+              <a:defRPr sz="1800" b="0">
                 <a:solidFill>
                   <a:srgbClr val="CDD6F4"/>
                 </a:solidFill>
@@ -3943,21 +4518,201 @@
               </a:defRPr>
             </a:pPr>
             <a:r>
-              <a:t>  目標を立てても、いつの間にか忘れてしまう</a:t>
-            </a:r>
-          </a:p>
-        </p:txBody>
-      </p:sp>
-      <p:sp>
-        <p:nvSpPr>
-          <p:cNvPr id="7" name="Rounded Rectangle 6"/>
+              <a:t>フレームワーク学習</a:t>
+            </a:r>
+          </a:p>
+        </p:txBody>
+      </p:sp>
+      <p:sp>
+        <p:nvSpPr>
+          <p:cNvPr id="8" name="TextBox 7"/>
+          <p:cNvSpPr txBox="1"/>
+          <p:nvPr/>
+        </p:nvSpPr>
+        <p:spPr>
+          <a:xfrm>
+            <a:off x="4114800" y="4114800"/>
+            <a:ext cx="2286000" cy="457200"/>
+          </a:xfrm>
+          <a:prstGeom prst="rect">
+            <a:avLst/>
+          </a:prstGeom>
+          <a:noFill/>
+        </p:spPr>
+        <p:txBody>
+          <a:bodyPr wrap="square">
+            <a:spAutoFit/>
+          </a:bodyPr>
+          <a:lstStyle/>
+          <a:p>
+            <a:pPr algn="l">
+              <a:defRPr sz="2000" b="1">
+                <a:solidFill>
+                  <a:srgbClr val="89B4FA"/>
+                </a:solidFill>
+                <a:latin typeface="Yu Gothic UI"/>
+              </a:defRPr>
+            </a:pPr>
+            <a:r>
+              <a:t>1〜2ヶ月</a:t>
+            </a:r>
+          </a:p>
+        </p:txBody>
+      </p:sp>
+      <p:sp>
+        <p:nvSpPr>
+          <p:cNvPr id="9" name="TextBox 8"/>
+          <p:cNvSpPr txBox="1"/>
+          <p:nvPr/>
+        </p:nvSpPr>
+        <p:spPr>
+          <a:xfrm>
+            <a:off x="6858000" y="4114800"/>
+            <a:ext cx="4114800" cy="457200"/>
+          </a:xfrm>
+          <a:prstGeom prst="rect">
+            <a:avLst/>
+          </a:prstGeom>
+          <a:noFill/>
+        </p:spPr>
+        <p:txBody>
+          <a:bodyPr wrap="square">
+            <a:spAutoFit/>
+          </a:bodyPr>
+          <a:lstStyle/>
+          <a:p>
+            <a:pPr algn="l">
+              <a:defRPr sz="1400" b="0">
+                <a:solidFill>
+                  <a:srgbClr val="6C7086"/>
+                </a:solidFill>
+                <a:latin typeface="Yu Gothic UI"/>
+              </a:defRPr>
+            </a:pPr>
+            <a:r>
+              <a:t>Flutter / Dart / Drift / Riverpod を学ぶ</a:t>
+            </a:r>
+          </a:p>
+        </p:txBody>
+      </p:sp>
+      <p:sp>
+        <p:nvSpPr>
+          <p:cNvPr id="10" name="TextBox 9"/>
+          <p:cNvSpPr txBox="1"/>
+          <p:nvPr/>
+        </p:nvSpPr>
+        <p:spPr>
+          <a:xfrm>
+            <a:off x="1097280" y="4937760"/>
+            <a:ext cx="2743200" cy="457200"/>
+          </a:xfrm>
+          <a:prstGeom prst="rect">
+            <a:avLst/>
+          </a:prstGeom>
+          <a:noFill/>
+        </p:spPr>
+        <p:txBody>
+          <a:bodyPr wrap="square">
+            <a:spAutoFit/>
+          </a:bodyPr>
+          <a:lstStyle/>
+          <a:p>
+            <a:pPr algn="l">
+              <a:defRPr sz="1800" b="0">
+                <a:solidFill>
+                  <a:srgbClr val="CDD6F4"/>
+                </a:solidFill>
+                <a:latin typeface="Yu Gothic UI"/>
+              </a:defRPr>
+            </a:pPr>
+            <a:r>
+              <a:t>設計・開発・テスト</a:t>
+            </a:r>
+          </a:p>
+        </p:txBody>
+      </p:sp>
+      <p:sp>
+        <p:nvSpPr>
+          <p:cNvPr id="11" name="TextBox 10"/>
+          <p:cNvSpPr txBox="1"/>
+          <p:nvPr/>
+        </p:nvSpPr>
+        <p:spPr>
+          <a:xfrm>
+            <a:off x="4114800" y="4937760"/>
+            <a:ext cx="2286000" cy="457200"/>
+          </a:xfrm>
+          <a:prstGeom prst="rect">
+            <a:avLst/>
+          </a:prstGeom>
+          <a:noFill/>
+        </p:spPr>
+        <p:txBody>
+          <a:bodyPr wrap="square">
+            <a:spAutoFit/>
+          </a:bodyPr>
+          <a:lstStyle/>
+          <a:p>
+            <a:pPr algn="l">
+              <a:defRPr sz="2000" b="1">
+                <a:solidFill>
+                  <a:srgbClr val="89B4FA"/>
+                </a:solidFill>
+                <a:latin typeface="Yu Gothic UI"/>
+              </a:defRPr>
+            </a:pPr>
+            <a:r>
+              <a:t>4〜7ヶ月</a:t>
+            </a:r>
+          </a:p>
+        </p:txBody>
+      </p:sp>
+      <p:sp>
+        <p:nvSpPr>
+          <p:cNvPr id="12" name="TextBox 11"/>
+          <p:cNvSpPr txBox="1"/>
+          <p:nvPr/>
+        </p:nvSpPr>
+        <p:spPr>
+          <a:xfrm>
+            <a:off x="6858000" y="4937760"/>
+            <a:ext cx="4114800" cy="457200"/>
+          </a:xfrm>
+          <a:prstGeom prst="rect">
+            <a:avLst/>
+          </a:prstGeom>
+          <a:noFill/>
+        </p:spPr>
+        <p:txBody>
+          <a:bodyPr wrap="square">
+            <a:spAutoFit/>
+          </a:bodyPr>
+          <a:lstStyle/>
+          <a:p>
+            <a:pPr algn="l">
+              <a:defRPr sz="1400" b="0">
+                <a:solidFill>
+                  <a:srgbClr val="6C7086"/>
+                </a:solidFill>
+                <a:latin typeface="Yu Gothic UI"/>
+              </a:defRPr>
+            </a:pPr>
+            <a:r>
+              <a:t>生産性 50〜100行/人日（IPA中央値）</a:t>
+            </a:r>
+          </a:p>
+        </p:txBody>
+      </p:sp>
+      <p:sp>
+        <p:nvSpPr>
+          <p:cNvPr id="13" name="Rounded Rectangle 12"/>
           <p:cNvSpPr/>
           <p:nvPr/>
         </p:nvSpPr>
         <p:spPr>
           <a:xfrm>
-            <a:off x="1097280" y="3657600"/>
-            <a:ext cx="9875520" cy="822960"/>
+            <a:off x="731520" y="5623560"/>
+            <a:ext cx="10515600" cy="731520"/>
           </a:xfrm>
           <a:prstGeom prst="roundRect">
             <a:avLst/>
@@ -3993,129 +4748,108 @@
       </p:sp>
       <p:sp>
         <p:nvSpPr>
-          <p:cNvPr id="8" name="TextBox 7"/>
-          <p:cNvSpPr txBox="1"/>
-          <p:nvPr/>
-        </p:nvSpPr>
-        <p:spPr>
-          <a:xfrm>
-            <a:off x="1463040" y="3794760"/>
-            <a:ext cx="9144000" cy="548640"/>
-          </a:xfrm>
-          <a:prstGeom prst="rect">
-            <a:avLst/>
-          </a:prstGeom>
-          <a:noFill/>
-        </p:spPr>
-        <p:txBody>
-          <a:bodyPr wrap="square">
-            <a:spAutoFit/>
-          </a:bodyPr>
-          <a:lstStyle/>
-          <a:p>
-            <a:pPr algn="l">
-              <a:defRPr sz="2200" b="0">
-                <a:solidFill>
-                  <a:srgbClr val="CDD6F4"/>
-                </a:solidFill>
-                <a:latin typeface="Yu Gothic UI"/>
-              </a:defRPr>
-            </a:pPr>
-            <a:r>
-              <a:t>  毎日忙しくて、夢に向かう時間が取れない</a:t>
-            </a:r>
-          </a:p>
-        </p:txBody>
-      </p:sp>
-      <p:sp>
-        <p:nvSpPr>
-          <p:cNvPr id="9" name="TextBox 8"/>
-          <p:cNvSpPr txBox="1"/>
-          <p:nvPr/>
-        </p:nvSpPr>
-        <p:spPr>
-          <a:xfrm>
-            <a:off x="5029200" y="4572000"/>
-            <a:ext cx="1828800" cy="548640"/>
-          </a:xfrm>
-          <a:prstGeom prst="rect">
-            <a:avLst/>
-          </a:prstGeom>
-          <a:noFill/>
-        </p:spPr>
-        <p:txBody>
-          <a:bodyPr wrap="square">
-            <a:spAutoFit/>
-          </a:bodyPr>
-          <a:lstStyle/>
-          <a:p>
-            <a:pPr algn="ctr">
-              <a:defRPr sz="2800" b="1">
-                <a:solidFill>
-                  <a:srgbClr val="89B4FA"/>
-                </a:solidFill>
-                <a:latin typeface="Yu Gothic UI"/>
-              </a:defRPr>
-            </a:pPr>
-            <a:r>
-              <a:t>       </a:t>
-            </a:r>
-          </a:p>
-        </p:txBody>
-      </p:sp>
-      <p:sp>
-        <p:nvSpPr>
-          <p:cNvPr id="10" name="Rounded Rectangle 9"/>
-          <p:cNvSpPr/>
-          <p:nvPr/>
-        </p:nvSpPr>
-        <p:spPr>
-          <a:xfrm>
-            <a:off x="2286000" y="5029200"/>
-            <a:ext cx="7315200" cy="1097280"/>
-          </a:xfrm>
-          <a:prstGeom prst="roundRect">
-            <a:avLst/>
-          </a:prstGeom>
-          <a:solidFill>
-            <a:srgbClr val="89B4FA"/>
-          </a:solidFill>
-          <a:ln>
-            <a:noFill/>
-          </a:ln>
-        </p:spPr>
-        <p:style>
-          <a:lnRef idx="1">
-            <a:schemeClr val="accent1"/>
-          </a:lnRef>
-          <a:fillRef idx="3">
-            <a:schemeClr val="accent1"/>
-          </a:fillRef>
-          <a:effectRef idx="2">
-            <a:schemeClr val="accent1"/>
-          </a:effectRef>
-          <a:fontRef idx="minor">
-            <a:schemeClr val="lt1"/>
-          </a:fontRef>
-        </p:style>
-        <p:txBody>
-          <a:bodyPr rtlCol="0" anchor="ctr" wrap="square"/>
-          <a:lstStyle/>
-          <a:p>
-            <a:pPr algn="ctr">
-              <a:defRPr sz="2000">
-                <a:solidFill>
-                  <a:srgbClr val="1E1E2E"/>
-                </a:solidFill>
-                <a:latin typeface="Yu Gothic UI"/>
-              </a:defRPr>
-            </a:pPr>
-            <a:r>
-              <a:t>ユメログは「最初の一歩」を踏み出すきっかけと</a:t>
-            </a:r>
-            <a:br/>
-            <a:r>
-              <a:t>動き続けるための仕組みを提供します</a:t>
+          <p:cNvPr id="14" name="TextBox 13"/>
+          <p:cNvSpPr txBox="1"/>
+          <p:nvPr/>
+        </p:nvSpPr>
+        <p:spPr>
+          <a:xfrm>
+            <a:off x="1097280" y="5760720"/>
+            <a:ext cx="2743200" cy="457200"/>
+          </a:xfrm>
+          <a:prstGeom prst="rect">
+            <a:avLst/>
+          </a:prstGeom>
+          <a:noFill/>
+        </p:spPr>
+        <p:txBody>
+          <a:bodyPr wrap="square">
+            <a:spAutoFit/>
+          </a:bodyPr>
+          <a:lstStyle/>
+          <a:p>
+            <a:pPr algn="l">
+              <a:defRPr sz="1800" b="1">
+                <a:solidFill>
+                  <a:srgbClr val="F9E2AF"/>
+                </a:solidFill>
+                <a:latin typeface="Yu Gothic UI"/>
+              </a:defRPr>
+            </a:pPr>
+            <a:r>
+              <a:t>合計</a:t>
+            </a:r>
+          </a:p>
+        </p:txBody>
+      </p:sp>
+      <p:sp>
+        <p:nvSpPr>
+          <p:cNvPr id="15" name="TextBox 14"/>
+          <p:cNvSpPr txBox="1"/>
+          <p:nvPr/>
+        </p:nvSpPr>
+        <p:spPr>
+          <a:xfrm>
+            <a:off x="4114800" y="5760720"/>
+            <a:ext cx="2286000" cy="457200"/>
+          </a:xfrm>
+          <a:prstGeom prst="rect">
+            <a:avLst/>
+          </a:prstGeom>
+          <a:noFill/>
+        </p:spPr>
+        <p:txBody>
+          <a:bodyPr wrap="square">
+            <a:spAutoFit/>
+          </a:bodyPr>
+          <a:lstStyle/>
+          <a:p>
+            <a:pPr algn="l">
+              <a:defRPr sz="2000" b="1">
+                <a:solidFill>
+                  <a:srgbClr val="F38BA8"/>
+                </a:solidFill>
+                <a:latin typeface="Yu Gothic UI"/>
+              </a:defRPr>
+            </a:pPr>
+            <a:r>
+              <a:t>6〜9ヶ月</a:t>
+            </a:r>
+          </a:p>
+        </p:txBody>
+      </p:sp>
+      <p:sp>
+        <p:nvSpPr>
+          <p:cNvPr id="16" name="TextBox 15"/>
+          <p:cNvSpPr txBox="1"/>
+          <p:nvPr/>
+        </p:nvSpPr>
+        <p:spPr>
+          <a:xfrm>
+            <a:off x="6858000" y="5760720"/>
+            <a:ext cx="4114800" cy="457200"/>
+          </a:xfrm>
+          <a:prstGeom prst="rect">
+            <a:avLst/>
+          </a:prstGeom>
+          <a:noFill/>
+        </p:spPr>
+        <p:txBody>
+          <a:bodyPr wrap="square">
+            <a:spAutoFit/>
+          </a:bodyPr>
+          <a:lstStyle/>
+          <a:p>
+            <a:pPr algn="l">
+              <a:defRPr sz="1400" b="0">
+                <a:solidFill>
+                  <a:srgbClr val="6C7086"/>
+                </a:solidFill>
+                <a:latin typeface="Yu Gothic UI"/>
+              </a:defRPr>
+            </a:pPr>
+            <a:r>
+              <a:t>1人で新規スクラッチ開発の場合</a:t>
             </a:r>
           </a:p>
         </p:txBody>
@@ -4155,7 +4889,7 @@
         <p:spPr>
           <a:xfrm>
             <a:off x="731520" y="365760"/>
-            <a:ext cx="9144000" cy="731520"/>
+            <a:ext cx="9144000" cy="640080"/>
           </a:xfrm>
           <a:prstGeom prst="rect">
             <a:avLst/>
@@ -4177,7 +4911,7 @@
               </a:defRPr>
             </a:pPr>
             <a:r>
-              <a:t>3ステップで、夢を行動に変える</a:t>
+              <a:t>After: AI駆動開発の実績</a:t>
             </a:r>
           </a:p>
         </p:txBody>
@@ -4190,8 +4924,8 @@
         </p:nvSpPr>
         <p:spPr>
           <a:xfrm>
-            <a:off x="731520" y="1463040"/>
-            <a:ext cx="3474720" cy="4572000"/>
+            <a:off x="731520" y="1280160"/>
+            <a:ext cx="3291840" cy="1828800"/>
           </a:xfrm>
           <a:prstGeom prst="roundRect">
             <a:avLst/>
@@ -4227,143 +4961,85 @@
       </p:sp>
       <p:sp>
         <p:nvSpPr>
-          <p:cNvPr id="4" name="Oval 3"/>
+          <p:cNvPr id="4" name="TextBox 3"/>
+          <p:cNvSpPr txBox="1"/>
+          <p:nvPr/>
+        </p:nvSpPr>
+        <p:spPr>
+          <a:xfrm>
+            <a:off x="1097280" y="1371600"/>
+            <a:ext cx="2743200" cy="1645920"/>
+          </a:xfrm>
+          <a:prstGeom prst="rect">
+            <a:avLst/>
+          </a:prstGeom>
+          <a:noFill/>
+        </p:spPr>
+        <p:txBody>
+          <a:bodyPr wrap="square">
+            <a:spAutoFit/>
+          </a:bodyPr>
+          <a:lstStyle/>
+          <a:p>
+            <a:pPr algn="l">
+              <a:spcAft>
+                <a:spcPts val="400"/>
+              </a:spcAft>
+              <a:defRPr sz="1400" b="0">
+                <a:solidFill>
+                  <a:srgbClr val="6C7086"/>
+                </a:solidFill>
+                <a:latin typeface="Yu Gothic UI"/>
+              </a:defRPr>
+            </a:pPr>
+            <a:r>
+              <a:t>開発期間</a:t>
+            </a:r>
+          </a:p>
+          <a:p>
+            <a:pPr algn="ctr">
+              <a:spcAft>
+                <a:spcPts val="400"/>
+              </a:spcAft>
+              <a:defRPr sz="4200" b="1">
+                <a:solidFill>
+                  <a:srgbClr val="A6E3A1"/>
+                </a:solidFill>
+                <a:latin typeface="Yu Gothic UI"/>
+              </a:defRPr>
+            </a:pPr>
+            <a:r>
+              <a:t>21日</a:t>
+            </a:r>
+          </a:p>
+          <a:p>
+            <a:pPr algn="ctr">
+              <a:spcAft>
+                <a:spcPts val="600"/>
+              </a:spcAft>
+              <a:defRPr sz="1400" b="0">
+                <a:solidFill>
+                  <a:srgbClr val="6C7086"/>
+                </a:solidFill>
+                <a:latin typeface="Yu Gothic UI"/>
+              </a:defRPr>
+            </a:pPr>
+            <a:r>
+              <a:t>（従来: 6〜9ヶ月）</a:t>
+            </a:r>
+          </a:p>
+        </p:txBody>
+      </p:sp>
+      <p:sp>
+        <p:nvSpPr>
+          <p:cNvPr id="5" name="Rounded Rectangle 4"/>
           <p:cNvSpPr/>
           <p:nvPr/>
         </p:nvSpPr>
         <p:spPr>
           <a:xfrm>
-            <a:off x="2011680" y="1828800"/>
-            <a:ext cx="914400" cy="914400"/>
-          </a:xfrm>
-          <a:prstGeom prst="ellipse">
-            <a:avLst/>
-          </a:prstGeom>
-          <a:solidFill>
-            <a:srgbClr val="89B4FA"/>
-          </a:solidFill>
-          <a:ln>
-            <a:noFill/>
-          </a:ln>
-        </p:spPr>
-        <p:style>
-          <a:lnRef idx="1">
-            <a:schemeClr val="accent1"/>
-          </a:lnRef>
-          <a:fillRef idx="3">
-            <a:schemeClr val="accent1"/>
-          </a:fillRef>
-          <a:effectRef idx="2">
-            <a:schemeClr val="accent1"/>
-          </a:effectRef>
-          <a:fontRef idx="minor">
-            <a:schemeClr val="lt1"/>
-          </a:fontRef>
-        </p:style>
-        <p:txBody>
-          <a:bodyPr rtlCol="0" anchor="ctr"/>
-          <a:lstStyle/>
-          <a:p>
-            <a:pPr algn="ctr">
-              <a:defRPr sz="3600" b="1">
-                <a:solidFill>
-                  <a:srgbClr val="1E1E2E"/>
-                </a:solidFill>
-                <a:latin typeface="Yu Gothic UI"/>
-              </a:defRPr>
-            </a:pPr>
-            <a:r>
-              <a:t>1</a:t>
-            </a:r>
-          </a:p>
-        </p:txBody>
-      </p:sp>
-      <p:sp>
-        <p:nvSpPr>
-          <p:cNvPr id="5" name="TextBox 4"/>
-          <p:cNvSpPr txBox="1"/>
-          <p:nvPr/>
-        </p:nvSpPr>
-        <p:spPr>
-          <a:xfrm>
-            <a:off x="1005840" y="2926080"/>
-            <a:ext cx="2926080" cy="548640"/>
-          </a:xfrm>
-          <a:prstGeom prst="rect">
-            <a:avLst/>
-          </a:prstGeom>
-          <a:noFill/>
-        </p:spPr>
-        <p:txBody>
-          <a:bodyPr wrap="square">
-            <a:spAutoFit/>
-          </a:bodyPr>
-          <a:lstStyle/>
-          <a:p>
-            <a:pPr algn="ctr">
-              <a:defRPr sz="2600" b="1">
-                <a:solidFill>
-                  <a:srgbClr val="89B4FA"/>
-                </a:solidFill>
-                <a:latin typeface="Yu Gothic UI"/>
-              </a:defRPr>
-            </a:pPr>
-            <a:r>
-              <a:t>書き出す</a:t>
-            </a:r>
-          </a:p>
-        </p:txBody>
-      </p:sp>
-      <p:sp>
-        <p:nvSpPr>
-          <p:cNvPr id="6" name="TextBox 5"/>
-          <p:cNvSpPr txBox="1"/>
-          <p:nvPr/>
-        </p:nvSpPr>
-        <p:spPr>
-          <a:xfrm>
-            <a:off x="1005840" y="3657600"/>
-            <a:ext cx="2926080" cy="1828800"/>
-          </a:xfrm>
-          <a:prstGeom prst="rect">
-            <a:avLst/>
-          </a:prstGeom>
-          <a:noFill/>
-        </p:spPr>
-        <p:txBody>
-          <a:bodyPr wrap="square">
-            <a:spAutoFit/>
-          </a:bodyPr>
-          <a:lstStyle/>
-          <a:p>
-            <a:pPr algn="ctr">
-              <a:defRPr sz="1600" b="0">
-                <a:solidFill>
-                  <a:srgbClr val="A6ADC8"/>
-                </a:solidFill>
-                <a:latin typeface="Yu Gothic UI"/>
-              </a:defRPr>
-            </a:pPr>
-            <a:r>
-              <a:t>夢を言葉にして書き出すだけ。</a:t>
-            </a:r>
-            <a:br/>
-            <a:r>
-              <a:t>脳がそれを「目標」として認識し始めます。</a:t>
-            </a:r>
-          </a:p>
-        </p:txBody>
-      </p:sp>
-      <p:sp>
-        <p:nvSpPr>
-          <p:cNvPr id="7" name="Rounded Rectangle 6"/>
-          <p:cNvSpPr/>
-          <p:nvPr/>
-        </p:nvSpPr>
-        <p:spPr>
-          <a:xfrm>
-            <a:off x="4480559" y="1463040"/>
-            <a:ext cx="3474720" cy="4572000"/>
+            <a:off x="4389120" y="1280160"/>
+            <a:ext cx="3291840" cy="1828800"/>
           </a:xfrm>
           <a:prstGeom prst="roundRect">
             <a:avLst/>
@@ -4399,143 +5075,85 @@
       </p:sp>
       <p:sp>
         <p:nvSpPr>
-          <p:cNvPr id="8" name="Oval 7"/>
+          <p:cNvPr id="6" name="TextBox 5"/>
+          <p:cNvSpPr txBox="1"/>
+          <p:nvPr/>
+        </p:nvSpPr>
+        <p:spPr>
+          <a:xfrm>
+            <a:off x="4754880" y="1371600"/>
+            <a:ext cx="2743200" cy="1645920"/>
+          </a:xfrm>
+          <a:prstGeom prst="rect">
+            <a:avLst/>
+          </a:prstGeom>
+          <a:noFill/>
+        </p:spPr>
+        <p:txBody>
+          <a:bodyPr wrap="square">
+            <a:spAutoFit/>
+          </a:bodyPr>
+          <a:lstStyle/>
+          <a:p>
+            <a:pPr algn="l">
+              <a:spcAft>
+                <a:spcPts val="400"/>
+              </a:spcAft>
+              <a:defRPr sz="1400" b="0">
+                <a:solidFill>
+                  <a:srgbClr val="6C7086"/>
+                </a:solidFill>
+                <a:latin typeface="Yu Gothic UI"/>
+              </a:defRPr>
+            </a:pPr>
+            <a:r>
+              <a:t>1日あたり生産量</a:t>
+            </a:r>
+          </a:p>
+          <a:p>
+            <a:pPr algn="ctr">
+              <a:spcAft>
+                <a:spcPts val="400"/>
+              </a:spcAft>
+              <a:defRPr sz="4200" b="1">
+                <a:solidFill>
+                  <a:srgbClr val="A6E3A1"/>
+                </a:solidFill>
+                <a:latin typeface="Yu Gothic UI"/>
+              </a:defRPr>
+            </a:pPr>
+            <a:r>
+              <a:t>2,281行</a:t>
+            </a:r>
+          </a:p>
+          <a:p>
+            <a:pPr algn="ctr">
+              <a:spcAft>
+                <a:spcPts val="600"/>
+              </a:spcAft>
+              <a:defRPr sz="1400" b="0">
+                <a:solidFill>
+                  <a:srgbClr val="6C7086"/>
+                </a:solidFill>
+                <a:latin typeface="Yu Gothic UI"/>
+              </a:defRPr>
+            </a:pPr>
+            <a:r>
+              <a:t>（従来: 50〜100行）</a:t>
+            </a:r>
+          </a:p>
+        </p:txBody>
+      </p:sp>
+      <p:sp>
+        <p:nvSpPr>
+          <p:cNvPr id="7" name="Rounded Rectangle 6"/>
           <p:cNvSpPr/>
           <p:nvPr/>
         </p:nvSpPr>
         <p:spPr>
           <a:xfrm>
-            <a:off x="5760719" y="1828800"/>
-            <a:ext cx="914400" cy="914400"/>
-          </a:xfrm>
-          <a:prstGeom prst="ellipse">
-            <a:avLst/>
-          </a:prstGeom>
-          <a:solidFill>
-            <a:srgbClr val="A6E3A1"/>
-          </a:solidFill>
-          <a:ln>
-            <a:noFill/>
-          </a:ln>
-        </p:spPr>
-        <p:style>
-          <a:lnRef idx="1">
-            <a:schemeClr val="accent1"/>
-          </a:lnRef>
-          <a:fillRef idx="3">
-            <a:schemeClr val="accent1"/>
-          </a:fillRef>
-          <a:effectRef idx="2">
-            <a:schemeClr val="accent1"/>
-          </a:effectRef>
-          <a:fontRef idx="minor">
-            <a:schemeClr val="lt1"/>
-          </a:fontRef>
-        </p:style>
-        <p:txBody>
-          <a:bodyPr rtlCol="0" anchor="ctr"/>
-          <a:lstStyle/>
-          <a:p>
-            <a:pPr algn="ctr">
-              <a:defRPr sz="3600" b="1">
-                <a:solidFill>
-                  <a:srgbClr val="1E1E2E"/>
-                </a:solidFill>
-                <a:latin typeface="Yu Gothic UI"/>
-              </a:defRPr>
-            </a:pPr>
-            <a:r>
-              <a:t>2</a:t>
-            </a:r>
-          </a:p>
-        </p:txBody>
-      </p:sp>
-      <p:sp>
-        <p:nvSpPr>
-          <p:cNvPr id="9" name="TextBox 8"/>
-          <p:cNvSpPr txBox="1"/>
-          <p:nvPr/>
-        </p:nvSpPr>
-        <p:spPr>
-          <a:xfrm>
-            <a:off x="4754879" y="2926080"/>
-            <a:ext cx="2926080" cy="548640"/>
-          </a:xfrm>
-          <a:prstGeom prst="rect">
-            <a:avLst/>
-          </a:prstGeom>
-          <a:noFill/>
-        </p:spPr>
-        <p:txBody>
-          <a:bodyPr wrap="square">
-            <a:spAutoFit/>
-          </a:bodyPr>
-          <a:lstStyle/>
-          <a:p>
-            <a:pPr algn="ctr">
-              <a:defRPr sz="2600" b="1">
-                <a:solidFill>
-                  <a:srgbClr val="A6E3A1"/>
-                </a:solidFill>
-                <a:latin typeface="Yu Gothic UI"/>
-              </a:defRPr>
-            </a:pPr>
-            <a:r>
-              <a:t>分解する</a:t>
-            </a:r>
-          </a:p>
-        </p:txBody>
-      </p:sp>
-      <p:sp>
-        <p:nvSpPr>
-          <p:cNvPr id="10" name="TextBox 9"/>
-          <p:cNvSpPr txBox="1"/>
-          <p:nvPr/>
-        </p:nvSpPr>
-        <p:spPr>
-          <a:xfrm>
-            <a:off x="4754879" y="3657600"/>
-            <a:ext cx="2926080" cy="1828800"/>
-          </a:xfrm>
-          <a:prstGeom prst="rect">
-            <a:avLst/>
-          </a:prstGeom>
-          <a:noFill/>
-        </p:spPr>
-        <p:txBody>
-          <a:bodyPr wrap="square">
-            <a:spAutoFit/>
-          </a:bodyPr>
-          <a:lstStyle/>
-          <a:p>
-            <a:pPr algn="ctr">
-              <a:defRPr sz="1600" b="0">
-                <a:solidFill>
-                  <a:srgbClr val="A6ADC8"/>
-                </a:solidFill>
-                <a:latin typeface="Yu Gothic UI"/>
-              </a:defRPr>
-            </a:pPr>
-            <a:r>
-              <a:t>夢を目標に、目標をタスクに分解。</a:t>
-            </a:r>
-            <a:br/>
-            <a:r>
-              <a:t>大きな壁が、毎日の小さな行動に変わります。</a:t>
-            </a:r>
-          </a:p>
-        </p:txBody>
-      </p:sp>
-      <p:sp>
-        <p:nvSpPr>
-          <p:cNvPr id="11" name="Rounded Rectangle 10"/>
-          <p:cNvSpPr/>
-          <p:nvPr/>
-        </p:nvSpPr>
-        <p:spPr>
-          <a:xfrm>
-            <a:off x="8229600" y="1463040"/>
-            <a:ext cx="3474720" cy="4572000"/>
+            <a:off x="8046720" y="1280160"/>
+            <a:ext cx="3383280" cy="1828800"/>
           </a:xfrm>
           <a:prstGeom prst="roundRect">
             <a:avLst/>
@@ -4571,20 +5189,271 @@
       </p:sp>
       <p:sp>
         <p:nvSpPr>
-          <p:cNvPr id="12" name="Oval 11"/>
+          <p:cNvPr id="8" name="TextBox 7"/>
+          <p:cNvSpPr txBox="1"/>
+          <p:nvPr/>
+        </p:nvSpPr>
+        <p:spPr>
+          <a:xfrm>
+            <a:off x="8412480" y="1371600"/>
+            <a:ext cx="2743200" cy="1645920"/>
+          </a:xfrm>
+          <a:prstGeom prst="rect">
+            <a:avLst/>
+          </a:prstGeom>
+          <a:noFill/>
+        </p:spPr>
+        <p:txBody>
+          <a:bodyPr wrap="square">
+            <a:spAutoFit/>
+          </a:bodyPr>
+          <a:lstStyle/>
+          <a:p>
+            <a:pPr algn="l">
+              <a:spcAft>
+                <a:spcPts val="400"/>
+              </a:spcAft>
+              <a:defRPr sz="1400" b="0">
+                <a:solidFill>
+                  <a:srgbClr val="6C7086"/>
+                </a:solidFill>
+                <a:latin typeface="Yu Gothic UI"/>
+              </a:defRPr>
+            </a:pPr>
+            <a:r>
+              <a:t>学習コスト</a:t>
+            </a:r>
+          </a:p>
+          <a:p>
+            <a:pPr algn="ctr">
+              <a:spcAft>
+                <a:spcPts val="400"/>
+              </a:spcAft>
+              <a:defRPr sz="4200" b="1">
+                <a:solidFill>
+                  <a:srgbClr val="A6E3A1"/>
+                </a:solidFill>
+                <a:latin typeface="Yu Gothic UI"/>
+              </a:defRPr>
+            </a:pPr>
+            <a:r>
+              <a:t>0日</a:t>
+            </a:r>
+          </a:p>
+          <a:p>
+            <a:pPr algn="ctr">
+              <a:spcAft>
+                <a:spcPts val="600"/>
+              </a:spcAft>
+              <a:defRPr sz="1400" b="0">
+                <a:solidFill>
+                  <a:srgbClr val="6C7086"/>
+                </a:solidFill>
+                <a:latin typeface="Yu Gothic UI"/>
+              </a:defRPr>
+            </a:pPr>
+            <a:r>
+              <a:t>（従来: 1〜2ヶ月）</a:t>
+            </a:r>
+          </a:p>
+        </p:txBody>
+      </p:sp>
+      <p:sp>
+        <p:nvSpPr>
+          <p:cNvPr id="9" name="TextBox 8"/>
+          <p:cNvSpPr txBox="1"/>
+          <p:nvPr/>
+        </p:nvSpPr>
+        <p:spPr>
+          <a:xfrm>
+            <a:off x="731520" y="3474720"/>
+            <a:ext cx="5486400" cy="457200"/>
+          </a:xfrm>
+          <a:prstGeom prst="rect">
+            <a:avLst/>
+          </a:prstGeom>
+          <a:noFill/>
+        </p:spPr>
+        <p:txBody>
+          <a:bodyPr wrap="square">
+            <a:spAutoFit/>
+          </a:bodyPr>
+          <a:lstStyle/>
+          <a:p>
+            <a:pPr algn="l">
+              <a:defRPr sz="2200" b="1">
+                <a:solidFill>
+                  <a:srgbClr val="F9E2AF"/>
+                </a:solidFill>
+                <a:latin typeface="Yu Gothic UI"/>
+              </a:defRPr>
+            </a:pPr>
+            <a:r>
+              <a:t>従来開発との比較</a:t>
+            </a:r>
+          </a:p>
+        </p:txBody>
+      </p:sp>
+      <p:sp>
+        <p:nvSpPr>
+          <p:cNvPr id="10" name="TextBox 9"/>
+          <p:cNvSpPr txBox="1"/>
+          <p:nvPr/>
+        </p:nvSpPr>
+        <p:spPr>
+          <a:xfrm>
+            <a:off x="731520" y="3931920"/>
+            <a:ext cx="2560320" cy="365760"/>
+          </a:xfrm>
+          <a:prstGeom prst="rect">
+            <a:avLst/>
+          </a:prstGeom>
+          <a:noFill/>
+        </p:spPr>
+        <p:txBody>
+          <a:bodyPr wrap="square">
+            <a:spAutoFit/>
+          </a:bodyPr>
+          <a:lstStyle/>
+          <a:p>
+            <a:pPr algn="l">
+              <a:defRPr sz="1400" b="1">
+                <a:solidFill>
+                  <a:srgbClr val="6C7086"/>
+                </a:solidFill>
+                <a:latin typeface="Yu Gothic UI"/>
+              </a:defRPr>
+            </a:pPr>
+            <a:r>
+              <a:t>指標</a:t>
+            </a:r>
+          </a:p>
+        </p:txBody>
+      </p:sp>
+      <p:sp>
+        <p:nvSpPr>
+          <p:cNvPr id="11" name="TextBox 10"/>
+          <p:cNvSpPr txBox="1"/>
+          <p:nvPr/>
+        </p:nvSpPr>
+        <p:spPr>
+          <a:xfrm>
+            <a:off x="3291840" y="3931920"/>
+            <a:ext cx="2560320" cy="365760"/>
+          </a:xfrm>
+          <a:prstGeom prst="rect">
+            <a:avLst/>
+          </a:prstGeom>
+          <a:noFill/>
+        </p:spPr>
+        <p:txBody>
+          <a:bodyPr wrap="square">
+            <a:spAutoFit/>
+          </a:bodyPr>
+          <a:lstStyle/>
+          <a:p>
+            <a:pPr algn="l">
+              <a:defRPr sz="1400" b="1">
+                <a:solidFill>
+                  <a:srgbClr val="6C7086"/>
+                </a:solidFill>
+                <a:latin typeface="Yu Gothic UI"/>
+              </a:defRPr>
+            </a:pPr>
+            <a:r>
+              <a:t>従来開発</a:t>
+            </a:r>
+          </a:p>
+        </p:txBody>
+      </p:sp>
+      <p:sp>
+        <p:nvSpPr>
+          <p:cNvPr id="12" name="TextBox 11"/>
+          <p:cNvSpPr txBox="1"/>
+          <p:nvPr/>
+        </p:nvSpPr>
+        <p:spPr>
+          <a:xfrm>
+            <a:off x="5852160" y="3931920"/>
+            <a:ext cx="2560320" cy="365760"/>
+          </a:xfrm>
+          <a:prstGeom prst="rect">
+            <a:avLst/>
+          </a:prstGeom>
+          <a:noFill/>
+        </p:spPr>
+        <p:txBody>
+          <a:bodyPr wrap="square">
+            <a:spAutoFit/>
+          </a:bodyPr>
+          <a:lstStyle/>
+          <a:p>
+            <a:pPr algn="l">
+              <a:defRPr sz="1400" b="1">
+                <a:solidFill>
+                  <a:srgbClr val="6C7086"/>
+                </a:solidFill>
+                <a:latin typeface="Yu Gothic UI"/>
+              </a:defRPr>
+            </a:pPr>
+            <a:r>
+              <a:t>AI駆動開発</a:t>
+            </a:r>
+          </a:p>
+        </p:txBody>
+      </p:sp>
+      <p:sp>
+        <p:nvSpPr>
+          <p:cNvPr id="13" name="TextBox 12"/>
+          <p:cNvSpPr txBox="1"/>
+          <p:nvPr/>
+        </p:nvSpPr>
+        <p:spPr>
+          <a:xfrm>
+            <a:off x="8686800" y="3931920"/>
+            <a:ext cx="2560320" cy="365760"/>
+          </a:xfrm>
+          <a:prstGeom prst="rect">
+            <a:avLst/>
+          </a:prstGeom>
+          <a:noFill/>
+        </p:spPr>
+        <p:txBody>
+          <a:bodyPr wrap="square">
+            <a:spAutoFit/>
+          </a:bodyPr>
+          <a:lstStyle/>
+          <a:p>
+            <a:pPr algn="l">
+              <a:defRPr sz="1400" b="1">
+                <a:solidFill>
+                  <a:srgbClr val="6C7086"/>
+                </a:solidFill>
+                <a:latin typeface="Yu Gothic UI"/>
+              </a:defRPr>
+            </a:pPr>
+            <a:r>
+              <a:t>効果</a:t>
+            </a:r>
+          </a:p>
+        </p:txBody>
+      </p:sp>
+      <p:sp>
+        <p:nvSpPr>
+          <p:cNvPr id="14" name="Rounded Rectangle 13"/>
           <p:cNvSpPr/>
           <p:nvPr/>
         </p:nvSpPr>
         <p:spPr>
           <a:xfrm>
-            <a:off x="9509760" y="1828800"/>
-            <a:ext cx="914400" cy="914400"/>
-          </a:xfrm>
-          <a:prstGeom prst="ellipse">
+            <a:off x="548640" y="4343400"/>
+            <a:ext cx="10972800" cy="438912"/>
+          </a:xfrm>
+          <a:prstGeom prst="roundRect">
             <a:avLst/>
           </a:prstGeom>
           <a:solidFill>
-            <a:srgbClr val="F9E2AF"/>
+            <a:srgbClr val="313244"/>
           </a:solidFill>
           <a:ln>
             <a:noFill/>
@@ -4608,92 +5477,625 @@
           <a:bodyPr rtlCol="0" anchor="ctr"/>
           <a:lstStyle/>
           <a:p>
-            <a:pPr algn="ctr">
-              <a:defRPr sz="3600" b="1">
-                <a:solidFill>
-                  <a:srgbClr val="1E1E2E"/>
-                </a:solidFill>
-                <a:latin typeface="Yu Gothic UI"/>
-              </a:defRPr>
-            </a:pPr>
-            <a:r>
-              <a:t>3</a:t>
-            </a:r>
-          </a:p>
-        </p:txBody>
-      </p:sp>
-      <p:sp>
-        <p:nvSpPr>
-          <p:cNvPr id="13" name="TextBox 12"/>
-          <p:cNvSpPr txBox="1"/>
-          <p:nvPr/>
-        </p:nvSpPr>
-        <p:spPr>
-          <a:xfrm>
-            <a:off x="8503920" y="2926080"/>
-            <a:ext cx="2926080" cy="548640"/>
-          </a:xfrm>
-          <a:prstGeom prst="rect">
-            <a:avLst/>
-          </a:prstGeom>
-          <a:noFill/>
-        </p:spPr>
-        <p:txBody>
-          <a:bodyPr wrap="square">
-            <a:spAutoFit/>
-          </a:bodyPr>
-          <a:lstStyle/>
-          <a:p>
-            <a:pPr algn="ctr">
-              <a:defRPr sz="2600" b="1">
-                <a:solidFill>
-                  <a:srgbClr val="F9E2AF"/>
-                </a:solidFill>
-                <a:latin typeface="Yu Gothic UI"/>
-              </a:defRPr>
-            </a:pPr>
-            <a:r>
-              <a:t>続ける</a:t>
-            </a:r>
-          </a:p>
-        </p:txBody>
-      </p:sp>
-      <p:sp>
-        <p:nvSpPr>
-          <p:cNvPr id="14" name="TextBox 13"/>
-          <p:cNvSpPr txBox="1"/>
-          <p:nvPr/>
-        </p:nvSpPr>
-        <p:spPr>
-          <a:xfrm>
-            <a:off x="8503920" y="3657600"/>
-            <a:ext cx="2926080" cy="1828800"/>
-          </a:xfrm>
-          <a:prstGeom prst="rect">
-            <a:avLst/>
-          </a:prstGeom>
-          <a:noFill/>
-        </p:spPr>
-        <p:txBody>
-          <a:bodyPr wrap="square">
-            <a:spAutoFit/>
-          </a:bodyPr>
-          <a:lstStyle/>
-          <a:p>
-            <a:pPr algn="ctr">
+            <a:pPr algn="ctr"/>
+          </a:p>
+        </p:txBody>
+      </p:sp>
+      <p:sp>
+        <p:nvSpPr>
+          <p:cNvPr id="15" name="TextBox 14"/>
+          <p:cNvSpPr txBox="1"/>
+          <p:nvPr/>
+        </p:nvSpPr>
+        <p:spPr>
+          <a:xfrm>
+            <a:off x="731520" y="4389120"/>
+            <a:ext cx="2560320" cy="365760"/>
+          </a:xfrm>
+          <a:prstGeom prst="rect">
+            <a:avLst/>
+          </a:prstGeom>
+          <a:noFill/>
+        </p:spPr>
+        <p:txBody>
+          <a:bodyPr wrap="square">
+            <a:spAutoFit/>
+          </a:bodyPr>
+          <a:lstStyle/>
+          <a:p>
+            <a:pPr algn="l">
               <a:defRPr sz="1600" b="0">
                 <a:solidFill>
+                  <a:srgbClr val="CDD6F4"/>
+                </a:solidFill>
+                <a:latin typeface="Yu Gothic UI"/>
+              </a:defRPr>
+            </a:pPr>
+            <a:r>
+              <a:t>開発期間</a:t>
+            </a:r>
+          </a:p>
+        </p:txBody>
+      </p:sp>
+      <p:sp>
+        <p:nvSpPr>
+          <p:cNvPr id="16" name="TextBox 15"/>
+          <p:cNvSpPr txBox="1"/>
+          <p:nvPr/>
+        </p:nvSpPr>
+        <p:spPr>
+          <a:xfrm>
+            <a:off x="3291840" y="4389120"/>
+            <a:ext cx="2560320" cy="365760"/>
+          </a:xfrm>
+          <a:prstGeom prst="rect">
+            <a:avLst/>
+          </a:prstGeom>
+          <a:noFill/>
+        </p:spPr>
+        <p:txBody>
+          <a:bodyPr wrap="square">
+            <a:spAutoFit/>
+          </a:bodyPr>
+          <a:lstStyle/>
+          <a:p>
+            <a:pPr algn="l">
+              <a:defRPr sz="1600" b="0">
+                <a:solidFill>
                   <a:srgbClr val="A6ADC8"/>
                 </a:solidFill>
                 <a:latin typeface="Yu Gothic UI"/>
               </a:defRPr>
             </a:pPr>
             <a:r>
-              <a:t>活動の積み重ねが星座として輝きます。</a:t>
-            </a:r>
-            <a:br/>
-            <a:r>
-              <a:t>星座を完成させる旅が、成長の証に。</a:t>
+              <a:t>6〜9ヶ月</a:t>
+            </a:r>
+          </a:p>
+        </p:txBody>
+      </p:sp>
+      <p:sp>
+        <p:nvSpPr>
+          <p:cNvPr id="17" name="TextBox 16"/>
+          <p:cNvSpPr txBox="1"/>
+          <p:nvPr/>
+        </p:nvSpPr>
+        <p:spPr>
+          <a:xfrm>
+            <a:off x="5852160" y="4389120"/>
+            <a:ext cx="2560320" cy="365760"/>
+          </a:xfrm>
+          <a:prstGeom prst="rect">
+            <a:avLst/>
+          </a:prstGeom>
+          <a:noFill/>
+        </p:spPr>
+        <p:txBody>
+          <a:bodyPr wrap="square">
+            <a:spAutoFit/>
+          </a:bodyPr>
+          <a:lstStyle/>
+          <a:p>
+            <a:pPr algn="l">
+              <a:defRPr sz="1600" b="1">
+                <a:solidFill>
+                  <a:srgbClr val="89B4FA"/>
+                </a:solidFill>
+                <a:latin typeface="Yu Gothic UI"/>
+              </a:defRPr>
+            </a:pPr>
+            <a:r>
+              <a:t>21日</a:t>
+            </a:r>
+          </a:p>
+        </p:txBody>
+      </p:sp>
+      <p:sp>
+        <p:nvSpPr>
+          <p:cNvPr id="18" name="TextBox 17"/>
+          <p:cNvSpPr txBox="1"/>
+          <p:nvPr/>
+        </p:nvSpPr>
+        <p:spPr>
+          <a:xfrm>
+            <a:off x="8686800" y="4389120"/>
+            <a:ext cx="2743200" cy="365760"/>
+          </a:xfrm>
+          <a:prstGeom prst="rect">
+            <a:avLst/>
+          </a:prstGeom>
+          <a:noFill/>
+        </p:spPr>
+        <p:txBody>
+          <a:bodyPr wrap="square">
+            <a:spAutoFit/>
+          </a:bodyPr>
+          <a:lstStyle/>
+          <a:p>
+            <a:pPr algn="l">
+              <a:defRPr sz="1600" b="1">
+                <a:solidFill>
+                  <a:srgbClr val="A6E3A1"/>
+                </a:solidFill>
+                <a:latin typeface="Yu Gothic UI"/>
+              </a:defRPr>
+            </a:pPr>
+            <a:r>
+              <a:t>6〜9倍 短縮</a:t>
+            </a:r>
+          </a:p>
+        </p:txBody>
+      </p:sp>
+      <p:sp>
+        <p:nvSpPr>
+          <p:cNvPr id="19" name="TextBox 18"/>
+          <p:cNvSpPr txBox="1"/>
+          <p:nvPr/>
+        </p:nvSpPr>
+        <p:spPr>
+          <a:xfrm>
+            <a:off x="731520" y="4892040"/>
+            <a:ext cx="2560320" cy="365760"/>
+          </a:xfrm>
+          <a:prstGeom prst="rect">
+            <a:avLst/>
+          </a:prstGeom>
+          <a:noFill/>
+        </p:spPr>
+        <p:txBody>
+          <a:bodyPr wrap="square">
+            <a:spAutoFit/>
+          </a:bodyPr>
+          <a:lstStyle/>
+          <a:p>
+            <a:pPr algn="l">
+              <a:defRPr sz="1600" b="0">
+                <a:solidFill>
+                  <a:srgbClr val="CDD6F4"/>
+                </a:solidFill>
+                <a:latin typeface="Yu Gothic UI"/>
+              </a:defRPr>
+            </a:pPr>
+            <a:r>
+              <a:t>コード生産速度</a:t>
+            </a:r>
+          </a:p>
+        </p:txBody>
+      </p:sp>
+      <p:sp>
+        <p:nvSpPr>
+          <p:cNvPr id="20" name="TextBox 19"/>
+          <p:cNvSpPr txBox="1"/>
+          <p:nvPr/>
+        </p:nvSpPr>
+        <p:spPr>
+          <a:xfrm>
+            <a:off x="3291840" y="4892040"/>
+            <a:ext cx="2560320" cy="365760"/>
+          </a:xfrm>
+          <a:prstGeom prst="rect">
+            <a:avLst/>
+          </a:prstGeom>
+          <a:noFill/>
+        </p:spPr>
+        <p:txBody>
+          <a:bodyPr wrap="square">
+            <a:spAutoFit/>
+          </a:bodyPr>
+          <a:lstStyle/>
+          <a:p>
+            <a:pPr algn="l">
+              <a:defRPr sz="1600" b="0">
+                <a:solidFill>
+                  <a:srgbClr val="A6ADC8"/>
+                </a:solidFill>
+                <a:latin typeface="Yu Gothic UI"/>
+              </a:defRPr>
+            </a:pPr>
+            <a:r>
+              <a:t>50〜100行/日</a:t>
+            </a:r>
+          </a:p>
+        </p:txBody>
+      </p:sp>
+      <p:sp>
+        <p:nvSpPr>
+          <p:cNvPr id="21" name="TextBox 20"/>
+          <p:cNvSpPr txBox="1"/>
+          <p:nvPr/>
+        </p:nvSpPr>
+        <p:spPr>
+          <a:xfrm>
+            <a:off x="5852160" y="4892040"/>
+            <a:ext cx="2560320" cy="365760"/>
+          </a:xfrm>
+          <a:prstGeom prst="rect">
+            <a:avLst/>
+          </a:prstGeom>
+          <a:noFill/>
+        </p:spPr>
+        <p:txBody>
+          <a:bodyPr wrap="square">
+            <a:spAutoFit/>
+          </a:bodyPr>
+          <a:lstStyle/>
+          <a:p>
+            <a:pPr algn="l">
+              <a:defRPr sz="1600" b="1">
+                <a:solidFill>
+                  <a:srgbClr val="89B4FA"/>
+                </a:solidFill>
+                <a:latin typeface="Yu Gothic UI"/>
+              </a:defRPr>
+            </a:pPr>
+            <a:r>
+              <a:t>2,281行/日</a:t>
+            </a:r>
+          </a:p>
+        </p:txBody>
+      </p:sp>
+      <p:sp>
+        <p:nvSpPr>
+          <p:cNvPr id="22" name="TextBox 21"/>
+          <p:cNvSpPr txBox="1"/>
+          <p:nvPr/>
+        </p:nvSpPr>
+        <p:spPr>
+          <a:xfrm>
+            <a:off x="8686800" y="4892040"/>
+            <a:ext cx="2743200" cy="365760"/>
+          </a:xfrm>
+          <a:prstGeom prst="rect">
+            <a:avLst/>
+          </a:prstGeom>
+          <a:noFill/>
+        </p:spPr>
+        <p:txBody>
+          <a:bodyPr wrap="square">
+            <a:spAutoFit/>
+          </a:bodyPr>
+          <a:lstStyle/>
+          <a:p>
+            <a:pPr algn="l">
+              <a:defRPr sz="1600" b="1">
+                <a:solidFill>
+                  <a:srgbClr val="A6E3A1"/>
+                </a:solidFill>
+                <a:latin typeface="Yu Gothic UI"/>
+              </a:defRPr>
+            </a:pPr>
+            <a:r>
+              <a:t>23〜46倍</a:t>
+            </a:r>
+          </a:p>
+        </p:txBody>
+      </p:sp>
+      <p:sp>
+        <p:nvSpPr>
+          <p:cNvPr id="23" name="Rounded Rectangle 22"/>
+          <p:cNvSpPr/>
+          <p:nvPr/>
+        </p:nvSpPr>
+        <p:spPr>
+          <a:xfrm>
+            <a:off x="548640" y="5349240"/>
+            <a:ext cx="10972800" cy="438912"/>
+          </a:xfrm>
+          <a:prstGeom prst="roundRect">
+            <a:avLst/>
+          </a:prstGeom>
+          <a:solidFill>
+            <a:srgbClr val="313244"/>
+          </a:solidFill>
+          <a:ln>
+            <a:noFill/>
+          </a:ln>
+        </p:spPr>
+        <p:style>
+          <a:lnRef idx="1">
+            <a:schemeClr val="accent1"/>
+          </a:lnRef>
+          <a:fillRef idx="3">
+            <a:schemeClr val="accent1"/>
+          </a:fillRef>
+          <a:effectRef idx="2">
+            <a:schemeClr val="accent1"/>
+          </a:effectRef>
+          <a:fontRef idx="minor">
+            <a:schemeClr val="lt1"/>
+          </a:fontRef>
+        </p:style>
+        <p:txBody>
+          <a:bodyPr rtlCol="0" anchor="ctr"/>
+          <a:lstStyle/>
+          <a:p>
+            <a:pPr algn="ctr"/>
+          </a:p>
+        </p:txBody>
+      </p:sp>
+      <p:sp>
+        <p:nvSpPr>
+          <p:cNvPr id="24" name="TextBox 23"/>
+          <p:cNvSpPr txBox="1"/>
+          <p:nvPr/>
+        </p:nvSpPr>
+        <p:spPr>
+          <a:xfrm>
+            <a:off x="731520" y="5394960"/>
+            <a:ext cx="2560320" cy="365760"/>
+          </a:xfrm>
+          <a:prstGeom prst="rect">
+            <a:avLst/>
+          </a:prstGeom>
+          <a:noFill/>
+        </p:spPr>
+        <p:txBody>
+          <a:bodyPr wrap="square">
+            <a:spAutoFit/>
+          </a:bodyPr>
+          <a:lstStyle/>
+          <a:p>
+            <a:pPr algn="l">
+              <a:defRPr sz="1600" b="0">
+                <a:solidFill>
+                  <a:srgbClr val="CDD6F4"/>
+                </a:solidFill>
+                <a:latin typeface="Yu Gothic UI"/>
+              </a:defRPr>
+            </a:pPr>
+            <a:r>
+              <a:t>テスト密度</a:t>
+            </a:r>
+          </a:p>
+        </p:txBody>
+      </p:sp>
+      <p:sp>
+        <p:nvSpPr>
+          <p:cNvPr id="25" name="TextBox 24"/>
+          <p:cNvSpPr txBox="1"/>
+          <p:nvPr/>
+        </p:nvSpPr>
+        <p:spPr>
+          <a:xfrm>
+            <a:off x="3291840" y="5394960"/>
+            <a:ext cx="2560320" cy="365760"/>
+          </a:xfrm>
+          <a:prstGeom prst="rect">
+            <a:avLst/>
+          </a:prstGeom>
+          <a:noFill/>
+        </p:spPr>
+        <p:txBody>
+          <a:bodyPr wrap="square">
+            <a:spAutoFit/>
+          </a:bodyPr>
+          <a:lstStyle/>
+          <a:p>
+            <a:pPr algn="l">
+              <a:defRPr sz="1600" b="0">
+                <a:solidFill>
+                  <a:srgbClr val="A6ADC8"/>
+                </a:solidFill>
+                <a:latin typeface="Yu Gothic UI"/>
+              </a:defRPr>
+            </a:pPr>
+            <a:r>
+              <a:t>0〜3件/KLOC</a:t>
+            </a:r>
+          </a:p>
+        </p:txBody>
+      </p:sp>
+      <p:sp>
+        <p:nvSpPr>
+          <p:cNvPr id="26" name="TextBox 25"/>
+          <p:cNvSpPr txBox="1"/>
+          <p:nvPr/>
+        </p:nvSpPr>
+        <p:spPr>
+          <a:xfrm>
+            <a:off x="5852160" y="5394960"/>
+            <a:ext cx="2560320" cy="365760"/>
+          </a:xfrm>
+          <a:prstGeom prst="rect">
+            <a:avLst/>
+          </a:prstGeom>
+          <a:noFill/>
+        </p:spPr>
+        <p:txBody>
+          <a:bodyPr wrap="square">
+            <a:spAutoFit/>
+          </a:bodyPr>
+          <a:lstStyle/>
+          <a:p>
+            <a:pPr algn="l">
+              <a:defRPr sz="1600" b="1">
+                <a:solidFill>
+                  <a:srgbClr val="89B4FA"/>
+                </a:solidFill>
+                <a:latin typeface="Yu Gothic UI"/>
+              </a:defRPr>
+            </a:pPr>
+            <a:r>
+              <a:t>16.9件/KLOC</a:t>
+            </a:r>
+          </a:p>
+        </p:txBody>
+      </p:sp>
+      <p:sp>
+        <p:nvSpPr>
+          <p:cNvPr id="27" name="TextBox 26"/>
+          <p:cNvSpPr txBox="1"/>
+          <p:nvPr/>
+        </p:nvSpPr>
+        <p:spPr>
+          <a:xfrm>
+            <a:off x="8686800" y="5394960"/>
+            <a:ext cx="2743200" cy="365760"/>
+          </a:xfrm>
+          <a:prstGeom prst="rect">
+            <a:avLst/>
+          </a:prstGeom>
+          <a:noFill/>
+        </p:spPr>
+        <p:txBody>
+          <a:bodyPr wrap="square">
+            <a:spAutoFit/>
+          </a:bodyPr>
+          <a:lstStyle/>
+          <a:p>
+            <a:pPr algn="l">
+              <a:defRPr sz="1600" b="1">
+                <a:solidFill>
+                  <a:srgbClr val="A6E3A1"/>
+                </a:solidFill>
+                <a:latin typeface="Yu Gothic UI"/>
+              </a:defRPr>
+            </a:pPr>
+            <a:r>
+              <a:t>6倍以上</a:t>
+            </a:r>
+          </a:p>
+        </p:txBody>
+      </p:sp>
+      <p:sp>
+        <p:nvSpPr>
+          <p:cNvPr id="28" name="TextBox 27"/>
+          <p:cNvSpPr txBox="1"/>
+          <p:nvPr/>
+        </p:nvSpPr>
+        <p:spPr>
+          <a:xfrm>
+            <a:off x="731520" y="5897880"/>
+            <a:ext cx="2560320" cy="365760"/>
+          </a:xfrm>
+          <a:prstGeom prst="rect">
+            <a:avLst/>
+          </a:prstGeom>
+          <a:noFill/>
+        </p:spPr>
+        <p:txBody>
+          <a:bodyPr wrap="square">
+            <a:spAutoFit/>
+          </a:bodyPr>
+          <a:lstStyle/>
+          <a:p>
+            <a:pPr algn="l">
+              <a:defRPr sz="1600" b="0">
+                <a:solidFill>
+                  <a:srgbClr val="CDD6F4"/>
+                </a:solidFill>
+                <a:latin typeface="Yu Gothic UI"/>
+              </a:defRPr>
+            </a:pPr>
+            <a:r>
+              <a:t>テストケース</a:t>
+            </a:r>
+          </a:p>
+        </p:txBody>
+      </p:sp>
+      <p:sp>
+        <p:nvSpPr>
+          <p:cNvPr id="29" name="TextBox 28"/>
+          <p:cNvSpPr txBox="1"/>
+          <p:nvPr/>
+        </p:nvSpPr>
+        <p:spPr>
+          <a:xfrm>
+            <a:off x="3291840" y="5897880"/>
+            <a:ext cx="2560320" cy="365760"/>
+          </a:xfrm>
+          <a:prstGeom prst="rect">
+            <a:avLst/>
+          </a:prstGeom>
+          <a:noFill/>
+        </p:spPr>
+        <p:txBody>
+          <a:bodyPr wrap="square">
+            <a:spAutoFit/>
+          </a:bodyPr>
+          <a:lstStyle/>
+          <a:p>
+            <a:pPr algn="l">
+              <a:defRPr sz="1600" b="0">
+                <a:solidFill>
+                  <a:srgbClr val="A6ADC8"/>
+                </a:solidFill>
+                <a:latin typeface="Yu Gothic UI"/>
+              </a:defRPr>
+            </a:pPr>
+            <a:r>
+              <a:t>0〜50件</a:t>
+            </a:r>
+          </a:p>
+        </p:txBody>
+      </p:sp>
+      <p:sp>
+        <p:nvSpPr>
+          <p:cNvPr id="30" name="TextBox 29"/>
+          <p:cNvSpPr txBox="1"/>
+          <p:nvPr/>
+        </p:nvSpPr>
+        <p:spPr>
+          <a:xfrm>
+            <a:off x="5852160" y="5897880"/>
+            <a:ext cx="2560320" cy="365760"/>
+          </a:xfrm>
+          <a:prstGeom prst="rect">
+            <a:avLst/>
+          </a:prstGeom>
+          <a:noFill/>
+        </p:spPr>
+        <p:txBody>
+          <a:bodyPr wrap="square">
+            <a:spAutoFit/>
+          </a:bodyPr>
+          <a:lstStyle/>
+          <a:p>
+            <a:pPr algn="l">
+              <a:defRPr sz="1600" b="1">
+                <a:solidFill>
+                  <a:srgbClr val="89B4FA"/>
+                </a:solidFill>
+                <a:latin typeface="Yu Gothic UI"/>
+              </a:defRPr>
+            </a:pPr>
+            <a:r>
+              <a:t>813件</a:t>
+            </a:r>
+          </a:p>
+        </p:txBody>
+      </p:sp>
+      <p:sp>
+        <p:nvSpPr>
+          <p:cNvPr id="31" name="TextBox 30"/>
+          <p:cNvSpPr txBox="1"/>
+          <p:nvPr/>
+        </p:nvSpPr>
+        <p:spPr>
+          <a:xfrm>
+            <a:off x="8686800" y="5897880"/>
+            <a:ext cx="2743200" cy="365760"/>
+          </a:xfrm>
+          <a:prstGeom prst="rect">
+            <a:avLst/>
+          </a:prstGeom>
+          <a:noFill/>
+        </p:spPr>
+        <p:txBody>
+          <a:bodyPr wrap="square">
+            <a:spAutoFit/>
+          </a:bodyPr>
+          <a:lstStyle/>
+          <a:p>
+            <a:pPr algn="l">
+              <a:defRPr sz="1600" b="1">
+                <a:solidFill>
+                  <a:srgbClr val="A6E3A1"/>
+                </a:solidFill>
+                <a:latin typeface="Yu Gothic UI"/>
+              </a:defRPr>
+            </a:pPr>
+            <a:r>
+              <a:t>自動生成</a:t>
             </a:r>
           </a:p>
         </p:txBody>
@@ -4733,7 +6135,7 @@
         <p:spPr>
           <a:xfrm>
             <a:off x="731520" y="365760"/>
-            <a:ext cx="9144000" cy="731520"/>
+            <a:ext cx="9144000" cy="640080"/>
           </a:xfrm>
           <a:prstGeom prst="rect">
             <a:avLst/>
@@ -4755,21 +6157,201 @@
               </a:defRPr>
             </a:pPr>
             <a:r>
-              <a:t>主な機能</a:t>
-            </a:r>
-          </a:p>
-        </p:txBody>
-      </p:sp>
-      <p:sp>
-        <p:nvSpPr>
-          <p:cNvPr id="3" name="Rounded Rectangle 2"/>
+              <a:t>工程別の比較 — テスト工程が消滅</a:t>
+            </a:r>
+          </a:p>
+        </p:txBody>
+      </p:sp>
+      <p:sp>
+        <p:nvSpPr>
+          <p:cNvPr id="3" name="TextBox 2"/>
+          <p:cNvSpPr txBox="1"/>
+          <p:nvPr/>
+        </p:nvSpPr>
+        <p:spPr>
+          <a:xfrm>
+            <a:off x="731520" y="1188720"/>
+            <a:ext cx="1828800" cy="365760"/>
+          </a:xfrm>
+          <a:prstGeom prst="rect">
+            <a:avLst/>
+          </a:prstGeom>
+          <a:noFill/>
+        </p:spPr>
+        <p:txBody>
+          <a:bodyPr wrap="square">
+            <a:spAutoFit/>
+          </a:bodyPr>
+          <a:lstStyle/>
+          <a:p>
+            <a:pPr algn="l">
+              <a:defRPr sz="1400" b="1">
+                <a:solidFill>
+                  <a:srgbClr val="6C7086"/>
+                </a:solidFill>
+                <a:latin typeface="Yu Gothic UI"/>
+              </a:defRPr>
+            </a:pPr>
+            <a:r>
+              <a:t>工程</a:t>
+            </a:r>
+          </a:p>
+        </p:txBody>
+      </p:sp>
+      <p:sp>
+        <p:nvSpPr>
+          <p:cNvPr id="4" name="TextBox 3"/>
+          <p:cNvSpPr txBox="1"/>
+          <p:nvPr/>
+        </p:nvSpPr>
+        <p:spPr>
+          <a:xfrm>
+            <a:off x="2926080" y="1188720"/>
+            <a:ext cx="1828800" cy="365760"/>
+          </a:xfrm>
+          <a:prstGeom prst="rect">
+            <a:avLst/>
+          </a:prstGeom>
+          <a:noFill/>
+        </p:spPr>
+        <p:txBody>
+          <a:bodyPr wrap="square">
+            <a:spAutoFit/>
+          </a:bodyPr>
+          <a:lstStyle/>
+          <a:p>
+            <a:pPr algn="l">
+              <a:defRPr sz="1400" b="1">
+                <a:solidFill>
+                  <a:srgbClr val="6C7086"/>
+                </a:solidFill>
+                <a:latin typeface="Yu Gothic UI"/>
+              </a:defRPr>
+            </a:pPr>
+            <a:r>
+              <a:t>AI駆動</a:t>
+            </a:r>
+          </a:p>
+        </p:txBody>
+      </p:sp>
+      <p:sp>
+        <p:nvSpPr>
+          <p:cNvPr id="5" name="TextBox 4"/>
+          <p:cNvSpPr txBox="1"/>
+          <p:nvPr/>
+        </p:nvSpPr>
+        <p:spPr>
+          <a:xfrm>
+            <a:off x="5029200" y="1188720"/>
+            <a:ext cx="1828800" cy="365760"/>
+          </a:xfrm>
+          <a:prstGeom prst="rect">
+            <a:avLst/>
+          </a:prstGeom>
+          <a:noFill/>
+        </p:spPr>
+        <p:txBody>
+          <a:bodyPr wrap="square">
+            <a:spAutoFit/>
+          </a:bodyPr>
+          <a:lstStyle/>
+          <a:p>
+            <a:pPr algn="l">
+              <a:defRPr sz="1400" b="1">
+                <a:solidFill>
+                  <a:srgbClr val="6C7086"/>
+                </a:solidFill>
+                <a:latin typeface="Yu Gothic UI"/>
+              </a:defRPr>
+            </a:pPr>
+            <a:r>
+              <a:t>従来開発</a:t>
+            </a:r>
+          </a:p>
+        </p:txBody>
+      </p:sp>
+      <p:sp>
+        <p:nvSpPr>
+          <p:cNvPr id="6" name="TextBox 5"/>
+          <p:cNvSpPr txBox="1"/>
+          <p:nvPr/>
+        </p:nvSpPr>
+        <p:spPr>
+          <a:xfrm>
+            <a:off x="7315200" y="1188720"/>
+            <a:ext cx="1828800" cy="365760"/>
+          </a:xfrm>
+          <a:prstGeom prst="rect">
+            <a:avLst/>
+          </a:prstGeom>
+          <a:noFill/>
+        </p:spPr>
+        <p:txBody>
+          <a:bodyPr wrap="square">
+            <a:spAutoFit/>
+          </a:bodyPr>
+          <a:lstStyle/>
+          <a:p>
+            <a:pPr algn="l">
+              <a:defRPr sz="1400" b="1">
+                <a:solidFill>
+                  <a:srgbClr val="6C7086"/>
+                </a:solidFill>
+                <a:latin typeface="Yu Gothic UI"/>
+              </a:defRPr>
+            </a:pPr>
+            <a:r>
+              <a:t>短縮率</a:t>
+            </a:r>
+          </a:p>
+        </p:txBody>
+      </p:sp>
+      <p:sp>
+        <p:nvSpPr>
+          <p:cNvPr id="7" name="TextBox 6"/>
+          <p:cNvSpPr txBox="1"/>
+          <p:nvPr/>
+        </p:nvSpPr>
+        <p:spPr>
+          <a:xfrm>
+            <a:off x="8961120" y="1188720"/>
+            <a:ext cx="1828800" cy="365760"/>
+          </a:xfrm>
+          <a:prstGeom prst="rect">
+            <a:avLst/>
+          </a:prstGeom>
+          <a:noFill/>
+        </p:spPr>
+        <p:txBody>
+          <a:bodyPr wrap="square">
+            <a:spAutoFit/>
+          </a:bodyPr>
+          <a:lstStyle/>
+          <a:p>
+            <a:pPr algn="l">
+              <a:defRPr sz="1400" b="1">
+                <a:solidFill>
+                  <a:srgbClr val="6C7086"/>
+                </a:solidFill>
+                <a:latin typeface="Yu Gothic UI"/>
+              </a:defRPr>
+            </a:pPr>
+            <a:r>
+              <a:t>AIの主な貢献</a:t>
+            </a:r>
+          </a:p>
+        </p:txBody>
+      </p:sp>
+      <p:sp>
+        <p:nvSpPr>
+          <p:cNvPr id="8" name="Rounded Rectangle 7"/>
           <p:cNvSpPr/>
           <p:nvPr/>
         </p:nvSpPr>
         <p:spPr>
           <a:xfrm>
-            <a:off x="731520" y="1371600"/>
-            <a:ext cx="3474720" cy="2194560"/>
+            <a:off x="548640" y="1600200"/>
+            <a:ext cx="10972800" cy="530352"/>
           </a:xfrm>
           <a:prstGeom prst="roundRect">
             <a:avLst/>
@@ -4805,28 +6387,64 @@
       </p:sp>
       <p:sp>
         <p:nvSpPr>
-          <p:cNvPr id="4" name="TextBox 3"/>
-          <p:cNvSpPr txBox="1"/>
-          <p:nvPr/>
-        </p:nvSpPr>
-        <p:spPr>
-          <a:xfrm>
-            <a:off x="1005840" y="1645920"/>
-            <a:ext cx="2926080" cy="457200"/>
-          </a:xfrm>
-          <a:prstGeom prst="rect">
-            <a:avLst/>
-          </a:prstGeom>
-          <a:noFill/>
-        </p:spPr>
-        <p:txBody>
-          <a:bodyPr wrap="square">
-            <a:spAutoFit/>
-          </a:bodyPr>
-          <a:lstStyle/>
-          <a:p>
-            <a:pPr algn="ctr">
-              <a:defRPr sz="2200" b="1">
+          <p:cNvPr id="9" name="TextBox 8"/>
+          <p:cNvSpPr txBox="1"/>
+          <p:nvPr/>
+        </p:nvSpPr>
+        <p:spPr>
+          <a:xfrm>
+            <a:off x="731520" y="1691640"/>
+            <a:ext cx="1828800" cy="365760"/>
+          </a:xfrm>
+          <a:prstGeom prst="rect">
+            <a:avLst/>
+          </a:prstGeom>
+          <a:noFill/>
+        </p:spPr>
+        <p:txBody>
+          <a:bodyPr wrap="square">
+            <a:spAutoFit/>
+          </a:bodyPr>
+          <a:lstStyle/>
+          <a:p>
+            <a:pPr algn="l">
+              <a:defRPr sz="1700" b="0">
+                <a:solidFill>
+                  <a:srgbClr val="CDD6F4"/>
+                </a:solidFill>
+                <a:latin typeface="Yu Gothic UI"/>
+              </a:defRPr>
+            </a:pPr>
+            <a:r>
+              <a:t>企画</a:t>
+            </a:r>
+          </a:p>
+        </p:txBody>
+      </p:sp>
+      <p:sp>
+        <p:nvSpPr>
+          <p:cNvPr id="10" name="TextBox 9"/>
+          <p:cNvSpPr txBox="1"/>
+          <p:nvPr/>
+        </p:nvSpPr>
+        <p:spPr>
+          <a:xfrm>
+            <a:off x="2926080" y="1691640"/>
+            <a:ext cx="1828800" cy="365760"/>
+          </a:xfrm>
+          <a:prstGeom prst="rect">
+            <a:avLst/>
+          </a:prstGeom>
+          <a:noFill/>
+        </p:spPr>
+        <p:txBody>
+          <a:bodyPr wrap="square">
+            <a:spAutoFit/>
+          </a:bodyPr>
+          <a:lstStyle/>
+          <a:p>
+            <a:pPr algn="l">
+              <a:defRPr sz="1700" b="1">
                 <a:solidFill>
                   <a:srgbClr val="89B4FA"/>
                 </a:solidFill>
@@ -4834,35 +6452,35 @@
               </a:defRPr>
             </a:pPr>
             <a:r>
-              <a:t>夢・目標・タスク管理</a:t>
-            </a:r>
-          </a:p>
-        </p:txBody>
-      </p:sp>
-      <p:sp>
-        <p:nvSpPr>
-          <p:cNvPr id="5" name="TextBox 4"/>
-          <p:cNvSpPr txBox="1"/>
-          <p:nvPr/>
-        </p:nvSpPr>
-        <p:spPr>
-          <a:xfrm>
-            <a:off x="1005840" y="2286000"/>
-            <a:ext cx="2926080" cy="1097280"/>
-          </a:xfrm>
-          <a:prstGeom prst="rect">
-            <a:avLst/>
-          </a:prstGeom>
-          <a:noFill/>
-        </p:spPr>
-        <p:txBody>
-          <a:bodyPr wrap="square">
-            <a:spAutoFit/>
-          </a:bodyPr>
-          <a:lstStyle/>
-          <a:p>
-            <a:pPr algn="ctr">
-              <a:defRPr sz="1600" b="0">
+              <a:t>1日</a:t>
+            </a:r>
+          </a:p>
+        </p:txBody>
+      </p:sp>
+      <p:sp>
+        <p:nvSpPr>
+          <p:cNvPr id="11" name="TextBox 10"/>
+          <p:cNvSpPr txBox="1"/>
+          <p:nvPr/>
+        </p:nvSpPr>
+        <p:spPr>
+          <a:xfrm>
+            <a:off x="5029200" y="1691640"/>
+            <a:ext cx="2011680" cy="365760"/>
+          </a:xfrm>
+          <a:prstGeom prst="rect">
+            <a:avLst/>
+          </a:prstGeom>
+          <a:noFill/>
+        </p:spPr>
+        <p:txBody>
+          <a:bodyPr wrap="square">
+            <a:spAutoFit/>
+          </a:bodyPr>
+          <a:lstStyle/>
+          <a:p>
+            <a:pPr algn="l">
+              <a:defRPr sz="1700" b="0">
                 <a:solidFill>
                   <a:srgbClr val="A6ADC8"/>
                 </a:solidFill>
@@ -4870,25 +6488,273 @@
               </a:defRPr>
             </a:pPr>
             <a:r>
-              <a:t>夢→目標→タスクの</a:t>
-            </a:r>
-            <a:br/>
-            <a:r>
-              <a:t>階層で整理</a:t>
-            </a:r>
-          </a:p>
-        </p:txBody>
-      </p:sp>
-      <p:sp>
-        <p:nvSpPr>
-          <p:cNvPr id="6" name="Rounded Rectangle 5"/>
+              <a:t>1〜2週間</a:t>
+            </a:r>
+          </a:p>
+        </p:txBody>
+      </p:sp>
+      <p:sp>
+        <p:nvSpPr>
+          <p:cNvPr id="12" name="TextBox 11"/>
+          <p:cNvSpPr txBox="1"/>
+          <p:nvPr/>
+        </p:nvSpPr>
+        <p:spPr>
+          <a:xfrm>
+            <a:off x="7315200" y="1691640"/>
+            <a:ext cx="1371600" cy="365760"/>
+          </a:xfrm>
+          <a:prstGeom prst="rect">
+            <a:avLst/>
+          </a:prstGeom>
+          <a:noFill/>
+        </p:spPr>
+        <p:txBody>
+          <a:bodyPr wrap="square">
+            <a:spAutoFit/>
+          </a:bodyPr>
+          <a:lstStyle/>
+          <a:p>
+            <a:pPr algn="l">
+              <a:defRPr sz="1700" b="1">
+                <a:solidFill>
+                  <a:srgbClr val="A6E3A1"/>
+                </a:solidFill>
+                <a:latin typeface="Yu Gothic UI"/>
+              </a:defRPr>
+            </a:pPr>
+            <a:r>
+              <a:t>70〜85%</a:t>
+            </a:r>
+          </a:p>
+        </p:txBody>
+      </p:sp>
+      <p:sp>
+        <p:nvSpPr>
+          <p:cNvPr id="13" name="TextBox 12"/>
+          <p:cNvSpPr txBox="1"/>
+          <p:nvPr/>
+        </p:nvSpPr>
+        <p:spPr>
+          <a:xfrm>
+            <a:off x="8961120" y="1691640"/>
+            <a:ext cx="2743200" cy="365760"/>
+          </a:xfrm>
+          <a:prstGeom prst="rect">
+            <a:avLst/>
+          </a:prstGeom>
+          <a:noFill/>
+        </p:spPr>
+        <p:txBody>
+          <a:bodyPr wrap="square">
+            <a:spAutoFit/>
+          </a:bodyPr>
+          <a:lstStyle/>
+          <a:p>
+            <a:pPr algn="l">
+              <a:defRPr sz="1400" b="0">
+                <a:solidFill>
+                  <a:srgbClr val="6C7086"/>
+                </a:solidFill>
+                <a:latin typeface="Yu Gothic UI"/>
+              </a:defRPr>
+            </a:pPr>
+            <a:r>
+              <a:t>機能案ブレスト</a:t>
+            </a:r>
+          </a:p>
+        </p:txBody>
+      </p:sp>
+      <p:sp>
+        <p:nvSpPr>
+          <p:cNvPr id="14" name="TextBox 13"/>
+          <p:cNvSpPr txBox="1"/>
+          <p:nvPr/>
+        </p:nvSpPr>
+        <p:spPr>
+          <a:xfrm>
+            <a:off x="731520" y="2331720"/>
+            <a:ext cx="1828800" cy="365760"/>
+          </a:xfrm>
+          <a:prstGeom prst="rect">
+            <a:avLst/>
+          </a:prstGeom>
+          <a:noFill/>
+        </p:spPr>
+        <p:txBody>
+          <a:bodyPr wrap="square">
+            <a:spAutoFit/>
+          </a:bodyPr>
+          <a:lstStyle/>
+          <a:p>
+            <a:pPr algn="l">
+              <a:defRPr sz="1700" b="0">
+                <a:solidFill>
+                  <a:srgbClr val="CDD6F4"/>
+                </a:solidFill>
+                <a:latin typeface="Yu Gothic UI"/>
+              </a:defRPr>
+            </a:pPr>
+            <a:r>
+              <a:t>要件定義</a:t>
+            </a:r>
+          </a:p>
+        </p:txBody>
+      </p:sp>
+      <p:sp>
+        <p:nvSpPr>
+          <p:cNvPr id="15" name="TextBox 14"/>
+          <p:cNvSpPr txBox="1"/>
+          <p:nvPr/>
+        </p:nvSpPr>
+        <p:spPr>
+          <a:xfrm>
+            <a:off x="2926080" y="2331720"/>
+            <a:ext cx="1828800" cy="365760"/>
+          </a:xfrm>
+          <a:prstGeom prst="rect">
+            <a:avLst/>
+          </a:prstGeom>
+          <a:noFill/>
+        </p:spPr>
+        <p:txBody>
+          <a:bodyPr wrap="square">
+            <a:spAutoFit/>
+          </a:bodyPr>
+          <a:lstStyle/>
+          <a:p>
+            <a:pPr algn="l">
+              <a:defRPr sz="1700" b="1">
+                <a:solidFill>
+                  <a:srgbClr val="89B4FA"/>
+                </a:solidFill>
+                <a:latin typeface="Yu Gothic UI"/>
+              </a:defRPr>
+            </a:pPr>
+            <a:r>
+              <a:t>1日</a:t>
+            </a:r>
+          </a:p>
+        </p:txBody>
+      </p:sp>
+      <p:sp>
+        <p:nvSpPr>
+          <p:cNvPr id="16" name="TextBox 15"/>
+          <p:cNvSpPr txBox="1"/>
+          <p:nvPr/>
+        </p:nvSpPr>
+        <p:spPr>
+          <a:xfrm>
+            <a:off x="5029200" y="2331720"/>
+            <a:ext cx="2011680" cy="365760"/>
+          </a:xfrm>
+          <a:prstGeom prst="rect">
+            <a:avLst/>
+          </a:prstGeom>
+          <a:noFill/>
+        </p:spPr>
+        <p:txBody>
+          <a:bodyPr wrap="square">
+            <a:spAutoFit/>
+          </a:bodyPr>
+          <a:lstStyle/>
+          <a:p>
+            <a:pPr algn="l">
+              <a:defRPr sz="1700" b="0">
+                <a:solidFill>
+                  <a:srgbClr val="A6ADC8"/>
+                </a:solidFill>
+                <a:latin typeface="Yu Gothic UI"/>
+              </a:defRPr>
+            </a:pPr>
+            <a:r>
+              <a:t>2〜4週間</a:t>
+            </a:r>
+          </a:p>
+        </p:txBody>
+      </p:sp>
+      <p:sp>
+        <p:nvSpPr>
+          <p:cNvPr id="17" name="TextBox 16"/>
+          <p:cNvSpPr txBox="1"/>
+          <p:nvPr/>
+        </p:nvSpPr>
+        <p:spPr>
+          <a:xfrm>
+            <a:off x="7315200" y="2331720"/>
+            <a:ext cx="1371600" cy="365760"/>
+          </a:xfrm>
+          <a:prstGeom prst="rect">
+            <a:avLst/>
+          </a:prstGeom>
+          <a:noFill/>
+        </p:spPr>
+        <p:txBody>
+          <a:bodyPr wrap="square">
+            <a:spAutoFit/>
+          </a:bodyPr>
+          <a:lstStyle/>
+          <a:p>
+            <a:pPr algn="l">
+              <a:defRPr sz="1700" b="1">
+                <a:solidFill>
+                  <a:srgbClr val="A6E3A1"/>
+                </a:solidFill>
+                <a:latin typeface="Yu Gothic UI"/>
+              </a:defRPr>
+            </a:pPr>
+            <a:r>
+              <a:t>80〜90%</a:t>
+            </a:r>
+          </a:p>
+        </p:txBody>
+      </p:sp>
+      <p:sp>
+        <p:nvSpPr>
+          <p:cNvPr id="18" name="TextBox 17"/>
+          <p:cNvSpPr txBox="1"/>
+          <p:nvPr/>
+        </p:nvSpPr>
+        <p:spPr>
+          <a:xfrm>
+            <a:off x="8961120" y="2331720"/>
+            <a:ext cx="2743200" cy="365760"/>
+          </a:xfrm>
+          <a:prstGeom prst="rect">
+            <a:avLst/>
+          </a:prstGeom>
+          <a:noFill/>
+        </p:spPr>
+        <p:txBody>
+          <a:bodyPr wrap="square">
+            <a:spAutoFit/>
+          </a:bodyPr>
+          <a:lstStyle/>
+          <a:p>
+            <a:pPr algn="l">
+              <a:defRPr sz="1400" b="0">
+                <a:solidFill>
+                  <a:srgbClr val="6C7086"/>
+                </a:solidFill>
+                <a:latin typeface="Yu Gothic UI"/>
+              </a:defRPr>
+            </a:pPr>
+            <a:r>
+              <a:t>要件書の自動生成</a:t>
+            </a:r>
+          </a:p>
+        </p:txBody>
+      </p:sp>
+      <p:sp>
+        <p:nvSpPr>
+          <p:cNvPr id="19" name="Rounded Rectangle 18"/>
           <p:cNvSpPr/>
           <p:nvPr/>
         </p:nvSpPr>
         <p:spPr>
           <a:xfrm>
-            <a:off x="4480559" y="1371600"/>
-            <a:ext cx="3474720" cy="2194560"/>
+            <a:off x="548640" y="2880360"/>
+            <a:ext cx="10972800" cy="530352"/>
           </a:xfrm>
           <a:prstGeom prst="roundRect">
             <a:avLst/>
@@ -4924,28 +6790,64 @@
       </p:sp>
       <p:sp>
         <p:nvSpPr>
-          <p:cNvPr id="7" name="TextBox 6"/>
-          <p:cNvSpPr txBox="1"/>
-          <p:nvPr/>
-        </p:nvSpPr>
-        <p:spPr>
-          <a:xfrm>
-            <a:off x="4754879" y="1645920"/>
-            <a:ext cx="2926080" cy="457200"/>
-          </a:xfrm>
-          <a:prstGeom prst="rect">
-            <a:avLst/>
-          </a:prstGeom>
-          <a:noFill/>
-        </p:spPr>
-        <p:txBody>
-          <a:bodyPr wrap="square">
-            <a:spAutoFit/>
-          </a:bodyPr>
-          <a:lstStyle/>
-          <a:p>
-            <a:pPr algn="ctr">
-              <a:defRPr sz="2200" b="1">
+          <p:cNvPr id="20" name="TextBox 19"/>
+          <p:cNvSpPr txBox="1"/>
+          <p:nvPr/>
+        </p:nvSpPr>
+        <p:spPr>
+          <a:xfrm>
+            <a:off x="731520" y="2971800"/>
+            <a:ext cx="1828800" cy="365760"/>
+          </a:xfrm>
+          <a:prstGeom prst="rect">
+            <a:avLst/>
+          </a:prstGeom>
+          <a:noFill/>
+        </p:spPr>
+        <p:txBody>
+          <a:bodyPr wrap="square">
+            <a:spAutoFit/>
+          </a:bodyPr>
+          <a:lstStyle/>
+          <a:p>
+            <a:pPr algn="l">
+              <a:defRPr sz="1700" b="0">
+                <a:solidFill>
+                  <a:srgbClr val="CDD6F4"/>
+                </a:solidFill>
+                <a:latin typeface="Yu Gothic UI"/>
+              </a:defRPr>
+            </a:pPr>
+            <a:r>
+              <a:t>仕様検討</a:t>
+            </a:r>
+          </a:p>
+        </p:txBody>
+      </p:sp>
+      <p:sp>
+        <p:nvSpPr>
+          <p:cNvPr id="21" name="TextBox 20"/>
+          <p:cNvSpPr txBox="1"/>
+          <p:nvPr/>
+        </p:nvSpPr>
+        <p:spPr>
+          <a:xfrm>
+            <a:off x="2926080" y="2971800"/>
+            <a:ext cx="1828800" cy="365760"/>
+          </a:xfrm>
+          <a:prstGeom prst="rect">
+            <a:avLst/>
+          </a:prstGeom>
+          <a:noFill/>
+        </p:spPr>
+        <p:txBody>
+          <a:bodyPr wrap="square">
+            <a:spAutoFit/>
+          </a:bodyPr>
+          <a:lstStyle/>
+          <a:p>
+            <a:pPr algn="l">
+              <a:defRPr sz="1700" b="1">
                 <a:solidFill>
                   <a:srgbClr val="89B4FA"/>
                 </a:solidFill>
@@ -4953,35 +6855,35 @@
               </a:defRPr>
             </a:pPr>
             <a:r>
-              <a:t>活動予定</a:t>
-            </a:r>
-          </a:p>
-        </p:txBody>
-      </p:sp>
-      <p:sp>
-        <p:nvSpPr>
-          <p:cNvPr id="8" name="TextBox 7"/>
-          <p:cNvSpPr txBox="1"/>
-          <p:nvPr/>
-        </p:nvSpPr>
-        <p:spPr>
-          <a:xfrm>
-            <a:off x="4754879" y="2286000"/>
-            <a:ext cx="2926080" cy="1097280"/>
-          </a:xfrm>
-          <a:prstGeom prst="rect">
-            <a:avLst/>
-          </a:prstGeom>
-          <a:noFill/>
-        </p:spPr>
-        <p:txBody>
-          <a:bodyPr wrap="square">
-            <a:spAutoFit/>
-          </a:bodyPr>
-          <a:lstStyle/>
-          <a:p>
-            <a:pPr algn="ctr">
-              <a:defRPr sz="1600" b="0">
+              <a:t>2日</a:t>
+            </a:r>
+          </a:p>
+        </p:txBody>
+      </p:sp>
+      <p:sp>
+        <p:nvSpPr>
+          <p:cNvPr id="22" name="TextBox 21"/>
+          <p:cNvSpPr txBox="1"/>
+          <p:nvPr/>
+        </p:nvSpPr>
+        <p:spPr>
+          <a:xfrm>
+            <a:off x="5029200" y="2971800"/>
+            <a:ext cx="2011680" cy="365760"/>
+          </a:xfrm>
+          <a:prstGeom prst="rect">
+            <a:avLst/>
+          </a:prstGeom>
+          <a:noFill/>
+        </p:spPr>
+        <p:txBody>
+          <a:bodyPr wrap="square">
+            <a:spAutoFit/>
+          </a:bodyPr>
+          <a:lstStyle/>
+          <a:p>
+            <a:pPr algn="l">
+              <a:defRPr sz="1700" b="0">
                 <a:solidFill>
                   <a:srgbClr val="A6ADC8"/>
                 </a:solidFill>
@@ -4989,25 +6891,273 @@
               </a:defRPr>
             </a:pPr>
             <a:r>
-              <a:t>タイムラインで</a:t>
-            </a:r>
-            <a:br/>
-            <a:r>
-              <a:t>タスクを可視化</a:t>
-            </a:r>
-          </a:p>
-        </p:txBody>
-      </p:sp>
-      <p:sp>
-        <p:nvSpPr>
-          <p:cNvPr id="9" name="Rounded Rectangle 8"/>
+              <a:t>3〜6週間</a:t>
+            </a:r>
+          </a:p>
+        </p:txBody>
+      </p:sp>
+      <p:sp>
+        <p:nvSpPr>
+          <p:cNvPr id="23" name="TextBox 22"/>
+          <p:cNvSpPr txBox="1"/>
+          <p:nvPr/>
+        </p:nvSpPr>
+        <p:spPr>
+          <a:xfrm>
+            <a:off x="7315200" y="2971800"/>
+            <a:ext cx="1371600" cy="365760"/>
+          </a:xfrm>
+          <a:prstGeom prst="rect">
+            <a:avLst/>
+          </a:prstGeom>
+          <a:noFill/>
+        </p:spPr>
+        <p:txBody>
+          <a:bodyPr wrap="square">
+            <a:spAutoFit/>
+          </a:bodyPr>
+          <a:lstStyle/>
+          <a:p>
+            <a:pPr algn="l">
+              <a:defRPr sz="1700" b="1">
+                <a:solidFill>
+                  <a:srgbClr val="A6E3A1"/>
+                </a:solidFill>
+                <a:latin typeface="Yu Gothic UI"/>
+              </a:defRPr>
+            </a:pPr>
+            <a:r>
+              <a:t>80〜90%</a:t>
+            </a:r>
+          </a:p>
+        </p:txBody>
+      </p:sp>
+      <p:sp>
+        <p:nvSpPr>
+          <p:cNvPr id="24" name="TextBox 23"/>
+          <p:cNvSpPr txBox="1"/>
+          <p:nvPr/>
+        </p:nvSpPr>
+        <p:spPr>
+          <a:xfrm>
+            <a:off x="8961120" y="2971800"/>
+            <a:ext cx="2743200" cy="365760"/>
+          </a:xfrm>
+          <a:prstGeom prst="rect">
+            <a:avLst/>
+          </a:prstGeom>
+          <a:noFill/>
+        </p:spPr>
+        <p:txBody>
+          <a:bodyPr wrap="square">
+            <a:spAutoFit/>
+          </a:bodyPr>
+          <a:lstStyle/>
+          <a:p>
+            <a:pPr algn="l">
+              <a:defRPr sz="1400" b="0">
+                <a:solidFill>
+                  <a:srgbClr val="6C7086"/>
+                </a:solidFill>
+                <a:latin typeface="Yu Gothic UI"/>
+              </a:defRPr>
+            </a:pPr>
+            <a:r>
+              <a:t>画面仕様・DB設計</a:t>
+            </a:r>
+          </a:p>
+        </p:txBody>
+      </p:sp>
+      <p:sp>
+        <p:nvSpPr>
+          <p:cNvPr id="25" name="TextBox 24"/>
+          <p:cNvSpPr txBox="1"/>
+          <p:nvPr/>
+        </p:nvSpPr>
+        <p:spPr>
+          <a:xfrm>
+            <a:off x="731520" y="3611879"/>
+            <a:ext cx="1828800" cy="365760"/>
+          </a:xfrm>
+          <a:prstGeom prst="rect">
+            <a:avLst/>
+          </a:prstGeom>
+          <a:noFill/>
+        </p:spPr>
+        <p:txBody>
+          <a:bodyPr wrap="square">
+            <a:spAutoFit/>
+          </a:bodyPr>
+          <a:lstStyle/>
+          <a:p>
+            <a:pPr algn="l">
+              <a:defRPr sz="1700" b="0">
+                <a:solidFill>
+                  <a:srgbClr val="CDD6F4"/>
+                </a:solidFill>
+                <a:latin typeface="Yu Gothic UI"/>
+              </a:defRPr>
+            </a:pPr>
+            <a:r>
+              <a:t>設計</a:t>
+            </a:r>
+          </a:p>
+        </p:txBody>
+      </p:sp>
+      <p:sp>
+        <p:nvSpPr>
+          <p:cNvPr id="26" name="TextBox 25"/>
+          <p:cNvSpPr txBox="1"/>
+          <p:nvPr/>
+        </p:nvSpPr>
+        <p:spPr>
+          <a:xfrm>
+            <a:off x="2926080" y="3611879"/>
+            <a:ext cx="1828800" cy="365760"/>
+          </a:xfrm>
+          <a:prstGeom prst="rect">
+            <a:avLst/>
+          </a:prstGeom>
+          <a:noFill/>
+        </p:spPr>
+        <p:txBody>
+          <a:bodyPr wrap="square">
+            <a:spAutoFit/>
+          </a:bodyPr>
+          <a:lstStyle/>
+          <a:p>
+            <a:pPr algn="l">
+              <a:defRPr sz="1700" b="1">
+                <a:solidFill>
+                  <a:srgbClr val="89B4FA"/>
+                </a:solidFill>
+                <a:latin typeface="Yu Gothic UI"/>
+              </a:defRPr>
+            </a:pPr>
+            <a:r>
+              <a:t>1日</a:t>
+            </a:r>
+          </a:p>
+        </p:txBody>
+      </p:sp>
+      <p:sp>
+        <p:nvSpPr>
+          <p:cNvPr id="27" name="TextBox 26"/>
+          <p:cNvSpPr txBox="1"/>
+          <p:nvPr/>
+        </p:nvSpPr>
+        <p:spPr>
+          <a:xfrm>
+            <a:off x="5029200" y="3611879"/>
+            <a:ext cx="2011680" cy="365760"/>
+          </a:xfrm>
+          <a:prstGeom prst="rect">
+            <a:avLst/>
+          </a:prstGeom>
+          <a:noFill/>
+        </p:spPr>
+        <p:txBody>
+          <a:bodyPr wrap="square">
+            <a:spAutoFit/>
+          </a:bodyPr>
+          <a:lstStyle/>
+          <a:p>
+            <a:pPr algn="l">
+              <a:defRPr sz="1700" b="0">
+                <a:solidFill>
+                  <a:srgbClr val="A6ADC8"/>
+                </a:solidFill>
+                <a:latin typeface="Yu Gothic UI"/>
+              </a:defRPr>
+            </a:pPr>
+            <a:r>
+              <a:t>2〜4週間</a:t>
+            </a:r>
+          </a:p>
+        </p:txBody>
+      </p:sp>
+      <p:sp>
+        <p:nvSpPr>
+          <p:cNvPr id="28" name="TextBox 27"/>
+          <p:cNvSpPr txBox="1"/>
+          <p:nvPr/>
+        </p:nvSpPr>
+        <p:spPr>
+          <a:xfrm>
+            <a:off x="7315200" y="3611879"/>
+            <a:ext cx="1371600" cy="365760"/>
+          </a:xfrm>
+          <a:prstGeom prst="rect">
+            <a:avLst/>
+          </a:prstGeom>
+          <a:noFill/>
+        </p:spPr>
+        <p:txBody>
+          <a:bodyPr wrap="square">
+            <a:spAutoFit/>
+          </a:bodyPr>
+          <a:lstStyle/>
+          <a:p>
+            <a:pPr algn="l">
+              <a:defRPr sz="1700" b="1">
+                <a:solidFill>
+                  <a:srgbClr val="A6E3A1"/>
+                </a:solidFill>
+                <a:latin typeface="Yu Gothic UI"/>
+              </a:defRPr>
+            </a:pPr>
+            <a:r>
+              <a:t>80〜90%</a:t>
+            </a:r>
+          </a:p>
+        </p:txBody>
+      </p:sp>
+      <p:sp>
+        <p:nvSpPr>
+          <p:cNvPr id="29" name="TextBox 28"/>
+          <p:cNvSpPr txBox="1"/>
+          <p:nvPr/>
+        </p:nvSpPr>
+        <p:spPr>
+          <a:xfrm>
+            <a:off x="8961120" y="3611879"/>
+            <a:ext cx="2743200" cy="365760"/>
+          </a:xfrm>
+          <a:prstGeom prst="rect">
+            <a:avLst/>
+          </a:prstGeom>
+          <a:noFill/>
+        </p:spPr>
+        <p:txBody>
+          <a:bodyPr wrap="square">
+            <a:spAutoFit/>
+          </a:bodyPr>
+          <a:lstStyle/>
+          <a:p>
+            <a:pPr algn="l">
+              <a:defRPr sz="1400" b="0">
+                <a:solidFill>
+                  <a:srgbClr val="6C7086"/>
+                </a:solidFill>
+                <a:latin typeface="Yu Gothic UI"/>
+              </a:defRPr>
+            </a:pPr>
+            <a:r>
+              <a:t>アーキテクチャ選定</a:t>
+            </a:r>
+          </a:p>
+        </p:txBody>
+      </p:sp>
+      <p:sp>
+        <p:nvSpPr>
+          <p:cNvPr id="30" name="Rounded Rectangle 29"/>
           <p:cNvSpPr/>
           <p:nvPr/>
         </p:nvSpPr>
         <p:spPr>
           <a:xfrm>
-            <a:off x="8229600" y="1371600"/>
-            <a:ext cx="3474720" cy="2194560"/>
+            <a:off x="548640" y="4160520"/>
+            <a:ext cx="10972800" cy="530352"/>
           </a:xfrm>
           <a:prstGeom prst="roundRect">
             <a:avLst/>
@@ -5043,28 +7193,64 @@
       </p:sp>
       <p:sp>
         <p:nvSpPr>
-          <p:cNvPr id="10" name="TextBox 9"/>
-          <p:cNvSpPr txBox="1"/>
-          <p:nvPr/>
-        </p:nvSpPr>
-        <p:spPr>
-          <a:xfrm>
-            <a:off x="8503920" y="1645920"/>
-            <a:ext cx="2926080" cy="457200"/>
-          </a:xfrm>
-          <a:prstGeom prst="rect">
-            <a:avLst/>
-          </a:prstGeom>
-          <a:noFill/>
-        </p:spPr>
-        <p:txBody>
-          <a:bodyPr wrap="square">
-            <a:spAutoFit/>
-          </a:bodyPr>
-          <a:lstStyle/>
-          <a:p>
-            <a:pPr algn="ctr">
-              <a:defRPr sz="2200" b="1">
+          <p:cNvPr id="31" name="TextBox 30"/>
+          <p:cNvSpPr txBox="1"/>
+          <p:nvPr/>
+        </p:nvSpPr>
+        <p:spPr>
+          <a:xfrm>
+            <a:off x="731520" y="4251960"/>
+            <a:ext cx="1828800" cy="365760"/>
+          </a:xfrm>
+          <a:prstGeom prst="rect">
+            <a:avLst/>
+          </a:prstGeom>
+          <a:noFill/>
+        </p:spPr>
+        <p:txBody>
+          <a:bodyPr wrap="square">
+            <a:spAutoFit/>
+          </a:bodyPr>
+          <a:lstStyle/>
+          <a:p>
+            <a:pPr algn="l">
+              <a:defRPr sz="1700" b="0">
+                <a:solidFill>
+                  <a:srgbClr val="CDD6F4"/>
+                </a:solidFill>
+                <a:latin typeface="Yu Gothic UI"/>
+              </a:defRPr>
+            </a:pPr>
+            <a:r>
+              <a:t>開発</a:t>
+            </a:r>
+          </a:p>
+        </p:txBody>
+      </p:sp>
+      <p:sp>
+        <p:nvSpPr>
+          <p:cNvPr id="32" name="TextBox 31"/>
+          <p:cNvSpPr txBox="1"/>
+          <p:nvPr/>
+        </p:nvSpPr>
+        <p:spPr>
+          <a:xfrm>
+            <a:off x="2926080" y="4251960"/>
+            <a:ext cx="1828800" cy="365760"/>
+          </a:xfrm>
+          <a:prstGeom prst="rect">
+            <a:avLst/>
+          </a:prstGeom>
+          <a:noFill/>
+        </p:spPr>
+        <p:txBody>
+          <a:bodyPr wrap="square">
+            <a:spAutoFit/>
+          </a:bodyPr>
+          <a:lstStyle/>
+          <a:p>
+            <a:pPr algn="l">
+              <a:defRPr sz="1700" b="1">
                 <a:solidFill>
                   <a:srgbClr val="89B4FA"/>
                 </a:solidFill>
@@ -5072,35 +7258,35 @@
               </a:defRPr>
             </a:pPr>
             <a:r>
-              <a:t>書籍管理</a:t>
-            </a:r>
-          </a:p>
-        </p:txBody>
-      </p:sp>
-      <p:sp>
-        <p:nvSpPr>
-          <p:cNvPr id="11" name="TextBox 10"/>
-          <p:cNvSpPr txBox="1"/>
-          <p:nvPr/>
-        </p:nvSpPr>
-        <p:spPr>
-          <a:xfrm>
-            <a:off x="8503920" y="2286000"/>
-            <a:ext cx="2926080" cy="1097280"/>
-          </a:xfrm>
-          <a:prstGeom prst="rect">
-            <a:avLst/>
-          </a:prstGeom>
-          <a:noFill/>
-        </p:spPr>
-        <p:txBody>
-          <a:bodyPr wrap="square">
-            <a:spAutoFit/>
-          </a:bodyPr>
-          <a:lstStyle/>
-          <a:p>
-            <a:pPr algn="ctr">
-              <a:defRPr sz="1600" b="0">
+              <a:t>14日</a:t>
+            </a:r>
+          </a:p>
+        </p:txBody>
+      </p:sp>
+      <p:sp>
+        <p:nvSpPr>
+          <p:cNvPr id="33" name="TextBox 32"/>
+          <p:cNvSpPr txBox="1"/>
+          <p:nvPr/>
+        </p:nvSpPr>
+        <p:spPr>
+          <a:xfrm>
+            <a:off x="5029200" y="4251960"/>
+            <a:ext cx="2011680" cy="365760"/>
+          </a:xfrm>
+          <a:prstGeom prst="rect">
+            <a:avLst/>
+          </a:prstGeom>
+          <a:noFill/>
+        </p:spPr>
+        <p:txBody>
+          <a:bodyPr wrap="square">
+            <a:spAutoFit/>
+          </a:bodyPr>
+          <a:lstStyle/>
+          <a:p>
+            <a:pPr algn="l">
+              <a:defRPr sz="1700" b="0">
                 <a:solidFill>
                   <a:srgbClr val="A6ADC8"/>
                 </a:solidFill>
@@ -5108,31 +7294,279 @@
               </a:defRPr>
             </a:pPr>
             <a:r>
-              <a:t>本棚風UIで</a:t>
-            </a:r>
-            <a:br/>
-            <a:r>
-              <a:t>読書を管理</a:t>
-            </a:r>
-          </a:p>
-        </p:txBody>
-      </p:sp>
-      <p:sp>
-        <p:nvSpPr>
-          <p:cNvPr id="12" name="Rounded Rectangle 11"/>
+              <a:t>3〜6ヶ月</a:t>
+            </a:r>
+          </a:p>
+        </p:txBody>
+      </p:sp>
+      <p:sp>
+        <p:nvSpPr>
+          <p:cNvPr id="34" name="TextBox 33"/>
+          <p:cNvSpPr txBox="1"/>
+          <p:nvPr/>
+        </p:nvSpPr>
+        <p:spPr>
+          <a:xfrm>
+            <a:off x="7315200" y="4251960"/>
+            <a:ext cx="1371600" cy="365760"/>
+          </a:xfrm>
+          <a:prstGeom prst="rect">
+            <a:avLst/>
+          </a:prstGeom>
+          <a:noFill/>
+        </p:spPr>
+        <p:txBody>
+          <a:bodyPr wrap="square">
+            <a:spAutoFit/>
+          </a:bodyPr>
+          <a:lstStyle/>
+          <a:p>
+            <a:pPr algn="l">
+              <a:defRPr sz="1700" b="1">
+                <a:solidFill>
+                  <a:srgbClr val="A6E3A1"/>
+                </a:solidFill>
+                <a:latin typeface="Yu Gothic UI"/>
+              </a:defRPr>
+            </a:pPr>
+            <a:r>
+              <a:t>85〜95%</a:t>
+            </a:r>
+          </a:p>
+        </p:txBody>
+      </p:sp>
+      <p:sp>
+        <p:nvSpPr>
+          <p:cNvPr id="35" name="TextBox 34"/>
+          <p:cNvSpPr txBox="1"/>
+          <p:nvPr/>
+        </p:nvSpPr>
+        <p:spPr>
+          <a:xfrm>
+            <a:off x="8961120" y="4251960"/>
+            <a:ext cx="2743200" cy="365760"/>
+          </a:xfrm>
+          <a:prstGeom prst="rect">
+            <a:avLst/>
+          </a:prstGeom>
+          <a:noFill/>
+        </p:spPr>
+        <p:txBody>
+          <a:bodyPr wrap="square">
+            <a:spAutoFit/>
+          </a:bodyPr>
+          <a:lstStyle/>
+          <a:p>
+            <a:pPr algn="l">
+              <a:defRPr sz="1400" b="0">
+                <a:solidFill>
+                  <a:srgbClr val="6C7086"/>
+                </a:solidFill>
+                <a:latin typeface="Yu Gothic UI"/>
+              </a:defRPr>
+            </a:pPr>
+            <a:r>
+              <a:t>コード自動生成</a:t>
+            </a:r>
+          </a:p>
+        </p:txBody>
+      </p:sp>
+      <p:sp>
+        <p:nvSpPr>
+          <p:cNvPr id="36" name="TextBox 35"/>
+          <p:cNvSpPr txBox="1"/>
+          <p:nvPr/>
+        </p:nvSpPr>
+        <p:spPr>
+          <a:xfrm>
+            <a:off x="731520" y="4892040"/>
+            <a:ext cx="1828800" cy="365760"/>
+          </a:xfrm>
+          <a:prstGeom prst="rect">
+            <a:avLst/>
+          </a:prstGeom>
+          <a:noFill/>
+        </p:spPr>
+        <p:txBody>
+          <a:bodyPr wrap="square">
+            <a:spAutoFit/>
+          </a:bodyPr>
+          <a:lstStyle/>
+          <a:p>
+            <a:pPr algn="l">
+              <a:defRPr sz="1700" b="1">
+                <a:solidFill>
+                  <a:srgbClr val="F9E2AF"/>
+                </a:solidFill>
+                <a:latin typeface="Yu Gothic UI"/>
+              </a:defRPr>
+            </a:pPr>
+            <a:r>
+              <a:t>テスト</a:t>
+            </a:r>
+          </a:p>
+        </p:txBody>
+      </p:sp>
+      <p:sp>
+        <p:nvSpPr>
+          <p:cNvPr id="37" name="TextBox 36"/>
+          <p:cNvSpPr txBox="1"/>
+          <p:nvPr/>
+        </p:nvSpPr>
+        <p:spPr>
+          <a:xfrm>
+            <a:off x="2926080" y="4892040"/>
+            <a:ext cx="1828800" cy="365760"/>
+          </a:xfrm>
+          <a:prstGeom prst="rect">
+            <a:avLst/>
+          </a:prstGeom>
+          <a:noFill/>
+        </p:spPr>
+        <p:txBody>
+          <a:bodyPr wrap="square">
+            <a:spAutoFit/>
+          </a:bodyPr>
+          <a:lstStyle/>
+          <a:p>
+            <a:pPr algn="l">
+              <a:defRPr sz="1700" b="1">
+                <a:solidFill>
+                  <a:srgbClr val="89B4FA"/>
+                </a:solidFill>
+                <a:latin typeface="Yu Gothic UI"/>
+              </a:defRPr>
+            </a:pPr>
+            <a:r>
+              <a:t>並行</a:t>
+            </a:r>
+          </a:p>
+        </p:txBody>
+      </p:sp>
+      <p:sp>
+        <p:nvSpPr>
+          <p:cNvPr id="38" name="TextBox 37"/>
+          <p:cNvSpPr txBox="1"/>
+          <p:nvPr/>
+        </p:nvSpPr>
+        <p:spPr>
+          <a:xfrm>
+            <a:off x="5029200" y="4892040"/>
+            <a:ext cx="2011680" cy="365760"/>
+          </a:xfrm>
+          <a:prstGeom prst="rect">
+            <a:avLst/>
+          </a:prstGeom>
+          <a:noFill/>
+        </p:spPr>
+        <p:txBody>
+          <a:bodyPr wrap="square">
+            <a:spAutoFit/>
+          </a:bodyPr>
+          <a:lstStyle/>
+          <a:p>
+            <a:pPr algn="l">
+              <a:defRPr sz="1700" b="0">
+                <a:solidFill>
+                  <a:srgbClr val="A6ADC8"/>
+                </a:solidFill>
+                <a:latin typeface="Yu Gothic UI"/>
+              </a:defRPr>
+            </a:pPr>
+            <a:r>
+              <a:t>1〜2ヶ月</a:t>
+            </a:r>
+          </a:p>
+        </p:txBody>
+      </p:sp>
+      <p:sp>
+        <p:nvSpPr>
+          <p:cNvPr id="39" name="TextBox 38"/>
+          <p:cNvSpPr txBox="1"/>
+          <p:nvPr/>
+        </p:nvSpPr>
+        <p:spPr>
+          <a:xfrm>
+            <a:off x="7315200" y="4892040"/>
+            <a:ext cx="1371600" cy="365760"/>
+          </a:xfrm>
+          <a:prstGeom prst="rect">
+            <a:avLst/>
+          </a:prstGeom>
+          <a:noFill/>
+        </p:spPr>
+        <p:txBody>
+          <a:bodyPr wrap="square">
+            <a:spAutoFit/>
+          </a:bodyPr>
+          <a:lstStyle/>
+          <a:p>
+            <a:pPr algn="l">
+              <a:defRPr sz="1700" b="1">
+                <a:solidFill>
+                  <a:srgbClr val="A6E3A1"/>
+                </a:solidFill>
+                <a:latin typeface="Yu Gothic UI"/>
+              </a:defRPr>
+            </a:pPr>
+            <a:r>
+              <a:t>90〜95%</a:t>
+            </a:r>
+          </a:p>
+        </p:txBody>
+      </p:sp>
+      <p:sp>
+        <p:nvSpPr>
+          <p:cNvPr id="40" name="TextBox 39"/>
+          <p:cNvSpPr txBox="1"/>
+          <p:nvPr/>
+        </p:nvSpPr>
+        <p:spPr>
+          <a:xfrm>
+            <a:off x="8961120" y="4892040"/>
+            <a:ext cx="2743200" cy="365760"/>
+          </a:xfrm>
+          <a:prstGeom prst="rect">
+            <a:avLst/>
+          </a:prstGeom>
+          <a:noFill/>
+        </p:spPr>
+        <p:txBody>
+          <a:bodyPr wrap="square">
+            <a:spAutoFit/>
+          </a:bodyPr>
+          <a:lstStyle/>
+          <a:p>
+            <a:pPr algn="l">
+              <a:defRPr sz="1400" b="0">
+                <a:solidFill>
+                  <a:srgbClr val="6C7086"/>
+                </a:solidFill>
+                <a:latin typeface="Yu Gothic UI"/>
+              </a:defRPr>
+            </a:pPr>
+            <a:r>
+              <a:t>813件自動生成+CI/CD</a:t>
+            </a:r>
+          </a:p>
+        </p:txBody>
+      </p:sp>
+      <p:sp>
+        <p:nvSpPr>
+          <p:cNvPr id="41" name="Rounded Rectangle 40"/>
           <p:cNvSpPr/>
           <p:nvPr/>
         </p:nvSpPr>
         <p:spPr>
           <a:xfrm>
-            <a:off x="731520" y="3931920"/>
-            <a:ext cx="3474720" cy="2194560"/>
+            <a:off x="548640" y="5440679"/>
+            <a:ext cx="10972800" cy="530352"/>
           </a:xfrm>
           <a:prstGeom prst="roundRect">
             <a:avLst/>
           </a:prstGeom>
           <a:solidFill>
-            <a:srgbClr val="313244"/>
+            <a:srgbClr val="89B4FA"/>
           </a:solidFill>
           <a:ln>
             <a:noFill/>
@@ -5162,350 +7596,213 @@
       </p:sp>
       <p:sp>
         <p:nvSpPr>
-          <p:cNvPr id="13" name="TextBox 12"/>
-          <p:cNvSpPr txBox="1"/>
-          <p:nvPr/>
-        </p:nvSpPr>
-        <p:spPr>
-          <a:xfrm>
-            <a:off x="1005840" y="4206240"/>
-            <a:ext cx="2926080" cy="457200"/>
-          </a:xfrm>
-          <a:prstGeom prst="rect">
-            <a:avLst/>
-          </a:prstGeom>
-          <a:noFill/>
-        </p:spPr>
-        <p:txBody>
-          <a:bodyPr wrap="square">
-            <a:spAutoFit/>
-          </a:bodyPr>
-          <a:lstStyle/>
-          <a:p>
-            <a:pPr algn="ctr">
-              <a:defRPr sz="2200" b="1">
-                <a:solidFill>
-                  <a:srgbClr val="89B4FA"/>
-                </a:solidFill>
-                <a:latin typeface="Yu Gothic UI"/>
-              </a:defRPr>
-            </a:pPr>
-            <a:r>
-              <a:t>統計・分析</a:t>
-            </a:r>
-          </a:p>
-        </p:txBody>
-      </p:sp>
-      <p:sp>
-        <p:nvSpPr>
-          <p:cNvPr id="14" name="TextBox 13"/>
-          <p:cNvSpPr txBox="1"/>
-          <p:nvPr/>
-        </p:nvSpPr>
-        <p:spPr>
-          <a:xfrm>
-            <a:off x="1005840" y="4846320"/>
-            <a:ext cx="2926080" cy="1097280"/>
-          </a:xfrm>
-          <a:prstGeom prst="rect">
-            <a:avLst/>
-          </a:prstGeom>
-          <a:noFill/>
-        </p:spPr>
-        <p:txBody>
-          <a:bodyPr wrap="square">
-            <a:spAutoFit/>
-          </a:bodyPr>
-          <a:lstStyle/>
-          <a:p>
-            <a:pPr algn="ctr">
-              <a:defRPr sz="1600" b="0">
-                <a:solidFill>
-                  <a:srgbClr val="A6ADC8"/>
-                </a:solidFill>
-                <a:latin typeface="Yu Gothic UI"/>
-              </a:defRPr>
-            </a:pPr>
-            <a:r>
-              <a:t>活動時間・連続記録を</a:t>
-            </a:r>
-            <a:br/>
-            <a:r>
-              <a:t>グラフで可視化</a:t>
-            </a:r>
-          </a:p>
-        </p:txBody>
-      </p:sp>
-      <p:sp>
-        <p:nvSpPr>
-          <p:cNvPr id="15" name="Rounded Rectangle 14"/>
-          <p:cNvSpPr/>
-          <p:nvPr/>
-        </p:nvSpPr>
-        <p:spPr>
-          <a:xfrm>
-            <a:off x="4480559" y="3931920"/>
-            <a:ext cx="3474720" cy="2194560"/>
-          </a:xfrm>
-          <a:prstGeom prst="roundRect">
-            <a:avLst/>
-          </a:prstGeom>
-          <a:solidFill>
-            <a:srgbClr val="313244"/>
-          </a:solidFill>
-          <a:ln>
-            <a:noFill/>
-          </a:ln>
-        </p:spPr>
-        <p:style>
-          <a:lnRef idx="1">
-            <a:schemeClr val="accent1"/>
-          </a:lnRef>
-          <a:fillRef idx="3">
-            <a:schemeClr val="accent1"/>
-          </a:fillRef>
-          <a:effectRef idx="2">
-            <a:schemeClr val="accent1"/>
-          </a:effectRef>
-          <a:fontRef idx="minor">
-            <a:schemeClr val="lt1"/>
-          </a:fontRef>
-        </p:style>
-        <p:txBody>
-          <a:bodyPr rtlCol="0" anchor="ctr"/>
-          <a:lstStyle/>
-          <a:p>
-            <a:pPr algn="ctr"/>
-          </a:p>
-        </p:txBody>
-      </p:sp>
-      <p:sp>
-        <p:nvSpPr>
-          <p:cNvPr id="16" name="TextBox 15"/>
-          <p:cNvSpPr txBox="1"/>
-          <p:nvPr/>
-        </p:nvSpPr>
-        <p:spPr>
-          <a:xfrm>
-            <a:off x="4754879" y="4206240"/>
-            <a:ext cx="2926080" cy="457200"/>
-          </a:xfrm>
-          <a:prstGeom prst="rect">
-            <a:avLst/>
-          </a:prstGeom>
-          <a:noFill/>
-        </p:spPr>
-        <p:txBody>
-          <a:bodyPr wrap="square">
-            <a:spAutoFit/>
-          </a:bodyPr>
-          <a:lstStyle/>
-          <a:p>
-            <a:pPr algn="ctr">
-              <a:defRPr sz="2200" b="1">
-                <a:solidFill>
-                  <a:srgbClr val="89B4FA"/>
-                </a:solidFill>
-                <a:latin typeface="Yu Gothic UI"/>
-              </a:defRPr>
-            </a:pPr>
-            <a:r>
-              <a:t>星座システム</a:t>
-            </a:r>
-          </a:p>
-        </p:txBody>
-      </p:sp>
-      <p:sp>
-        <p:nvSpPr>
-          <p:cNvPr id="17" name="TextBox 16"/>
-          <p:cNvSpPr txBox="1"/>
-          <p:nvPr/>
-        </p:nvSpPr>
-        <p:spPr>
-          <a:xfrm>
-            <a:off x="4754879" y="4846320"/>
-            <a:ext cx="2926080" cy="1097280"/>
-          </a:xfrm>
-          <a:prstGeom prst="rect">
-            <a:avLst/>
-          </a:prstGeom>
-          <a:noFill/>
-        </p:spPr>
-        <p:txBody>
-          <a:bodyPr wrap="square">
-            <a:spAutoFit/>
-          </a:bodyPr>
-          <a:lstStyle/>
-          <a:p>
-            <a:pPr algn="ctr">
-              <a:defRPr sz="1600" b="0">
-                <a:solidFill>
-                  <a:srgbClr val="A6ADC8"/>
-                </a:solidFill>
-                <a:latin typeface="Yu Gothic UI"/>
-              </a:defRPr>
-            </a:pPr>
-            <a:r>
-              <a:t>活動で星が灯り</a:t>
-            </a:r>
-            <a:br/>
-            <a:r>
-              <a:t>星座が完成</a:t>
-            </a:r>
-          </a:p>
-        </p:txBody>
-      </p:sp>
-      <p:sp>
-        <p:nvSpPr>
-          <p:cNvPr id="18" name="Rounded Rectangle 17"/>
-          <p:cNvSpPr/>
-          <p:nvPr/>
-        </p:nvSpPr>
-        <p:spPr>
-          <a:xfrm>
-            <a:off x="8229600" y="3931920"/>
-            <a:ext cx="3474720" cy="2194560"/>
-          </a:xfrm>
-          <a:prstGeom prst="roundRect">
-            <a:avLst/>
-          </a:prstGeom>
-          <a:solidFill>
-            <a:srgbClr val="313244"/>
-          </a:solidFill>
-          <a:ln>
-            <a:noFill/>
-          </a:ln>
-        </p:spPr>
-        <p:style>
-          <a:lnRef idx="1">
-            <a:schemeClr val="accent1"/>
-          </a:lnRef>
-          <a:fillRef idx="3">
-            <a:schemeClr val="accent1"/>
-          </a:fillRef>
-          <a:effectRef idx="2">
-            <a:schemeClr val="accent1"/>
-          </a:effectRef>
-          <a:fontRef idx="minor">
-            <a:schemeClr val="lt1"/>
-          </a:fontRef>
-        </p:style>
-        <p:txBody>
-          <a:bodyPr rtlCol="0" anchor="ctr"/>
-          <a:lstStyle/>
-          <a:p>
-            <a:pPr algn="ctr"/>
-          </a:p>
-        </p:txBody>
-      </p:sp>
-      <p:sp>
-        <p:nvSpPr>
-          <p:cNvPr id="19" name="TextBox 18"/>
-          <p:cNvSpPr txBox="1"/>
-          <p:nvPr/>
-        </p:nvSpPr>
-        <p:spPr>
-          <a:xfrm>
-            <a:off x="8503920" y="4206240"/>
-            <a:ext cx="2926080" cy="457200"/>
-          </a:xfrm>
-          <a:prstGeom prst="rect">
-            <a:avLst/>
-          </a:prstGeom>
-          <a:noFill/>
-        </p:spPr>
-        <p:txBody>
-          <a:bodyPr wrap="square">
-            <a:spAutoFit/>
-          </a:bodyPr>
-          <a:lstStyle/>
-          <a:p>
-            <a:pPr algn="ctr">
-              <a:defRPr sz="2200" b="1">
-                <a:solidFill>
-                  <a:srgbClr val="89B4FA"/>
-                </a:solidFill>
-                <a:latin typeface="Yu Gothic UI"/>
-              </a:defRPr>
-            </a:pPr>
-            <a:r>
-              <a:t>ダッシュボード</a:t>
-            </a:r>
-          </a:p>
-        </p:txBody>
-      </p:sp>
-      <p:sp>
-        <p:nvSpPr>
-          <p:cNvPr id="20" name="TextBox 19"/>
-          <p:cNvSpPr txBox="1"/>
-          <p:nvPr/>
-        </p:nvSpPr>
-        <p:spPr>
-          <a:xfrm>
-            <a:off x="8503920" y="4846320"/>
-            <a:ext cx="2926080" cy="1097280"/>
-          </a:xfrm>
-          <a:prstGeom prst="rect">
-            <a:avLst/>
-          </a:prstGeom>
-          <a:noFill/>
-        </p:spPr>
-        <p:txBody>
-          <a:bodyPr wrap="square">
-            <a:spAutoFit/>
-          </a:bodyPr>
-          <a:lstStyle/>
-          <a:p>
-            <a:pPr algn="ctr">
-              <a:defRPr sz="1600" b="0">
-                <a:solidFill>
-                  <a:srgbClr val="A6ADC8"/>
-                </a:solidFill>
-                <a:latin typeface="Yu Gothic UI"/>
-              </a:defRPr>
-            </a:pPr>
-            <a:r>
-              <a:t>必要な情報を</a:t>
-            </a:r>
-            <a:br/>
-            <a:r>
-              <a:t>カスタマイズ表示</a:t>
-            </a:r>
-          </a:p>
-        </p:txBody>
-      </p:sp>
-      <p:sp>
-        <p:nvSpPr>
-          <p:cNvPr id="21" name="TextBox 20"/>
-          <p:cNvSpPr txBox="1"/>
-          <p:nvPr/>
-        </p:nvSpPr>
-        <p:spPr>
-          <a:xfrm>
-            <a:off x="1828800" y="6217920"/>
-            <a:ext cx="8229600" cy="457200"/>
-          </a:xfrm>
-          <a:prstGeom prst="rect">
-            <a:avLst/>
-          </a:prstGeom>
-          <a:noFill/>
-        </p:spPr>
-        <p:txBody>
-          <a:bodyPr wrap="square">
-            <a:spAutoFit/>
-          </a:bodyPr>
-          <a:lstStyle/>
-          <a:p>
-            <a:pPr algn="ctr">
-              <a:defRPr sz="1300" b="0">
-                <a:solidFill>
-                  <a:srgbClr val="6C7086"/>
-                </a:solidFill>
-                <a:latin typeface="Yu Gothic UI"/>
-              </a:defRPr>
-            </a:pPr>
-            <a:r>
-              <a:t>* 各画面のスクリーンショットは後ほどデモでお見せします</a:t>
+          <p:cNvPr id="42" name="TextBox 41"/>
+          <p:cNvSpPr txBox="1"/>
+          <p:nvPr/>
+        </p:nvSpPr>
+        <p:spPr>
+          <a:xfrm>
+            <a:off x="731520" y="5532119"/>
+            <a:ext cx="1828800" cy="365760"/>
+          </a:xfrm>
+          <a:prstGeom prst="rect">
+            <a:avLst/>
+          </a:prstGeom>
+          <a:noFill/>
+        </p:spPr>
+        <p:txBody>
+          <a:bodyPr wrap="square">
+            <a:spAutoFit/>
+          </a:bodyPr>
+          <a:lstStyle/>
+          <a:p>
+            <a:pPr algn="l">
+              <a:defRPr sz="1700" b="1">
+                <a:solidFill>
+                  <a:srgbClr val="1E1E2E"/>
+                </a:solidFill>
+                <a:latin typeface="Yu Gothic UI"/>
+              </a:defRPr>
+            </a:pPr>
+            <a:r>
+              <a:t>合計</a:t>
+            </a:r>
+          </a:p>
+        </p:txBody>
+      </p:sp>
+      <p:sp>
+        <p:nvSpPr>
+          <p:cNvPr id="43" name="TextBox 42"/>
+          <p:cNvSpPr txBox="1"/>
+          <p:nvPr/>
+        </p:nvSpPr>
+        <p:spPr>
+          <a:xfrm>
+            <a:off x="2926080" y="5532119"/>
+            <a:ext cx="1828800" cy="365760"/>
+          </a:xfrm>
+          <a:prstGeom prst="rect">
+            <a:avLst/>
+          </a:prstGeom>
+          <a:noFill/>
+        </p:spPr>
+        <p:txBody>
+          <a:bodyPr wrap="square">
+            <a:spAutoFit/>
+          </a:bodyPr>
+          <a:lstStyle/>
+          <a:p>
+            <a:pPr algn="l">
+              <a:defRPr sz="1700" b="1">
+                <a:solidFill>
+                  <a:srgbClr val="1E1E2E"/>
+                </a:solidFill>
+                <a:latin typeface="Yu Gothic UI"/>
+              </a:defRPr>
+            </a:pPr>
+            <a:r>
+              <a:t>約21日</a:t>
+            </a:r>
+          </a:p>
+        </p:txBody>
+      </p:sp>
+      <p:sp>
+        <p:nvSpPr>
+          <p:cNvPr id="44" name="TextBox 43"/>
+          <p:cNvSpPr txBox="1"/>
+          <p:nvPr/>
+        </p:nvSpPr>
+        <p:spPr>
+          <a:xfrm>
+            <a:off x="5029200" y="5532119"/>
+            <a:ext cx="2011680" cy="365760"/>
+          </a:xfrm>
+          <a:prstGeom prst="rect">
+            <a:avLst/>
+          </a:prstGeom>
+          <a:noFill/>
+        </p:spPr>
+        <p:txBody>
+          <a:bodyPr wrap="square">
+            <a:spAutoFit/>
+          </a:bodyPr>
+          <a:lstStyle/>
+          <a:p>
+            <a:pPr algn="l">
+              <a:defRPr sz="1700" b="0">
+                <a:solidFill>
+                  <a:srgbClr val="1E1E2E"/>
+                </a:solidFill>
+                <a:latin typeface="Yu Gothic UI"/>
+              </a:defRPr>
+            </a:pPr>
+            <a:r>
+              <a:t>7〜14ヶ月</a:t>
+            </a:r>
+          </a:p>
+        </p:txBody>
+      </p:sp>
+      <p:sp>
+        <p:nvSpPr>
+          <p:cNvPr id="45" name="TextBox 44"/>
+          <p:cNvSpPr txBox="1"/>
+          <p:nvPr/>
+        </p:nvSpPr>
+        <p:spPr>
+          <a:xfrm>
+            <a:off x="7315200" y="5532119"/>
+            <a:ext cx="1371600" cy="365760"/>
+          </a:xfrm>
+          <a:prstGeom prst="rect">
+            <a:avLst/>
+          </a:prstGeom>
+          <a:noFill/>
+        </p:spPr>
+        <p:txBody>
+          <a:bodyPr wrap="square">
+            <a:spAutoFit/>
+          </a:bodyPr>
+          <a:lstStyle/>
+          <a:p>
+            <a:pPr algn="l">
+              <a:defRPr sz="1700" b="1">
+                <a:solidFill>
+                  <a:srgbClr val="1E1E2E"/>
+                </a:solidFill>
+                <a:latin typeface="Yu Gothic UI"/>
+              </a:defRPr>
+            </a:pPr>
+            <a:r>
+              <a:t>約90%</a:t>
+            </a:r>
+          </a:p>
+        </p:txBody>
+      </p:sp>
+      <p:sp>
+        <p:nvSpPr>
+          <p:cNvPr id="46" name="TextBox 45"/>
+          <p:cNvSpPr txBox="1"/>
+          <p:nvPr/>
+        </p:nvSpPr>
+        <p:spPr>
+          <a:xfrm>
+            <a:off x="8961120" y="5532119"/>
+            <a:ext cx="2743200" cy="365760"/>
+          </a:xfrm>
+          <a:prstGeom prst="rect">
+            <a:avLst/>
+          </a:prstGeom>
+          <a:noFill/>
+        </p:spPr>
+        <p:txBody>
+          <a:bodyPr wrap="square">
+            <a:spAutoFit/>
+          </a:bodyPr>
+          <a:lstStyle/>
+          <a:p>
+            <a:pPr algn="l">
+              <a:defRPr sz="1400" b="0">
+                <a:solidFill>
+                  <a:srgbClr val="1E1E2E"/>
+                </a:solidFill>
+                <a:latin typeface="Yu Gothic UI"/>
+              </a:defRPr>
+            </a:pPr>
+          </a:p>
+        </p:txBody>
+      </p:sp>
+      <p:sp>
+        <p:nvSpPr>
+          <p:cNvPr id="47" name="TextBox 46"/>
+          <p:cNvSpPr txBox="1"/>
+          <p:nvPr/>
+        </p:nvSpPr>
+        <p:spPr>
+          <a:xfrm>
+            <a:off x="731520" y="6217920"/>
+            <a:ext cx="10058400" cy="365760"/>
+          </a:xfrm>
+          <a:prstGeom prst="rect">
+            <a:avLst/>
+          </a:prstGeom>
+          <a:noFill/>
+        </p:spPr>
+        <p:txBody>
+          <a:bodyPr wrap="square">
+            <a:spAutoFit/>
+          </a:bodyPr>
+          <a:lstStyle/>
+          <a:p>
+            <a:pPr algn="l">
+              <a:defRPr sz="1600" b="1">
+                <a:solidFill>
+                  <a:srgbClr val="F9E2AF"/>
+                </a:solidFill>
+                <a:latin typeface="Yu Gothic UI"/>
+              </a:defRPr>
+            </a:pPr>
+            <a:r>
+              <a:t>最も効果が大きい工程: テスト（90〜95%短縮）— 開発と同時にAIがテストを自動生成</a:t>
             </a:r>
           </a:p>
         </p:txBody>
@@ -5545,7 +7842,7 @@
         <p:spPr>
           <a:xfrm>
             <a:off x="731520" y="365760"/>
-            <a:ext cx="9144000" cy="731520"/>
+            <a:ext cx="9144000" cy="640080"/>
           </a:xfrm>
           <a:prstGeom prst="rect">
             <a:avLst/>
@@ -5567,21 +7864,57 @@
               </a:defRPr>
             </a:pPr>
             <a:r>
-              <a:t>AI駆動開発の成果</a:t>
-            </a:r>
-          </a:p>
-        </p:txBody>
-      </p:sp>
-      <p:sp>
-        <p:nvSpPr>
-          <p:cNvPr id="3" name="Rounded Rectangle 2"/>
+              <a:t>なぜこれが可能なのか？</a:t>
+            </a:r>
+          </a:p>
+        </p:txBody>
+      </p:sp>
+      <p:sp>
+        <p:nvSpPr>
+          <p:cNvPr id="3" name="TextBox 2"/>
+          <p:cNvSpPr txBox="1"/>
+          <p:nvPr/>
+        </p:nvSpPr>
+        <p:spPr>
+          <a:xfrm>
+            <a:off x="731520" y="1005840"/>
+            <a:ext cx="9144000" cy="457200"/>
+          </a:xfrm>
+          <a:prstGeom prst="rect">
+            <a:avLst/>
+          </a:prstGeom>
+          <a:noFill/>
+        </p:spPr>
+        <p:txBody>
+          <a:bodyPr wrap="square">
+            <a:spAutoFit/>
+          </a:bodyPr>
+          <a:lstStyle/>
+          <a:p>
+            <a:pPr algn="l">
+              <a:defRPr sz="1800" b="0">
+                <a:solidFill>
+                  <a:srgbClr val="A6ADC8"/>
+                </a:solidFill>
+                <a:latin typeface="Yu Gothic UI"/>
+              </a:defRPr>
+            </a:pPr>
+            <a:r>
+              <a:t>魔法ではなく「仕組み」— Claude Code の5段階最適化</a:t>
+            </a:r>
+          </a:p>
+        </p:txBody>
+      </p:sp>
+      <p:sp>
+        <p:nvSpPr>
+          <p:cNvPr id="4" name="Rounded Rectangle 3"/>
           <p:cNvSpPr/>
           <p:nvPr/>
         </p:nvSpPr>
         <p:spPr>
           <a:xfrm>
-            <a:off x="731520" y="1371600"/>
-            <a:ext cx="5029200" cy="2286000"/>
+            <a:off x="731520" y="1737360"/>
+            <a:ext cx="10515600" cy="777240"/>
           </a:xfrm>
           <a:prstGeom prst="roundRect">
             <a:avLst/>
@@ -5617,30 +7950,80 @@
       </p:sp>
       <p:sp>
         <p:nvSpPr>
-          <p:cNvPr id="4" name="TextBox 3"/>
-          <p:cNvSpPr txBox="1"/>
-          <p:nvPr/>
-        </p:nvSpPr>
-        <p:spPr>
-          <a:xfrm>
-            <a:off x="1097280" y="1554480"/>
-            <a:ext cx="4389120" cy="2011680"/>
-          </a:xfrm>
-          <a:prstGeom prst="rect">
-            <a:avLst/>
-          </a:prstGeom>
-          <a:noFill/>
-        </p:spPr>
-        <p:txBody>
-          <a:bodyPr wrap="square">
-            <a:spAutoFit/>
-          </a:bodyPr>
-          <a:lstStyle/>
-          <a:p>
-            <a:pPr algn="l">
-              <a:spcAft>
-                <a:spcPts val="1200"/>
-              </a:spcAft>
+          <p:cNvPr id="5" name="Oval 4"/>
+          <p:cNvSpPr/>
+          <p:nvPr/>
+        </p:nvSpPr>
+        <p:spPr>
+          <a:xfrm>
+            <a:off x="1005840" y="1737360"/>
+            <a:ext cx="822960" cy="822960"/>
+          </a:xfrm>
+          <a:prstGeom prst="ellipse">
+            <a:avLst/>
+          </a:prstGeom>
+          <a:solidFill>
+            <a:srgbClr val="89B4FA"/>
+          </a:solidFill>
+          <a:ln>
+            <a:noFill/>
+          </a:ln>
+        </p:spPr>
+        <p:style>
+          <a:lnRef idx="1">
+            <a:schemeClr val="accent1"/>
+          </a:lnRef>
+          <a:fillRef idx="3">
+            <a:schemeClr val="accent1"/>
+          </a:fillRef>
+          <a:effectRef idx="2">
+            <a:schemeClr val="accent1"/>
+          </a:effectRef>
+          <a:fontRef idx="minor">
+            <a:schemeClr val="lt1"/>
+          </a:fontRef>
+        </p:style>
+        <p:txBody>
+          <a:bodyPr rtlCol="0" anchor="ctr"/>
+          <a:lstStyle/>
+          <a:p>
+            <a:pPr algn="ctr">
+              <a:defRPr sz="3200" b="1">
+                <a:solidFill>
+                  <a:srgbClr val="1E1E2E"/>
+                </a:solidFill>
+                <a:latin typeface="Yu Gothic UI"/>
+              </a:defRPr>
+            </a:pPr>
+            <a:r>
+              <a:t>1</a:t>
+            </a:r>
+          </a:p>
+        </p:txBody>
+      </p:sp>
+      <p:sp>
+        <p:nvSpPr>
+          <p:cNvPr id="6" name="TextBox 5"/>
+          <p:cNvSpPr txBox="1"/>
+          <p:nvPr/>
+        </p:nvSpPr>
+        <p:spPr>
+          <a:xfrm>
+            <a:off x="2103120" y="1810512"/>
+            <a:ext cx="3200400" cy="365760"/>
+          </a:xfrm>
+          <a:prstGeom prst="rect">
+            <a:avLst/>
+          </a:prstGeom>
+          <a:noFill/>
+        </p:spPr>
+        <p:txBody>
+          <a:bodyPr wrap="square">
+            <a:spAutoFit/>
+          </a:bodyPr>
+          <a:lstStyle/>
+          <a:p>
+            <a:pPr algn="l">
               <a:defRPr sz="2000" b="1">
                 <a:solidFill>
                   <a:srgbClr val="89B4FA"/>
@@ -5649,69 +8032,57 @@
               </a:defRPr>
             </a:pPr>
             <a:r>
-              <a:t>開発条件</a:t>
-            </a:r>
-          </a:p>
-          <a:p>
-            <a:pPr algn="l">
-              <a:spcAft>
-                <a:spcPts val="600"/>
-              </a:spcAft>
+              <a:t>素のプロンプト</a:t>
+            </a:r>
+          </a:p>
+        </p:txBody>
+      </p:sp>
+      <p:sp>
+        <p:nvSpPr>
+          <p:cNvPr id="7" name="TextBox 6"/>
+          <p:cNvSpPr txBox="1"/>
+          <p:nvPr/>
+        </p:nvSpPr>
+        <p:spPr>
+          <a:xfrm>
+            <a:off x="5486400" y="1847088"/>
+            <a:ext cx="5486400" cy="365760"/>
+          </a:xfrm>
+          <a:prstGeom prst="rect">
+            <a:avLst/>
+          </a:prstGeom>
+          <a:noFill/>
+        </p:spPr>
+        <p:txBody>
+          <a:bodyPr wrap="square">
+            <a:spAutoFit/>
+          </a:bodyPr>
+          <a:lstStyle/>
+          <a:p>
+            <a:pPr algn="l">
               <a:defRPr sz="1600" b="0">
                 <a:solidFill>
-                  <a:srgbClr val="CDD6F4"/>
-                </a:solidFill>
-                <a:latin typeface="Yu Gothic UI"/>
-              </a:defRPr>
-            </a:pPr>
-            <a:r>
-              <a:t>Flutter / Dart 経験: ゼロ</a:t>
-            </a:r>
-          </a:p>
-          <a:p>
-            <a:pPr algn="l">
-              <a:spcAft>
-                <a:spcPts val="600"/>
-              </a:spcAft>
-              <a:defRPr sz="1600" b="0">
-                <a:solidFill>
-                  <a:srgbClr val="CDD6F4"/>
-                </a:solidFill>
-                <a:latin typeface="Yu Gothic UI"/>
-              </a:defRPr>
-            </a:pPr>
-            <a:r>
-              <a:t>スクラッチ開発経験: ゼロ</a:t>
-            </a:r>
-          </a:p>
-          <a:p>
-            <a:pPr algn="l">
-              <a:spcAft>
-                <a:spcPts val="600"/>
-              </a:spcAft>
-              <a:defRPr sz="1600" b="0">
-                <a:solidFill>
-                  <a:srgbClr val="CDD6F4"/>
-                </a:solidFill>
-                <a:latin typeface="Yu Gothic UI"/>
-              </a:defRPr>
-            </a:pPr>
-            <a:r>
-              <a:t>AI: Claude Code（ペアプログラミング）</a:t>
-            </a:r>
-          </a:p>
-        </p:txBody>
-      </p:sp>
-      <p:sp>
-        <p:nvSpPr>
-          <p:cNvPr id="5" name="Rounded Rectangle 4"/>
+                  <a:srgbClr val="A6ADC8"/>
+                </a:solidFill>
+                <a:latin typeface="Yu Gothic UI"/>
+              </a:defRPr>
+            </a:pPr>
+            <a:r>
+              <a:t>毎回ルールを口頭で指示</a:t>
+            </a:r>
+          </a:p>
+        </p:txBody>
+      </p:sp>
+      <p:sp>
+        <p:nvSpPr>
+          <p:cNvPr id="8" name="Rounded Rectangle 7"/>
           <p:cNvSpPr/>
           <p:nvPr/>
         </p:nvSpPr>
         <p:spPr>
           <a:xfrm>
-            <a:off x="6217920" y="1371600"/>
-            <a:ext cx="5212080" cy="2286000"/>
+            <a:off x="731520" y="2651760"/>
+            <a:ext cx="10515600" cy="777240"/>
           </a:xfrm>
           <a:prstGeom prst="roundRect">
             <a:avLst/>
@@ -5747,267 +8118,125 @@
       </p:sp>
       <p:sp>
         <p:nvSpPr>
-          <p:cNvPr id="6" name="TextBox 5"/>
-          <p:cNvSpPr txBox="1"/>
-          <p:nvPr/>
-        </p:nvSpPr>
-        <p:spPr>
-          <a:xfrm>
-            <a:off x="6583680" y="1554480"/>
-            <a:ext cx="4572000" cy="2011680"/>
-          </a:xfrm>
-          <a:prstGeom prst="rect">
-            <a:avLst/>
-          </a:prstGeom>
-          <a:noFill/>
-        </p:spPr>
-        <p:txBody>
-          <a:bodyPr wrap="square">
-            <a:spAutoFit/>
-          </a:bodyPr>
-          <a:lstStyle/>
-          <a:p>
-            <a:pPr algn="l">
-              <a:spcAft>
-                <a:spcPts val="1200"/>
-              </a:spcAft>
+          <p:cNvPr id="9" name="Oval 8"/>
+          <p:cNvSpPr/>
+          <p:nvPr/>
+        </p:nvSpPr>
+        <p:spPr>
+          <a:xfrm>
+            <a:off x="1005840" y="2651760"/>
+            <a:ext cx="822960" cy="822960"/>
+          </a:xfrm>
+          <a:prstGeom prst="ellipse">
+            <a:avLst/>
+          </a:prstGeom>
+          <a:solidFill>
+            <a:srgbClr val="89B4FA"/>
+          </a:solidFill>
+          <a:ln>
+            <a:noFill/>
+          </a:ln>
+        </p:spPr>
+        <p:style>
+          <a:lnRef idx="1">
+            <a:schemeClr val="accent1"/>
+          </a:lnRef>
+          <a:fillRef idx="3">
+            <a:schemeClr val="accent1"/>
+          </a:fillRef>
+          <a:effectRef idx="2">
+            <a:schemeClr val="accent1"/>
+          </a:effectRef>
+          <a:fontRef idx="minor">
+            <a:schemeClr val="lt1"/>
+          </a:fontRef>
+        </p:style>
+        <p:txBody>
+          <a:bodyPr rtlCol="0" anchor="ctr"/>
+          <a:lstStyle/>
+          <a:p>
+            <a:pPr algn="ctr">
+              <a:defRPr sz="3200" b="1">
+                <a:solidFill>
+                  <a:srgbClr val="1E1E2E"/>
+                </a:solidFill>
+                <a:latin typeface="Yu Gothic UI"/>
+              </a:defRPr>
+            </a:pPr>
+            <a:r>
+              <a:t>2</a:t>
+            </a:r>
+          </a:p>
+        </p:txBody>
+      </p:sp>
+      <p:sp>
+        <p:nvSpPr>
+          <p:cNvPr id="10" name="TextBox 9"/>
+          <p:cNvSpPr txBox="1"/>
+          <p:nvPr/>
+        </p:nvSpPr>
+        <p:spPr>
+          <a:xfrm>
+            <a:off x="2103120" y="2724912"/>
+            <a:ext cx="3200400" cy="365760"/>
+          </a:xfrm>
+          <a:prstGeom prst="rect">
+            <a:avLst/>
+          </a:prstGeom>
+          <a:noFill/>
+        </p:spPr>
+        <p:txBody>
+          <a:bodyPr wrap="square">
+            <a:spAutoFit/>
+          </a:bodyPr>
+          <a:lstStyle/>
+          <a:p>
+            <a:pPr algn="l">
               <a:defRPr sz="2000" b="1">
                 <a:solidFill>
-                  <a:srgbClr val="A6E3A1"/>
-                </a:solidFill>
-                <a:latin typeface="Yu Gothic UI"/>
-              </a:defRPr>
-            </a:pPr>
-            <a:r>
-              <a:t>実績</a:t>
-            </a:r>
-          </a:p>
-          <a:p>
-            <a:pPr algn="l">
-              <a:spcAft>
-                <a:spcPts val="600"/>
-              </a:spcAft>
+                  <a:srgbClr val="89B4FA"/>
+                </a:solidFill>
+                <a:latin typeface="Yu Gothic UI"/>
+              </a:defRPr>
+            </a:pPr>
+            <a:r>
+              <a:t>+ CLAUDE.md</a:t>
+            </a:r>
+          </a:p>
+        </p:txBody>
+      </p:sp>
+      <p:sp>
+        <p:nvSpPr>
+          <p:cNvPr id="11" name="TextBox 10"/>
+          <p:cNvSpPr txBox="1"/>
+          <p:nvPr/>
+        </p:nvSpPr>
+        <p:spPr>
+          <a:xfrm>
+            <a:off x="5486400" y="2761488"/>
+            <a:ext cx="5486400" cy="365760"/>
+          </a:xfrm>
+          <a:prstGeom prst="rect">
+            <a:avLst/>
+          </a:prstGeom>
+          <a:noFill/>
+        </p:spPr>
+        <p:txBody>
+          <a:bodyPr wrap="square">
+            <a:spAutoFit/>
+          </a:bodyPr>
+          <a:lstStyle/>
+          <a:p>
+            <a:pPr algn="l">
               <a:defRPr sz="1600" b="0">
                 <a:solidFill>
-                  <a:srgbClr val="CDD6F4"/>
-                </a:solidFill>
-                <a:latin typeface="Yu Gothic UI"/>
-              </a:defRPr>
-            </a:pPr>
-            <a:r>
-              <a:t>開発期間: 約3週間（実稼働21日）</a:t>
-            </a:r>
-          </a:p>
-          <a:p>
-            <a:pPr algn="l">
-              <a:spcAft>
-                <a:spcPts val="600"/>
-              </a:spcAft>
-              <a:defRPr sz="1600" b="0">
-                <a:solidFill>
-                  <a:srgbClr val="CDD6F4"/>
-                </a:solidFill>
-                <a:latin typeface="Yu Gothic UI"/>
-              </a:defRPr>
-            </a:pPr>
-            <a:r>
-              <a:t>コード規模: 約48,000行（テスト含む）</a:t>
-            </a:r>
-          </a:p>
-          <a:p>
-            <a:pPr algn="l">
-              <a:spcAft>
-                <a:spcPts val="600"/>
-              </a:spcAft>
-              <a:defRPr sz="1600" b="0">
-                <a:solidFill>
-                  <a:srgbClr val="CDD6F4"/>
-                </a:solidFill>
-                <a:latin typeface="Yu Gothic UI"/>
-              </a:defRPr>
-            </a:pPr>
-            <a:r>
-              <a:t>テスト: 813ケース（全件パス）</a:t>
-            </a:r>
-          </a:p>
-        </p:txBody>
-      </p:sp>
-      <p:sp>
-        <p:nvSpPr>
-          <p:cNvPr id="7" name="TextBox 6"/>
-          <p:cNvSpPr txBox="1"/>
-          <p:nvPr/>
-        </p:nvSpPr>
-        <p:spPr>
-          <a:xfrm>
-            <a:off x="731520" y="3931920"/>
-            <a:ext cx="5486400" cy="548640"/>
-          </a:xfrm>
-          <a:prstGeom prst="rect">
-            <a:avLst/>
-          </a:prstGeom>
-          <a:noFill/>
-        </p:spPr>
-        <p:txBody>
-          <a:bodyPr wrap="square">
-            <a:spAutoFit/>
-          </a:bodyPr>
-          <a:lstStyle/>
-          <a:p>
-            <a:pPr algn="l">
-              <a:defRPr sz="2200" b="1">
-                <a:solidFill>
-                  <a:srgbClr val="F9E2AF"/>
-                </a:solidFill>
-                <a:latin typeface="Yu Gothic UI"/>
-              </a:defRPr>
-            </a:pPr>
-            <a:r>
-              <a:t>従来開発との比較</a:t>
-            </a:r>
-          </a:p>
-        </p:txBody>
-      </p:sp>
-      <p:sp>
-        <p:nvSpPr>
-          <p:cNvPr id="8" name="TextBox 7"/>
-          <p:cNvSpPr txBox="1"/>
-          <p:nvPr/>
-        </p:nvSpPr>
-        <p:spPr>
-          <a:xfrm>
-            <a:off x="731520" y="4480560"/>
-            <a:ext cx="2560320" cy="365760"/>
-          </a:xfrm>
-          <a:prstGeom prst="rect">
-            <a:avLst/>
-          </a:prstGeom>
-          <a:noFill/>
-        </p:spPr>
-        <p:txBody>
-          <a:bodyPr wrap="square">
-            <a:spAutoFit/>
-          </a:bodyPr>
-          <a:lstStyle/>
-          <a:p>
-            <a:pPr algn="l">
-              <a:defRPr sz="1400" b="1">
-                <a:solidFill>
-                  <a:srgbClr val="6C7086"/>
-                </a:solidFill>
-                <a:latin typeface="Yu Gothic UI"/>
-              </a:defRPr>
-            </a:pPr>
-            <a:r>
-              <a:t>指標</a:t>
-            </a:r>
-          </a:p>
-        </p:txBody>
-      </p:sp>
-      <p:sp>
-        <p:nvSpPr>
-          <p:cNvPr id="9" name="TextBox 8"/>
-          <p:cNvSpPr txBox="1"/>
-          <p:nvPr/>
-        </p:nvSpPr>
-        <p:spPr>
-          <a:xfrm>
-            <a:off x="3291840" y="4480560"/>
-            <a:ext cx="2560320" cy="365760"/>
-          </a:xfrm>
-          <a:prstGeom prst="rect">
-            <a:avLst/>
-          </a:prstGeom>
-          <a:noFill/>
-        </p:spPr>
-        <p:txBody>
-          <a:bodyPr wrap="square">
-            <a:spAutoFit/>
-          </a:bodyPr>
-          <a:lstStyle/>
-          <a:p>
-            <a:pPr algn="l">
-              <a:defRPr sz="1400" b="1">
-                <a:solidFill>
-                  <a:srgbClr val="6C7086"/>
-                </a:solidFill>
-                <a:latin typeface="Yu Gothic UI"/>
-              </a:defRPr>
-            </a:pPr>
-            <a:r>
-              <a:t>従来開発</a:t>
-            </a:r>
-          </a:p>
-        </p:txBody>
-      </p:sp>
-      <p:sp>
-        <p:nvSpPr>
-          <p:cNvPr id="10" name="TextBox 9"/>
-          <p:cNvSpPr txBox="1"/>
-          <p:nvPr/>
-        </p:nvSpPr>
-        <p:spPr>
-          <a:xfrm>
-            <a:off x="5852160" y="4480560"/>
-            <a:ext cx="2560320" cy="365760"/>
-          </a:xfrm>
-          <a:prstGeom prst="rect">
-            <a:avLst/>
-          </a:prstGeom>
-          <a:noFill/>
-        </p:spPr>
-        <p:txBody>
-          <a:bodyPr wrap="square">
-            <a:spAutoFit/>
-          </a:bodyPr>
-          <a:lstStyle/>
-          <a:p>
-            <a:pPr algn="l">
-              <a:defRPr sz="1400" b="1">
-                <a:solidFill>
-                  <a:srgbClr val="6C7086"/>
-                </a:solidFill>
-                <a:latin typeface="Yu Gothic UI"/>
-              </a:defRPr>
-            </a:pPr>
-            <a:r>
-              <a:t>AI駆動開発</a:t>
-            </a:r>
-          </a:p>
-        </p:txBody>
-      </p:sp>
-      <p:sp>
-        <p:nvSpPr>
-          <p:cNvPr id="11" name="TextBox 10"/>
-          <p:cNvSpPr txBox="1"/>
-          <p:nvPr/>
-        </p:nvSpPr>
-        <p:spPr>
-          <a:xfrm>
-            <a:off x="8686800" y="4480560"/>
-            <a:ext cx="2743200" cy="365760"/>
-          </a:xfrm>
-          <a:prstGeom prst="rect">
-            <a:avLst/>
-          </a:prstGeom>
-          <a:noFill/>
-        </p:spPr>
-        <p:txBody>
-          <a:bodyPr wrap="square">
-            <a:spAutoFit/>
-          </a:bodyPr>
-          <a:lstStyle/>
-          <a:p>
-            <a:pPr algn="l">
-              <a:defRPr sz="1400" b="1">
-                <a:solidFill>
-                  <a:srgbClr val="6C7086"/>
-                </a:solidFill>
-                <a:latin typeface="Yu Gothic UI"/>
-              </a:defRPr>
-            </a:pPr>
-            <a:r>
-              <a:t>効果</a:t>
+                  <a:srgbClr val="A6ADC8"/>
+                </a:solidFill>
+                <a:latin typeface="Yu Gothic UI"/>
+              </a:defRPr>
+            </a:pPr>
+            <a:r>
+              <a:t>ルールを自動読み込み</a:t>
             </a:r>
           </a:p>
         </p:txBody>
@@ -6020,8 +8249,8 @@
         </p:nvSpPr>
         <p:spPr>
           <a:xfrm>
-            <a:off x="548640" y="4800600"/>
-            <a:ext cx="10972800" cy="411480"/>
+            <a:off x="731520" y="3566160"/>
+            <a:ext cx="10515600" cy="777240"/>
           </a:xfrm>
           <a:prstGeom prst="roundRect">
             <a:avLst/>
@@ -6057,36 +8286,53 @@
       </p:sp>
       <p:sp>
         <p:nvSpPr>
-          <p:cNvPr id="13" name="TextBox 12"/>
-          <p:cNvSpPr txBox="1"/>
-          <p:nvPr/>
-        </p:nvSpPr>
-        <p:spPr>
-          <a:xfrm>
-            <a:off x="731520" y="4846320"/>
-            <a:ext cx="2560320" cy="365760"/>
-          </a:xfrm>
-          <a:prstGeom prst="rect">
-            <a:avLst/>
-          </a:prstGeom>
-          <a:noFill/>
-        </p:spPr>
-        <p:txBody>
-          <a:bodyPr wrap="square">
-            <a:spAutoFit/>
-          </a:bodyPr>
-          <a:lstStyle/>
-          <a:p>
-            <a:pPr algn="l">
-              <a:defRPr sz="1500" b="0">
-                <a:solidFill>
-                  <a:srgbClr val="CDD6F4"/>
-                </a:solidFill>
-                <a:latin typeface="Yu Gothic UI"/>
-              </a:defRPr>
-            </a:pPr>
-            <a:r>
-              <a:t>開発期間</a:t>
+          <p:cNvPr id="13" name="Oval 12"/>
+          <p:cNvSpPr/>
+          <p:nvPr/>
+        </p:nvSpPr>
+        <p:spPr>
+          <a:xfrm>
+            <a:off x="1005840" y="3566160"/>
+            <a:ext cx="822960" cy="822960"/>
+          </a:xfrm>
+          <a:prstGeom prst="ellipse">
+            <a:avLst/>
+          </a:prstGeom>
+          <a:solidFill>
+            <a:srgbClr val="A6E3A1"/>
+          </a:solidFill>
+          <a:ln>
+            <a:noFill/>
+          </a:ln>
+        </p:spPr>
+        <p:style>
+          <a:lnRef idx="1">
+            <a:schemeClr val="accent1"/>
+          </a:lnRef>
+          <a:fillRef idx="3">
+            <a:schemeClr val="accent1"/>
+          </a:fillRef>
+          <a:effectRef idx="2">
+            <a:schemeClr val="accent1"/>
+          </a:effectRef>
+          <a:fontRef idx="minor">
+            <a:schemeClr val="lt1"/>
+          </a:fontRef>
+        </p:style>
+        <p:txBody>
+          <a:bodyPr rtlCol="0" anchor="ctr"/>
+          <a:lstStyle/>
+          <a:p>
+            <a:pPr algn="ctr">
+              <a:defRPr sz="3200" b="1">
+                <a:solidFill>
+                  <a:srgbClr val="1E1E2E"/>
+                </a:solidFill>
+                <a:latin typeface="Yu Gothic UI"/>
+              </a:defRPr>
+            </a:pPr>
+            <a:r>
+              <a:t>3</a:t>
             </a:r>
           </a:p>
         </p:txBody>
@@ -6099,22 +8345,58 @@
         </p:nvSpPr>
         <p:spPr>
           <a:xfrm>
-            <a:off x="3291840" y="4846320"/>
-            <a:ext cx="2560320" cy="365760"/>
-          </a:xfrm>
-          <a:prstGeom prst="rect">
-            <a:avLst/>
-          </a:prstGeom>
-          <a:noFill/>
-        </p:spPr>
-        <p:txBody>
-          <a:bodyPr wrap="square">
-            <a:spAutoFit/>
-          </a:bodyPr>
-          <a:lstStyle/>
-          <a:p>
-            <a:pPr algn="l">
-              <a:defRPr sz="1500" b="0">
+            <a:off x="2103120" y="3639312"/>
+            <a:ext cx="3200400" cy="365760"/>
+          </a:xfrm>
+          <a:prstGeom prst="rect">
+            <a:avLst/>
+          </a:prstGeom>
+          <a:noFill/>
+        </p:spPr>
+        <p:txBody>
+          <a:bodyPr wrap="square">
+            <a:spAutoFit/>
+          </a:bodyPr>
+          <a:lstStyle/>
+          <a:p>
+            <a:pPr algn="l">
+              <a:defRPr sz="2000" b="1">
+                <a:solidFill>
+                  <a:srgbClr val="A6E3A1"/>
+                </a:solidFill>
+                <a:latin typeface="Yu Gothic UI"/>
+              </a:defRPr>
+            </a:pPr>
+            <a:r>
+              <a:t>+ Skills</a:t>
+            </a:r>
+          </a:p>
+        </p:txBody>
+      </p:sp>
+      <p:sp>
+        <p:nvSpPr>
+          <p:cNvPr id="15" name="TextBox 14"/>
+          <p:cNvSpPr txBox="1"/>
+          <p:nvPr/>
+        </p:nvSpPr>
+        <p:spPr>
+          <a:xfrm>
+            <a:off x="5486400" y="3675888"/>
+            <a:ext cx="5486400" cy="365760"/>
+          </a:xfrm>
+          <a:prstGeom prst="rect">
+            <a:avLst/>
+          </a:prstGeom>
+          <a:noFill/>
+        </p:spPr>
+        <p:txBody>
+          <a:bodyPr wrap="square">
+            <a:spAutoFit/>
+          </a:bodyPr>
+          <a:lstStyle/>
+          <a:p>
+            <a:pPr algn="l">
+              <a:defRPr sz="1600" b="0">
                 <a:solidFill>
                   <a:srgbClr val="A6ADC8"/>
                 </a:solidFill>
@@ -6122,237 +8404,21 @@
               </a:defRPr>
             </a:pPr>
             <a:r>
-              <a:t>6〜9ヶ月</a:t>
-            </a:r>
-          </a:p>
-        </p:txBody>
-      </p:sp>
-      <p:sp>
-        <p:nvSpPr>
-          <p:cNvPr id="15" name="TextBox 14"/>
-          <p:cNvSpPr txBox="1"/>
-          <p:nvPr/>
-        </p:nvSpPr>
-        <p:spPr>
-          <a:xfrm>
-            <a:off x="5852160" y="4846320"/>
-            <a:ext cx="2560320" cy="365760"/>
-          </a:xfrm>
-          <a:prstGeom prst="rect">
-            <a:avLst/>
-          </a:prstGeom>
-          <a:noFill/>
-        </p:spPr>
-        <p:txBody>
-          <a:bodyPr wrap="square">
-            <a:spAutoFit/>
-          </a:bodyPr>
-          <a:lstStyle/>
-          <a:p>
-            <a:pPr algn="l">
-              <a:defRPr sz="1500" b="1">
-                <a:solidFill>
-                  <a:srgbClr val="89B4FA"/>
-                </a:solidFill>
-                <a:latin typeface="Yu Gothic UI"/>
-              </a:defRPr>
-            </a:pPr>
-            <a:r>
-              <a:t>21日</a:t>
-            </a:r>
-          </a:p>
-        </p:txBody>
-      </p:sp>
-      <p:sp>
-        <p:nvSpPr>
-          <p:cNvPr id="16" name="TextBox 15"/>
-          <p:cNvSpPr txBox="1"/>
-          <p:nvPr/>
-        </p:nvSpPr>
-        <p:spPr>
-          <a:xfrm>
-            <a:off x="8686800" y="4846320"/>
-            <a:ext cx="2743200" cy="365760"/>
-          </a:xfrm>
-          <a:prstGeom prst="rect">
-            <a:avLst/>
-          </a:prstGeom>
-          <a:noFill/>
-        </p:spPr>
-        <p:txBody>
-          <a:bodyPr wrap="square">
-            <a:spAutoFit/>
-          </a:bodyPr>
-          <a:lstStyle/>
-          <a:p>
-            <a:pPr algn="l">
-              <a:defRPr sz="1500" b="1">
-                <a:solidFill>
-                  <a:srgbClr val="A6E3A1"/>
-                </a:solidFill>
-                <a:latin typeface="Yu Gothic UI"/>
-              </a:defRPr>
-            </a:pPr>
-            <a:r>
-              <a:t>6〜9倍 短縮</a:t>
-            </a:r>
-          </a:p>
-        </p:txBody>
-      </p:sp>
-      <p:sp>
-        <p:nvSpPr>
-          <p:cNvPr id="17" name="TextBox 16"/>
-          <p:cNvSpPr txBox="1"/>
-          <p:nvPr/>
-        </p:nvSpPr>
-        <p:spPr>
-          <a:xfrm>
-            <a:off x="731520" y="5303520"/>
-            <a:ext cx="2560320" cy="365760"/>
-          </a:xfrm>
-          <a:prstGeom prst="rect">
-            <a:avLst/>
-          </a:prstGeom>
-          <a:noFill/>
-        </p:spPr>
-        <p:txBody>
-          <a:bodyPr wrap="square">
-            <a:spAutoFit/>
-          </a:bodyPr>
-          <a:lstStyle/>
-          <a:p>
-            <a:pPr algn="l">
-              <a:defRPr sz="1500" b="0">
-                <a:solidFill>
-                  <a:srgbClr val="CDD6F4"/>
-                </a:solidFill>
-                <a:latin typeface="Yu Gothic UI"/>
-              </a:defRPr>
-            </a:pPr>
-            <a:r>
-              <a:t>コード生産速度</a:t>
-            </a:r>
-          </a:p>
-        </p:txBody>
-      </p:sp>
-      <p:sp>
-        <p:nvSpPr>
-          <p:cNvPr id="18" name="TextBox 17"/>
-          <p:cNvSpPr txBox="1"/>
-          <p:nvPr/>
-        </p:nvSpPr>
-        <p:spPr>
-          <a:xfrm>
-            <a:off x="3291840" y="5303520"/>
-            <a:ext cx="2560320" cy="365760"/>
-          </a:xfrm>
-          <a:prstGeom prst="rect">
-            <a:avLst/>
-          </a:prstGeom>
-          <a:noFill/>
-        </p:spPr>
-        <p:txBody>
-          <a:bodyPr wrap="square">
-            <a:spAutoFit/>
-          </a:bodyPr>
-          <a:lstStyle/>
-          <a:p>
-            <a:pPr algn="l">
-              <a:defRPr sz="1500" b="0">
-                <a:solidFill>
-                  <a:srgbClr val="A6ADC8"/>
-                </a:solidFill>
-                <a:latin typeface="Yu Gothic UI"/>
-              </a:defRPr>
-            </a:pPr>
-            <a:r>
-              <a:t>50〜100行/日</a:t>
-            </a:r>
-          </a:p>
-        </p:txBody>
-      </p:sp>
-      <p:sp>
-        <p:nvSpPr>
-          <p:cNvPr id="19" name="TextBox 18"/>
-          <p:cNvSpPr txBox="1"/>
-          <p:nvPr/>
-        </p:nvSpPr>
-        <p:spPr>
-          <a:xfrm>
-            <a:off x="5852160" y="5303520"/>
-            <a:ext cx="2560320" cy="365760"/>
-          </a:xfrm>
-          <a:prstGeom prst="rect">
-            <a:avLst/>
-          </a:prstGeom>
-          <a:noFill/>
-        </p:spPr>
-        <p:txBody>
-          <a:bodyPr wrap="square">
-            <a:spAutoFit/>
-          </a:bodyPr>
-          <a:lstStyle/>
-          <a:p>
-            <a:pPr algn="l">
-              <a:defRPr sz="1500" b="1">
-                <a:solidFill>
-                  <a:srgbClr val="89B4FA"/>
-                </a:solidFill>
-                <a:latin typeface="Yu Gothic UI"/>
-              </a:defRPr>
-            </a:pPr>
-            <a:r>
-              <a:t>2,281行/日</a:t>
-            </a:r>
-          </a:p>
-        </p:txBody>
-      </p:sp>
-      <p:sp>
-        <p:nvSpPr>
-          <p:cNvPr id="20" name="TextBox 19"/>
-          <p:cNvSpPr txBox="1"/>
-          <p:nvPr/>
-        </p:nvSpPr>
-        <p:spPr>
-          <a:xfrm>
-            <a:off x="8686800" y="5303520"/>
-            <a:ext cx="2743200" cy="365760"/>
-          </a:xfrm>
-          <a:prstGeom prst="rect">
-            <a:avLst/>
-          </a:prstGeom>
-          <a:noFill/>
-        </p:spPr>
-        <p:txBody>
-          <a:bodyPr wrap="square">
-            <a:spAutoFit/>
-          </a:bodyPr>
-          <a:lstStyle/>
-          <a:p>
-            <a:pPr algn="l">
-              <a:defRPr sz="1500" b="1">
-                <a:solidFill>
-                  <a:srgbClr val="A6E3A1"/>
-                </a:solidFill>
-                <a:latin typeface="Yu Gothic UI"/>
-              </a:defRPr>
-            </a:pPr>
-            <a:r>
-              <a:t>23〜46倍</a:t>
-            </a:r>
-          </a:p>
-        </p:txBody>
-      </p:sp>
-      <p:sp>
-        <p:nvSpPr>
-          <p:cNvPr id="21" name="Rounded Rectangle 20"/>
+              <a:t>手順書をコマンドで注入</a:t>
+            </a:r>
+          </a:p>
+        </p:txBody>
+      </p:sp>
+      <p:sp>
+        <p:nvSpPr>
+          <p:cNvPr id="16" name="Rounded Rectangle 15"/>
           <p:cNvSpPr/>
           <p:nvPr/>
         </p:nvSpPr>
         <p:spPr>
           <a:xfrm>
-            <a:off x="548640" y="5715000"/>
-            <a:ext cx="10972800" cy="411480"/>
+            <a:off x="731520" y="4480560"/>
+            <a:ext cx="10515600" cy="777240"/>
           </a:xfrm>
           <a:prstGeom prst="roundRect">
             <a:avLst/>
@@ -6388,36 +8454,257 @@
       </p:sp>
       <p:sp>
         <p:nvSpPr>
+          <p:cNvPr id="17" name="Oval 16"/>
+          <p:cNvSpPr/>
+          <p:nvPr/>
+        </p:nvSpPr>
+        <p:spPr>
+          <a:xfrm>
+            <a:off x="1005840" y="4480560"/>
+            <a:ext cx="822960" cy="822960"/>
+          </a:xfrm>
+          <a:prstGeom prst="ellipse">
+            <a:avLst/>
+          </a:prstGeom>
+          <a:solidFill>
+            <a:srgbClr val="A6E3A1"/>
+          </a:solidFill>
+          <a:ln>
+            <a:noFill/>
+          </a:ln>
+        </p:spPr>
+        <p:style>
+          <a:lnRef idx="1">
+            <a:schemeClr val="accent1"/>
+          </a:lnRef>
+          <a:fillRef idx="3">
+            <a:schemeClr val="accent1"/>
+          </a:fillRef>
+          <a:effectRef idx="2">
+            <a:schemeClr val="accent1"/>
+          </a:effectRef>
+          <a:fontRef idx="minor">
+            <a:schemeClr val="lt1"/>
+          </a:fontRef>
+        </p:style>
+        <p:txBody>
+          <a:bodyPr rtlCol="0" anchor="ctr"/>
+          <a:lstStyle/>
+          <a:p>
+            <a:pPr algn="ctr">
+              <a:defRPr sz="3200" b="1">
+                <a:solidFill>
+                  <a:srgbClr val="1E1E2E"/>
+                </a:solidFill>
+                <a:latin typeface="Yu Gothic UI"/>
+              </a:defRPr>
+            </a:pPr>
+            <a:r>
+              <a:t>4</a:t>
+            </a:r>
+          </a:p>
+        </p:txBody>
+      </p:sp>
+      <p:sp>
+        <p:nvSpPr>
+          <p:cNvPr id="18" name="TextBox 17"/>
+          <p:cNvSpPr txBox="1"/>
+          <p:nvPr/>
+        </p:nvSpPr>
+        <p:spPr>
+          <a:xfrm>
+            <a:off x="2103120" y="4553712"/>
+            <a:ext cx="3200400" cy="365760"/>
+          </a:xfrm>
+          <a:prstGeom prst="rect">
+            <a:avLst/>
+          </a:prstGeom>
+          <a:noFill/>
+        </p:spPr>
+        <p:txBody>
+          <a:bodyPr wrap="square">
+            <a:spAutoFit/>
+          </a:bodyPr>
+          <a:lstStyle/>
+          <a:p>
+            <a:pPr algn="l">
+              <a:defRPr sz="2000" b="1">
+                <a:solidFill>
+                  <a:srgbClr val="A6E3A1"/>
+                </a:solidFill>
+                <a:latin typeface="Yu Gothic UI"/>
+              </a:defRPr>
+            </a:pPr>
+            <a:r>
+              <a:t>+ Hooks</a:t>
+            </a:r>
+          </a:p>
+        </p:txBody>
+      </p:sp>
+      <p:sp>
+        <p:nvSpPr>
+          <p:cNvPr id="19" name="TextBox 18"/>
+          <p:cNvSpPr txBox="1"/>
+          <p:nvPr/>
+        </p:nvSpPr>
+        <p:spPr>
+          <a:xfrm>
+            <a:off x="5486400" y="4590288"/>
+            <a:ext cx="5486400" cy="365760"/>
+          </a:xfrm>
+          <a:prstGeom prst="rect">
+            <a:avLst/>
+          </a:prstGeom>
+          <a:noFill/>
+        </p:spPr>
+        <p:txBody>
+          <a:bodyPr wrap="square">
+            <a:spAutoFit/>
+          </a:bodyPr>
+          <a:lstStyle/>
+          <a:p>
+            <a:pPr algn="l">
+              <a:defRPr sz="1600" b="0">
+                <a:solidFill>
+                  <a:srgbClr val="A6ADC8"/>
+                </a:solidFill>
+                <a:latin typeface="Yu Gothic UI"/>
+              </a:defRPr>
+            </a:pPr>
+            <a:r>
+              <a:t>フォーマット・テストを自動実行</a:t>
+            </a:r>
+          </a:p>
+        </p:txBody>
+      </p:sp>
+      <p:sp>
+        <p:nvSpPr>
+          <p:cNvPr id="20" name="Rounded Rectangle 19"/>
+          <p:cNvSpPr/>
+          <p:nvPr/>
+        </p:nvSpPr>
+        <p:spPr>
+          <a:xfrm>
+            <a:off x="731520" y="5394960"/>
+            <a:ext cx="10515600" cy="777240"/>
+          </a:xfrm>
+          <a:prstGeom prst="roundRect">
+            <a:avLst/>
+          </a:prstGeom>
+          <a:solidFill>
+            <a:srgbClr val="313244"/>
+          </a:solidFill>
+          <a:ln>
+            <a:noFill/>
+          </a:ln>
+        </p:spPr>
+        <p:style>
+          <a:lnRef idx="1">
+            <a:schemeClr val="accent1"/>
+          </a:lnRef>
+          <a:fillRef idx="3">
+            <a:schemeClr val="accent1"/>
+          </a:fillRef>
+          <a:effectRef idx="2">
+            <a:schemeClr val="accent1"/>
+          </a:effectRef>
+          <a:fontRef idx="minor">
+            <a:schemeClr val="lt1"/>
+          </a:fontRef>
+        </p:style>
+        <p:txBody>
+          <a:bodyPr rtlCol="0" anchor="ctr"/>
+          <a:lstStyle/>
+          <a:p>
+            <a:pPr algn="ctr"/>
+          </a:p>
+        </p:txBody>
+      </p:sp>
+      <p:sp>
+        <p:nvSpPr>
+          <p:cNvPr id="21" name="Oval 20"/>
+          <p:cNvSpPr/>
+          <p:nvPr/>
+        </p:nvSpPr>
+        <p:spPr>
+          <a:xfrm>
+            <a:off x="1005840" y="5394960"/>
+            <a:ext cx="822960" cy="822960"/>
+          </a:xfrm>
+          <a:prstGeom prst="ellipse">
+            <a:avLst/>
+          </a:prstGeom>
+          <a:solidFill>
+            <a:srgbClr val="F9E2AF"/>
+          </a:solidFill>
+          <a:ln>
+            <a:noFill/>
+          </a:ln>
+        </p:spPr>
+        <p:style>
+          <a:lnRef idx="1">
+            <a:schemeClr val="accent1"/>
+          </a:lnRef>
+          <a:fillRef idx="3">
+            <a:schemeClr val="accent1"/>
+          </a:fillRef>
+          <a:effectRef idx="2">
+            <a:schemeClr val="accent1"/>
+          </a:effectRef>
+          <a:fontRef idx="minor">
+            <a:schemeClr val="lt1"/>
+          </a:fontRef>
+        </p:style>
+        <p:txBody>
+          <a:bodyPr rtlCol="0" anchor="ctr"/>
+          <a:lstStyle/>
+          <a:p>
+            <a:pPr algn="ctr">
+              <a:defRPr sz="3200" b="1">
+                <a:solidFill>
+                  <a:srgbClr val="1E1E2E"/>
+                </a:solidFill>
+                <a:latin typeface="Yu Gothic UI"/>
+              </a:defRPr>
+            </a:pPr>
+            <a:r>
+              <a:t>5</a:t>
+            </a:r>
+          </a:p>
+        </p:txBody>
+      </p:sp>
+      <p:sp>
+        <p:nvSpPr>
           <p:cNvPr id="22" name="TextBox 21"/>
           <p:cNvSpPr txBox="1"/>
           <p:nvPr/>
         </p:nvSpPr>
         <p:spPr>
           <a:xfrm>
-            <a:off x="731520" y="5760720"/>
-            <a:ext cx="2560320" cy="365760"/>
-          </a:xfrm>
-          <a:prstGeom prst="rect">
-            <a:avLst/>
-          </a:prstGeom>
-          <a:noFill/>
-        </p:spPr>
-        <p:txBody>
-          <a:bodyPr wrap="square">
-            <a:spAutoFit/>
-          </a:bodyPr>
-          <a:lstStyle/>
-          <a:p>
-            <a:pPr algn="l">
-              <a:defRPr sz="1500" b="0">
-                <a:solidFill>
-                  <a:srgbClr val="CDD6F4"/>
-                </a:solidFill>
-                <a:latin typeface="Yu Gothic UI"/>
-              </a:defRPr>
-            </a:pPr>
-            <a:r>
-              <a:t>テスト密度</a:t>
+            <a:off x="2103120" y="5468112"/>
+            <a:ext cx="3200400" cy="365760"/>
+          </a:xfrm>
+          <a:prstGeom prst="rect">
+            <a:avLst/>
+          </a:prstGeom>
+          <a:noFill/>
+        </p:spPr>
+        <p:txBody>
+          <a:bodyPr wrap="square">
+            <a:spAutoFit/>
+          </a:bodyPr>
+          <a:lstStyle/>
+          <a:p>
+            <a:pPr algn="l">
+              <a:defRPr sz="2000" b="1">
+                <a:solidFill>
+                  <a:srgbClr val="F9E2AF"/>
+                </a:solidFill>
+                <a:latin typeface="Yu Gothic UI"/>
+              </a:defRPr>
+            </a:pPr>
+            <a:r>
+              <a:t>+ Agents</a:t>
             </a:r>
           </a:p>
         </p:txBody>
@@ -6430,22 +8717,22 @@
         </p:nvSpPr>
         <p:spPr>
           <a:xfrm>
-            <a:off x="3291840" y="5760720"/>
-            <a:ext cx="2560320" cy="365760"/>
-          </a:xfrm>
-          <a:prstGeom prst="rect">
-            <a:avLst/>
-          </a:prstGeom>
-          <a:noFill/>
-        </p:spPr>
-        <p:txBody>
-          <a:bodyPr wrap="square">
-            <a:spAutoFit/>
-          </a:bodyPr>
-          <a:lstStyle/>
-          <a:p>
-            <a:pPr algn="l">
-              <a:defRPr sz="1500" b="0">
+            <a:off x="5486400" y="5504688"/>
+            <a:ext cx="5486400" cy="365760"/>
+          </a:xfrm>
+          <a:prstGeom prst="rect">
+            <a:avLst/>
+          </a:prstGeom>
+          <a:noFill/>
+        </p:spPr>
+        <p:txBody>
+          <a:bodyPr wrap="square">
+            <a:spAutoFit/>
+          </a:bodyPr>
+          <a:lstStyle/>
+          <a:p>
+            <a:pPr algn="l">
+              <a:defRPr sz="1600" b="0">
                 <a:solidFill>
                   <a:srgbClr val="A6ADC8"/>
                 </a:solidFill>
@@ -6453,7 +8740,7 @@
               </a:defRPr>
             </a:pPr>
             <a:r>
-              <a:t>0〜3件/KLOC</a:t>
+              <a:t>セキュリティ・性能レビューを並行実行</a:t>
             </a:r>
           </a:p>
         </p:txBody>
@@ -6466,210 +8753,30 @@
         </p:nvSpPr>
         <p:spPr>
           <a:xfrm>
-            <a:off x="5852160" y="5760720"/>
-            <a:ext cx="2560320" cy="365760"/>
-          </a:xfrm>
-          <a:prstGeom prst="rect">
-            <a:avLst/>
-          </a:prstGeom>
-          <a:noFill/>
-        </p:spPr>
-        <p:txBody>
-          <a:bodyPr wrap="square">
-            <a:spAutoFit/>
-          </a:bodyPr>
-          <a:lstStyle/>
-          <a:p>
-            <a:pPr algn="l">
-              <a:defRPr sz="1500" b="1">
-                <a:solidFill>
-                  <a:srgbClr val="89B4FA"/>
-                </a:solidFill>
-                <a:latin typeface="Yu Gothic UI"/>
-              </a:defRPr>
-            </a:pPr>
-            <a:r>
-              <a:t>16.9件/KLOC</a:t>
-            </a:r>
-          </a:p>
-        </p:txBody>
-      </p:sp>
-      <p:sp>
-        <p:nvSpPr>
-          <p:cNvPr id="25" name="TextBox 24"/>
-          <p:cNvSpPr txBox="1"/>
-          <p:nvPr/>
-        </p:nvSpPr>
-        <p:spPr>
-          <a:xfrm>
-            <a:off x="8686800" y="5760720"/>
-            <a:ext cx="2743200" cy="365760"/>
-          </a:xfrm>
-          <a:prstGeom prst="rect">
-            <a:avLst/>
-          </a:prstGeom>
-          <a:noFill/>
-        </p:spPr>
-        <p:txBody>
-          <a:bodyPr wrap="square">
-            <a:spAutoFit/>
-          </a:bodyPr>
-          <a:lstStyle/>
-          <a:p>
-            <a:pPr algn="l">
-              <a:defRPr sz="1500" b="1">
-                <a:solidFill>
-                  <a:srgbClr val="A6E3A1"/>
-                </a:solidFill>
-                <a:latin typeface="Yu Gothic UI"/>
-              </a:defRPr>
-            </a:pPr>
-            <a:r>
-              <a:t>6倍以上</a:t>
-            </a:r>
-          </a:p>
-        </p:txBody>
-      </p:sp>
-      <p:sp>
-        <p:nvSpPr>
-          <p:cNvPr id="26" name="TextBox 25"/>
-          <p:cNvSpPr txBox="1"/>
-          <p:nvPr/>
-        </p:nvSpPr>
-        <p:spPr>
-          <a:xfrm>
-            <a:off x="731520" y="6217920"/>
-            <a:ext cx="2560320" cy="365760"/>
-          </a:xfrm>
-          <a:prstGeom prst="rect">
-            <a:avLst/>
-          </a:prstGeom>
-          <a:noFill/>
-        </p:spPr>
-        <p:txBody>
-          <a:bodyPr wrap="square">
-            <a:spAutoFit/>
-          </a:bodyPr>
-          <a:lstStyle/>
-          <a:p>
-            <a:pPr algn="l">
-              <a:defRPr sz="1500" b="0">
-                <a:solidFill>
-                  <a:srgbClr val="CDD6F4"/>
-                </a:solidFill>
-                <a:latin typeface="Yu Gothic UI"/>
-              </a:defRPr>
-            </a:pPr>
-            <a:r>
-              <a:t>学習コスト</a:t>
-            </a:r>
-          </a:p>
-        </p:txBody>
-      </p:sp>
-      <p:sp>
-        <p:nvSpPr>
-          <p:cNvPr id="27" name="TextBox 26"/>
-          <p:cNvSpPr txBox="1"/>
-          <p:nvPr/>
-        </p:nvSpPr>
-        <p:spPr>
-          <a:xfrm>
-            <a:off x="3291840" y="6217920"/>
-            <a:ext cx="2560320" cy="365760"/>
-          </a:xfrm>
-          <a:prstGeom prst="rect">
-            <a:avLst/>
-          </a:prstGeom>
-          <a:noFill/>
-        </p:spPr>
-        <p:txBody>
-          <a:bodyPr wrap="square">
-            <a:spAutoFit/>
-          </a:bodyPr>
-          <a:lstStyle/>
-          <a:p>
-            <a:pPr algn="l">
-              <a:defRPr sz="1500" b="0">
-                <a:solidFill>
-                  <a:srgbClr val="A6ADC8"/>
-                </a:solidFill>
-                <a:latin typeface="Yu Gothic UI"/>
-              </a:defRPr>
-            </a:pPr>
-            <a:r>
-              <a:t>1〜2ヶ月</a:t>
-            </a:r>
-          </a:p>
-        </p:txBody>
-      </p:sp>
-      <p:sp>
-        <p:nvSpPr>
-          <p:cNvPr id="28" name="TextBox 27"/>
-          <p:cNvSpPr txBox="1"/>
-          <p:nvPr/>
-        </p:nvSpPr>
-        <p:spPr>
-          <a:xfrm>
-            <a:off x="5852160" y="6217920"/>
-            <a:ext cx="2560320" cy="365760"/>
-          </a:xfrm>
-          <a:prstGeom prst="rect">
-            <a:avLst/>
-          </a:prstGeom>
-          <a:noFill/>
-        </p:spPr>
-        <p:txBody>
-          <a:bodyPr wrap="square">
-            <a:spAutoFit/>
-          </a:bodyPr>
-          <a:lstStyle/>
-          <a:p>
-            <a:pPr algn="l">
-              <a:defRPr sz="1500" b="1">
-                <a:solidFill>
-                  <a:srgbClr val="89B4FA"/>
-                </a:solidFill>
-                <a:latin typeface="Yu Gothic UI"/>
-              </a:defRPr>
-            </a:pPr>
-            <a:r>
-              <a:t>0日</a:t>
-            </a:r>
-          </a:p>
-        </p:txBody>
-      </p:sp>
-      <p:sp>
-        <p:nvSpPr>
-          <p:cNvPr id="29" name="TextBox 28"/>
-          <p:cNvSpPr txBox="1"/>
-          <p:nvPr/>
-        </p:nvSpPr>
-        <p:spPr>
-          <a:xfrm>
-            <a:off x="8686800" y="6217920"/>
-            <a:ext cx="2743200" cy="365760"/>
-          </a:xfrm>
-          <a:prstGeom prst="rect">
-            <a:avLst/>
-          </a:prstGeom>
-          <a:noFill/>
-        </p:spPr>
-        <p:txBody>
-          <a:bodyPr wrap="square">
-            <a:spAutoFit/>
-          </a:bodyPr>
-          <a:lstStyle/>
-          <a:p>
-            <a:pPr algn="l">
-              <a:defRPr sz="1500" b="1">
-                <a:solidFill>
-                  <a:srgbClr val="A6E3A1"/>
-                </a:solidFill>
-                <a:latin typeface="Yu Gothic UI"/>
-              </a:defRPr>
-            </a:pPr>
-            <a:r>
-              <a:t>省略</a:t>
+            <a:off x="731520" y="6400800"/>
+            <a:ext cx="10058400" cy="365760"/>
+          </a:xfrm>
+          <a:prstGeom prst="rect">
+            <a:avLst/>
+          </a:prstGeom>
+          <a:noFill/>
+        </p:spPr>
+        <p:txBody>
+          <a:bodyPr wrap="square">
+            <a:spAutoFit/>
+          </a:bodyPr>
+          <a:lstStyle/>
+          <a:p>
+            <a:pPr algn="l">
+              <a:defRPr sz="1600" b="1">
+                <a:solidFill>
+                  <a:srgbClr val="F9E2AF"/>
+                </a:solidFill>
+                <a:latin typeface="Yu Gothic UI"/>
+              </a:defRPr>
+            </a:pPr>
+            <a:r>
+              <a:t>Level 5 到達で、人間がやるのは「何を作るか決める」と「動作確認する」だけ</a:t>
             </a:r>
           </a:p>
         </p:txBody>
@@ -6709,7 +8816,7 @@
         <p:spPr>
           <a:xfrm>
             <a:off x="731520" y="365760"/>
-            <a:ext cx="9144000" cy="731520"/>
+            <a:ext cx="9144000" cy="640080"/>
           </a:xfrm>
           <a:prstGeom prst="rect">
             <a:avLst/>
@@ -6731,21 +8838,57 @@
               </a:defRPr>
             </a:pPr>
             <a:r>
-              <a:t>開発者の想い</a:t>
-            </a:r>
-          </a:p>
-        </p:txBody>
-      </p:sp>
-      <p:sp>
-        <p:nvSpPr>
-          <p:cNvPr id="3" name="Rounded Rectangle 2"/>
+              <a:t>で、何を作ったの？</a:t>
+            </a:r>
+          </a:p>
+        </p:txBody>
+      </p:sp>
+      <p:sp>
+        <p:nvSpPr>
+          <p:cNvPr id="3" name="TextBox 2"/>
+          <p:cNvSpPr txBox="1"/>
+          <p:nvPr/>
+        </p:nvSpPr>
+        <p:spPr>
+          <a:xfrm>
+            <a:off x="731520" y="1005840"/>
+            <a:ext cx="9144000" cy="457200"/>
+          </a:xfrm>
+          <a:prstGeom prst="rect">
+            <a:avLst/>
+          </a:prstGeom>
+          <a:noFill/>
+        </p:spPr>
+        <p:txBody>
+          <a:bodyPr wrap="square">
+            <a:spAutoFit/>
+          </a:bodyPr>
+          <a:lstStyle/>
+          <a:p>
+            <a:pPr algn="l">
+              <a:defRPr sz="1800" b="0">
+                <a:solidFill>
+                  <a:srgbClr val="A6ADC8"/>
+                </a:solidFill>
+                <a:latin typeface="Yu Gothic UI"/>
+              </a:defRPr>
+            </a:pPr>
+            <a:r>
+              <a:t>「夢を行動に変えるアプリ」— 3週間・1人・未経験で作った32機能</a:t>
+            </a:r>
+          </a:p>
+        </p:txBody>
+      </p:sp>
+      <p:sp>
+        <p:nvSpPr>
+          <p:cNvPr id="4" name="Rounded Rectangle 3"/>
           <p:cNvSpPr/>
           <p:nvPr/>
         </p:nvSpPr>
         <p:spPr>
           <a:xfrm>
-            <a:off x="1371600" y="1371600"/>
-            <a:ext cx="9418320" cy="4114800"/>
+            <a:off x="731520" y="1645920"/>
+            <a:ext cx="3474720" cy="1645920"/>
           </a:xfrm>
           <a:prstGeom prst="roundRect">
             <a:avLst/>
@@ -6781,31 +8924,117 @@
       </p:sp>
       <p:sp>
         <p:nvSpPr>
-          <p:cNvPr id="4" name="TextBox 3"/>
-          <p:cNvSpPr txBox="1"/>
-          <p:nvPr/>
-        </p:nvSpPr>
-        <p:spPr>
-          <a:xfrm>
-            <a:off x="1828800" y="1645920"/>
-            <a:ext cx="8503920" cy="3657600"/>
-          </a:xfrm>
-          <a:prstGeom prst="rect">
-            <a:avLst/>
-          </a:prstGeom>
-          <a:noFill/>
-        </p:spPr>
-        <p:txBody>
-          <a:bodyPr wrap="square">
-            <a:spAutoFit/>
-          </a:bodyPr>
-          <a:lstStyle/>
-          <a:p>
-            <a:pPr algn="l">
-              <a:spcAft>
-                <a:spcPts val="2000"/>
-              </a:spcAft>
-              <a:defRPr sz="2000" b="0">
+          <p:cNvPr id="5" name="Oval 4"/>
+          <p:cNvSpPr/>
+          <p:nvPr/>
+        </p:nvSpPr>
+        <p:spPr>
+          <a:xfrm>
+            <a:off x="914400" y="1828800"/>
+            <a:ext cx="822960" cy="822960"/>
+          </a:xfrm>
+          <a:prstGeom prst="ellipse">
+            <a:avLst/>
+          </a:prstGeom>
+          <a:solidFill>
+            <a:srgbClr val="89B4FA"/>
+          </a:solidFill>
+          <a:ln>
+            <a:noFill/>
+          </a:ln>
+        </p:spPr>
+        <p:style>
+          <a:lnRef idx="1">
+            <a:schemeClr val="accent1"/>
+          </a:lnRef>
+          <a:fillRef idx="3">
+            <a:schemeClr val="accent1"/>
+          </a:fillRef>
+          <a:effectRef idx="2">
+            <a:schemeClr val="accent1"/>
+          </a:effectRef>
+          <a:fontRef idx="minor">
+            <a:schemeClr val="lt1"/>
+          </a:fontRef>
+        </p:style>
+        <p:txBody>
+          <a:bodyPr rtlCol="0" anchor="ctr"/>
+          <a:lstStyle/>
+          <a:p>
+            <a:pPr algn="ctr">
+              <a:defRPr sz="3200" b="1">
+                <a:solidFill>
+                  <a:srgbClr val="1E1E2E"/>
+                </a:solidFill>
+                <a:latin typeface="Yu Gothic UI"/>
+              </a:defRPr>
+            </a:pPr>
+            <a:r>
+              <a:t>1</a:t>
+            </a:r>
+          </a:p>
+        </p:txBody>
+      </p:sp>
+      <p:sp>
+        <p:nvSpPr>
+          <p:cNvPr id="6" name="TextBox 5"/>
+          <p:cNvSpPr txBox="1"/>
+          <p:nvPr/>
+        </p:nvSpPr>
+        <p:spPr>
+          <a:xfrm>
+            <a:off x="1920240" y="1874519"/>
+            <a:ext cx="2011680" cy="365760"/>
+          </a:xfrm>
+          <a:prstGeom prst="rect">
+            <a:avLst/>
+          </a:prstGeom>
+          <a:noFill/>
+        </p:spPr>
+        <p:txBody>
+          <a:bodyPr wrap="square">
+            <a:spAutoFit/>
+          </a:bodyPr>
+          <a:lstStyle/>
+          <a:p>
+            <a:pPr algn="l">
+              <a:defRPr sz="2200" b="1">
+                <a:solidFill>
+                  <a:srgbClr val="89B4FA"/>
+                </a:solidFill>
+                <a:latin typeface="Yu Gothic UI"/>
+              </a:defRPr>
+            </a:pPr>
+            <a:r>
+              <a:t>書き出す</a:t>
+            </a:r>
+          </a:p>
+        </p:txBody>
+      </p:sp>
+      <p:sp>
+        <p:nvSpPr>
+          <p:cNvPr id="7" name="TextBox 6"/>
+          <p:cNvSpPr txBox="1"/>
+          <p:nvPr/>
+        </p:nvSpPr>
+        <p:spPr>
+          <a:xfrm>
+            <a:off x="1920240" y="2286000"/>
+            <a:ext cx="2011680" cy="365760"/>
+          </a:xfrm>
+          <a:prstGeom prst="rect">
+            <a:avLst/>
+          </a:prstGeom>
+          <a:noFill/>
+        </p:spPr>
+        <p:txBody>
+          <a:bodyPr wrap="square">
+            <a:spAutoFit/>
+          </a:bodyPr>
+          <a:lstStyle/>
+          <a:p>
+            <a:pPr algn="l">
+              <a:defRPr sz="1500" b="0">
                 <a:solidFill>
                   <a:srgbClr val="A6ADC8"/>
                 </a:solidFill>
@@ -6813,28 +9042,167 @@
               </a:defRPr>
             </a:pPr>
             <a:r>
-              <a:t>学生時代、夢を持てず将来に希望を見出せない時期がありました。</a:t>
-            </a:r>
-          </a:p>
-          <a:p>
-            <a:pPr algn="l">
-              <a:spcAft>
-                <a:spcPts val="400"/>
-              </a:spcAft>
-              <a:defRPr sz="1000" b="0">
-                <a:solidFill>
-                  <a:srgbClr val="CDD6F4"/>
-                </a:solidFill>
-                <a:latin typeface="Yu Gothic UI"/>
-              </a:defRPr>
-            </a:pPr>
-          </a:p>
-          <a:p>
-            <a:pPr algn="l">
-              <a:spcAft>
-                <a:spcPts val="400"/>
-              </a:spcAft>
-              <a:defRPr sz="2000" b="0">
+              <a:t>夢を言葉にする</a:t>
+            </a:r>
+          </a:p>
+        </p:txBody>
+      </p:sp>
+      <p:sp>
+        <p:nvSpPr>
+          <p:cNvPr id="8" name="Rounded Rectangle 7"/>
+          <p:cNvSpPr/>
+          <p:nvPr/>
+        </p:nvSpPr>
+        <p:spPr>
+          <a:xfrm>
+            <a:off x="4480559" y="1645920"/>
+            <a:ext cx="3474720" cy="1645920"/>
+          </a:xfrm>
+          <a:prstGeom prst="roundRect">
+            <a:avLst/>
+          </a:prstGeom>
+          <a:solidFill>
+            <a:srgbClr val="313244"/>
+          </a:solidFill>
+          <a:ln>
+            <a:noFill/>
+          </a:ln>
+        </p:spPr>
+        <p:style>
+          <a:lnRef idx="1">
+            <a:schemeClr val="accent1"/>
+          </a:lnRef>
+          <a:fillRef idx="3">
+            <a:schemeClr val="accent1"/>
+          </a:fillRef>
+          <a:effectRef idx="2">
+            <a:schemeClr val="accent1"/>
+          </a:effectRef>
+          <a:fontRef idx="minor">
+            <a:schemeClr val="lt1"/>
+          </a:fontRef>
+        </p:style>
+        <p:txBody>
+          <a:bodyPr rtlCol="0" anchor="ctr"/>
+          <a:lstStyle/>
+          <a:p>
+            <a:pPr algn="ctr"/>
+          </a:p>
+        </p:txBody>
+      </p:sp>
+      <p:sp>
+        <p:nvSpPr>
+          <p:cNvPr id="9" name="Oval 8"/>
+          <p:cNvSpPr/>
+          <p:nvPr/>
+        </p:nvSpPr>
+        <p:spPr>
+          <a:xfrm>
+            <a:off x="4663439" y="1828800"/>
+            <a:ext cx="822960" cy="822960"/>
+          </a:xfrm>
+          <a:prstGeom prst="ellipse">
+            <a:avLst/>
+          </a:prstGeom>
+          <a:solidFill>
+            <a:srgbClr val="A6E3A1"/>
+          </a:solidFill>
+          <a:ln>
+            <a:noFill/>
+          </a:ln>
+        </p:spPr>
+        <p:style>
+          <a:lnRef idx="1">
+            <a:schemeClr val="accent1"/>
+          </a:lnRef>
+          <a:fillRef idx="3">
+            <a:schemeClr val="accent1"/>
+          </a:fillRef>
+          <a:effectRef idx="2">
+            <a:schemeClr val="accent1"/>
+          </a:effectRef>
+          <a:fontRef idx="minor">
+            <a:schemeClr val="lt1"/>
+          </a:fontRef>
+        </p:style>
+        <p:txBody>
+          <a:bodyPr rtlCol="0" anchor="ctr"/>
+          <a:lstStyle/>
+          <a:p>
+            <a:pPr algn="ctr">
+              <a:defRPr sz="3200" b="1">
+                <a:solidFill>
+                  <a:srgbClr val="1E1E2E"/>
+                </a:solidFill>
+                <a:latin typeface="Yu Gothic UI"/>
+              </a:defRPr>
+            </a:pPr>
+            <a:r>
+              <a:t>2</a:t>
+            </a:r>
+          </a:p>
+        </p:txBody>
+      </p:sp>
+      <p:sp>
+        <p:nvSpPr>
+          <p:cNvPr id="10" name="TextBox 9"/>
+          <p:cNvSpPr txBox="1"/>
+          <p:nvPr/>
+        </p:nvSpPr>
+        <p:spPr>
+          <a:xfrm>
+            <a:off x="5669279" y="1874519"/>
+            <a:ext cx="2011680" cy="365760"/>
+          </a:xfrm>
+          <a:prstGeom prst="rect">
+            <a:avLst/>
+          </a:prstGeom>
+          <a:noFill/>
+        </p:spPr>
+        <p:txBody>
+          <a:bodyPr wrap="square">
+            <a:spAutoFit/>
+          </a:bodyPr>
+          <a:lstStyle/>
+          <a:p>
+            <a:pPr algn="l">
+              <a:defRPr sz="2200" b="1">
+                <a:solidFill>
+                  <a:srgbClr val="A6E3A1"/>
+                </a:solidFill>
+                <a:latin typeface="Yu Gothic UI"/>
+              </a:defRPr>
+            </a:pPr>
+            <a:r>
+              <a:t>分解する</a:t>
+            </a:r>
+          </a:p>
+        </p:txBody>
+      </p:sp>
+      <p:sp>
+        <p:nvSpPr>
+          <p:cNvPr id="11" name="TextBox 10"/>
+          <p:cNvSpPr txBox="1"/>
+          <p:nvPr/>
+        </p:nvSpPr>
+        <p:spPr>
+          <a:xfrm>
+            <a:off x="5669279" y="2286000"/>
+            <a:ext cx="2011680" cy="365760"/>
+          </a:xfrm>
+          <a:prstGeom prst="rect">
+            <a:avLst/>
+          </a:prstGeom>
+          <a:noFill/>
+        </p:spPr>
+        <p:txBody>
+          <a:bodyPr wrap="square">
+            <a:spAutoFit/>
+          </a:bodyPr>
+          <a:lstStyle/>
+          <a:p>
+            <a:pPr algn="l">
+              <a:defRPr sz="1500" b="0">
                 <a:solidFill>
                   <a:srgbClr val="A6ADC8"/>
                 </a:solidFill>
@@ -6842,15 +9210,246 @@
               </a:defRPr>
             </a:pPr>
             <a:r>
-              <a:t>本との出会いを通じて</a:t>
-            </a:r>
-          </a:p>
-          <a:p>
-            <a:pPr algn="l">
-              <a:spcAft>
-                <a:spcPts val="400"/>
-              </a:spcAft>
-              <a:defRPr sz="2600" b="1">
+              <a:t>目標→タスクに分解</a:t>
+            </a:r>
+          </a:p>
+        </p:txBody>
+      </p:sp>
+      <p:sp>
+        <p:nvSpPr>
+          <p:cNvPr id="12" name="Rounded Rectangle 11"/>
+          <p:cNvSpPr/>
+          <p:nvPr/>
+        </p:nvSpPr>
+        <p:spPr>
+          <a:xfrm>
+            <a:off x="8229600" y="1645920"/>
+            <a:ext cx="3474720" cy="1645920"/>
+          </a:xfrm>
+          <a:prstGeom prst="roundRect">
+            <a:avLst/>
+          </a:prstGeom>
+          <a:solidFill>
+            <a:srgbClr val="313244"/>
+          </a:solidFill>
+          <a:ln>
+            <a:noFill/>
+          </a:ln>
+        </p:spPr>
+        <p:style>
+          <a:lnRef idx="1">
+            <a:schemeClr val="accent1"/>
+          </a:lnRef>
+          <a:fillRef idx="3">
+            <a:schemeClr val="accent1"/>
+          </a:fillRef>
+          <a:effectRef idx="2">
+            <a:schemeClr val="accent1"/>
+          </a:effectRef>
+          <a:fontRef idx="minor">
+            <a:schemeClr val="lt1"/>
+          </a:fontRef>
+        </p:style>
+        <p:txBody>
+          <a:bodyPr rtlCol="0" anchor="ctr"/>
+          <a:lstStyle/>
+          <a:p>
+            <a:pPr algn="ctr"/>
+          </a:p>
+        </p:txBody>
+      </p:sp>
+      <p:sp>
+        <p:nvSpPr>
+          <p:cNvPr id="13" name="Oval 12"/>
+          <p:cNvSpPr/>
+          <p:nvPr/>
+        </p:nvSpPr>
+        <p:spPr>
+          <a:xfrm>
+            <a:off x="8412480" y="1828800"/>
+            <a:ext cx="822960" cy="822960"/>
+          </a:xfrm>
+          <a:prstGeom prst="ellipse">
+            <a:avLst/>
+          </a:prstGeom>
+          <a:solidFill>
+            <a:srgbClr val="F9E2AF"/>
+          </a:solidFill>
+          <a:ln>
+            <a:noFill/>
+          </a:ln>
+        </p:spPr>
+        <p:style>
+          <a:lnRef idx="1">
+            <a:schemeClr val="accent1"/>
+          </a:lnRef>
+          <a:fillRef idx="3">
+            <a:schemeClr val="accent1"/>
+          </a:fillRef>
+          <a:effectRef idx="2">
+            <a:schemeClr val="accent1"/>
+          </a:effectRef>
+          <a:fontRef idx="minor">
+            <a:schemeClr val="lt1"/>
+          </a:fontRef>
+        </p:style>
+        <p:txBody>
+          <a:bodyPr rtlCol="0" anchor="ctr"/>
+          <a:lstStyle/>
+          <a:p>
+            <a:pPr algn="ctr">
+              <a:defRPr sz="3200" b="1">
+                <a:solidFill>
+                  <a:srgbClr val="1E1E2E"/>
+                </a:solidFill>
+                <a:latin typeface="Yu Gothic UI"/>
+              </a:defRPr>
+            </a:pPr>
+            <a:r>
+              <a:t>3</a:t>
+            </a:r>
+          </a:p>
+        </p:txBody>
+      </p:sp>
+      <p:sp>
+        <p:nvSpPr>
+          <p:cNvPr id="14" name="TextBox 13"/>
+          <p:cNvSpPr txBox="1"/>
+          <p:nvPr/>
+        </p:nvSpPr>
+        <p:spPr>
+          <a:xfrm>
+            <a:off x="9418320" y="1874519"/>
+            <a:ext cx="2011680" cy="365760"/>
+          </a:xfrm>
+          <a:prstGeom prst="rect">
+            <a:avLst/>
+          </a:prstGeom>
+          <a:noFill/>
+        </p:spPr>
+        <p:txBody>
+          <a:bodyPr wrap="square">
+            <a:spAutoFit/>
+          </a:bodyPr>
+          <a:lstStyle/>
+          <a:p>
+            <a:pPr algn="l">
+              <a:defRPr sz="2200" b="1">
+                <a:solidFill>
+                  <a:srgbClr val="F9E2AF"/>
+                </a:solidFill>
+                <a:latin typeface="Yu Gothic UI"/>
+              </a:defRPr>
+            </a:pPr>
+            <a:r>
+              <a:t>続ける</a:t>
+            </a:r>
+          </a:p>
+        </p:txBody>
+      </p:sp>
+      <p:sp>
+        <p:nvSpPr>
+          <p:cNvPr id="15" name="TextBox 14"/>
+          <p:cNvSpPr txBox="1"/>
+          <p:nvPr/>
+        </p:nvSpPr>
+        <p:spPr>
+          <a:xfrm>
+            <a:off x="9418320" y="2286000"/>
+            <a:ext cx="2011680" cy="365760"/>
+          </a:xfrm>
+          <a:prstGeom prst="rect">
+            <a:avLst/>
+          </a:prstGeom>
+          <a:noFill/>
+        </p:spPr>
+        <p:txBody>
+          <a:bodyPr wrap="square">
+            <a:spAutoFit/>
+          </a:bodyPr>
+          <a:lstStyle/>
+          <a:p>
+            <a:pPr algn="l">
+              <a:defRPr sz="1500" b="0">
+                <a:solidFill>
+                  <a:srgbClr val="A6ADC8"/>
+                </a:solidFill>
+                <a:latin typeface="Yu Gothic UI"/>
+              </a:defRPr>
+            </a:pPr>
+            <a:r>
+              <a:t>星座で成長を実感</a:t>
+            </a:r>
+          </a:p>
+        </p:txBody>
+      </p:sp>
+      <p:sp>
+        <p:nvSpPr>
+          <p:cNvPr id="16" name="Rounded Rectangle 15"/>
+          <p:cNvSpPr/>
+          <p:nvPr/>
+        </p:nvSpPr>
+        <p:spPr>
+          <a:xfrm>
+            <a:off x="731520" y="3657600"/>
+            <a:ext cx="3474720" cy="1188720"/>
+          </a:xfrm>
+          <a:prstGeom prst="roundRect">
+            <a:avLst/>
+          </a:prstGeom>
+          <a:solidFill>
+            <a:srgbClr val="313244"/>
+          </a:solidFill>
+          <a:ln>
+            <a:noFill/>
+          </a:ln>
+        </p:spPr>
+        <p:style>
+          <a:lnRef idx="1">
+            <a:schemeClr val="accent1"/>
+          </a:lnRef>
+          <a:fillRef idx="3">
+            <a:schemeClr val="accent1"/>
+          </a:fillRef>
+          <a:effectRef idx="2">
+            <a:schemeClr val="accent1"/>
+          </a:effectRef>
+          <a:fontRef idx="minor">
+            <a:schemeClr val="lt1"/>
+          </a:fontRef>
+        </p:style>
+        <p:txBody>
+          <a:bodyPr rtlCol="0" anchor="ctr"/>
+          <a:lstStyle/>
+          <a:p>
+            <a:pPr algn="ctr"/>
+          </a:p>
+        </p:txBody>
+      </p:sp>
+      <p:sp>
+        <p:nvSpPr>
+          <p:cNvPr id="17" name="TextBox 16"/>
+          <p:cNvSpPr txBox="1"/>
+          <p:nvPr/>
+        </p:nvSpPr>
+        <p:spPr>
+          <a:xfrm>
+            <a:off x="1005840" y="3794760"/>
+            <a:ext cx="2926080" cy="365760"/>
+          </a:xfrm>
+          <a:prstGeom prst="rect">
+            <a:avLst/>
+          </a:prstGeom>
+          <a:noFill/>
+        </p:spPr>
+        <p:txBody>
+          <a:bodyPr wrap="square">
+            <a:spAutoFit/>
+          </a:bodyPr>
+          <a:lstStyle/>
+          <a:p>
+            <a:pPr algn="ctr">
+              <a:defRPr sz="1700" b="1">
                 <a:solidFill>
                   <a:srgbClr val="89B4FA"/>
                 </a:solidFill>
@@ -6858,15 +9457,35 @@
               </a:defRPr>
             </a:pPr>
             <a:r>
-              <a:t>「生き生きと生きるには夢が必要」</a:t>
-            </a:r>
-          </a:p>
-          <a:p>
-            <a:pPr algn="l">
-              <a:spcAft>
-                <a:spcPts val="2000"/>
-              </a:spcAft>
-              <a:defRPr sz="2000" b="0">
+              <a:t>夢・目標・タスク管理</a:t>
+            </a:r>
+          </a:p>
+        </p:txBody>
+      </p:sp>
+      <p:sp>
+        <p:nvSpPr>
+          <p:cNvPr id="18" name="TextBox 17"/>
+          <p:cNvSpPr txBox="1"/>
+          <p:nvPr/>
+        </p:nvSpPr>
+        <p:spPr>
+          <a:xfrm>
+            <a:off x="1005840" y="4206240"/>
+            <a:ext cx="2926080" cy="457200"/>
+          </a:xfrm>
+          <a:prstGeom prst="rect">
+            <a:avLst/>
+          </a:prstGeom>
+          <a:noFill/>
+        </p:spPr>
+        <p:txBody>
+          <a:bodyPr wrap="square">
+            <a:spAutoFit/>
+          </a:bodyPr>
+          <a:lstStyle/>
+          <a:p>
+            <a:pPr algn="ctr">
+              <a:defRPr sz="1400" b="0">
                 <a:solidFill>
                   <a:srgbClr val="A6ADC8"/>
                 </a:solidFill>
@@ -6874,28 +9493,114 @@
               </a:defRPr>
             </a:pPr>
             <a:r>
-              <a:t>と気づきました。</a:t>
-            </a:r>
-          </a:p>
-          <a:p>
-            <a:pPr algn="l">
-              <a:spcAft>
-                <a:spcPts val="400"/>
-              </a:spcAft>
-              <a:defRPr sz="1000" b="0">
-                <a:solidFill>
-                  <a:srgbClr val="CDD6F4"/>
-                </a:solidFill>
-                <a:latin typeface="Yu Gothic UI"/>
-              </a:defRPr>
-            </a:pPr>
-          </a:p>
-          <a:p>
-            <a:pPr algn="l">
-              <a:spcAft>
-                <a:spcPts val="400"/>
-              </a:spcAft>
-              <a:defRPr sz="2000" b="0">
+              <a:t>階層で整理 + 発見ガイド</a:t>
+            </a:r>
+          </a:p>
+        </p:txBody>
+      </p:sp>
+      <p:sp>
+        <p:nvSpPr>
+          <p:cNvPr id="19" name="Rounded Rectangle 18"/>
+          <p:cNvSpPr/>
+          <p:nvPr/>
+        </p:nvSpPr>
+        <p:spPr>
+          <a:xfrm>
+            <a:off x="4480559" y="3657600"/>
+            <a:ext cx="3474720" cy="1188720"/>
+          </a:xfrm>
+          <a:prstGeom prst="roundRect">
+            <a:avLst/>
+          </a:prstGeom>
+          <a:solidFill>
+            <a:srgbClr val="313244"/>
+          </a:solidFill>
+          <a:ln>
+            <a:noFill/>
+          </a:ln>
+        </p:spPr>
+        <p:style>
+          <a:lnRef idx="1">
+            <a:schemeClr val="accent1"/>
+          </a:lnRef>
+          <a:fillRef idx="3">
+            <a:schemeClr val="accent1"/>
+          </a:fillRef>
+          <a:effectRef idx="2">
+            <a:schemeClr val="accent1"/>
+          </a:effectRef>
+          <a:fontRef idx="minor">
+            <a:schemeClr val="lt1"/>
+          </a:fontRef>
+        </p:style>
+        <p:txBody>
+          <a:bodyPr rtlCol="0" anchor="ctr"/>
+          <a:lstStyle/>
+          <a:p>
+            <a:pPr algn="ctr"/>
+          </a:p>
+        </p:txBody>
+      </p:sp>
+      <p:sp>
+        <p:nvSpPr>
+          <p:cNvPr id="20" name="TextBox 19"/>
+          <p:cNvSpPr txBox="1"/>
+          <p:nvPr/>
+        </p:nvSpPr>
+        <p:spPr>
+          <a:xfrm>
+            <a:off x="4754879" y="3794760"/>
+            <a:ext cx="2926080" cy="365760"/>
+          </a:xfrm>
+          <a:prstGeom prst="rect">
+            <a:avLst/>
+          </a:prstGeom>
+          <a:noFill/>
+        </p:spPr>
+        <p:txBody>
+          <a:bodyPr wrap="square">
+            <a:spAutoFit/>
+          </a:bodyPr>
+          <a:lstStyle/>
+          <a:p>
+            <a:pPr algn="ctr">
+              <a:defRPr sz="1700" b="1">
+                <a:solidFill>
+                  <a:srgbClr val="89B4FA"/>
+                </a:solidFill>
+                <a:latin typeface="Yu Gothic UI"/>
+              </a:defRPr>
+            </a:pPr>
+            <a:r>
+              <a:t>活動予定</a:t>
+            </a:r>
+          </a:p>
+        </p:txBody>
+      </p:sp>
+      <p:sp>
+        <p:nvSpPr>
+          <p:cNvPr id="21" name="TextBox 20"/>
+          <p:cNvSpPr txBox="1"/>
+          <p:nvPr/>
+        </p:nvSpPr>
+        <p:spPr>
+          <a:xfrm>
+            <a:off x="4754879" y="4206240"/>
+            <a:ext cx="2926080" cy="457200"/>
+          </a:xfrm>
+          <a:prstGeom prst="rect">
+            <a:avLst/>
+          </a:prstGeom>
+          <a:noFill/>
+        </p:spPr>
+        <p:txBody>
+          <a:bodyPr wrap="square">
+            <a:spAutoFit/>
+          </a:bodyPr>
+          <a:lstStyle/>
+          <a:p>
+            <a:pPr algn="ctr">
+              <a:defRPr sz="1400" b="0">
                 <a:solidFill>
                   <a:srgbClr val="A6ADC8"/>
                 </a:solidFill>
@@ -6903,15 +9608,114 @@
               </a:defRPr>
             </a:pPr>
             <a:r>
-              <a:t>夢を言語化し、行動に移す仕組みを</a:t>
-            </a:r>
-          </a:p>
-          <a:p>
-            <a:pPr algn="l">
-              <a:spcAft>
-                <a:spcPts val="2000"/>
-              </a:spcAft>
-              <a:defRPr sz="2000" b="0">
+              <a:t>タイムライン + リマインド</a:t>
+            </a:r>
+          </a:p>
+        </p:txBody>
+      </p:sp>
+      <p:sp>
+        <p:nvSpPr>
+          <p:cNvPr id="22" name="Rounded Rectangle 21"/>
+          <p:cNvSpPr/>
+          <p:nvPr/>
+        </p:nvSpPr>
+        <p:spPr>
+          <a:xfrm>
+            <a:off x="8229600" y="3657600"/>
+            <a:ext cx="3474720" cy="1188720"/>
+          </a:xfrm>
+          <a:prstGeom prst="roundRect">
+            <a:avLst/>
+          </a:prstGeom>
+          <a:solidFill>
+            <a:srgbClr val="313244"/>
+          </a:solidFill>
+          <a:ln>
+            <a:noFill/>
+          </a:ln>
+        </p:spPr>
+        <p:style>
+          <a:lnRef idx="1">
+            <a:schemeClr val="accent1"/>
+          </a:lnRef>
+          <a:fillRef idx="3">
+            <a:schemeClr val="accent1"/>
+          </a:fillRef>
+          <a:effectRef idx="2">
+            <a:schemeClr val="accent1"/>
+          </a:effectRef>
+          <a:fontRef idx="minor">
+            <a:schemeClr val="lt1"/>
+          </a:fontRef>
+        </p:style>
+        <p:txBody>
+          <a:bodyPr rtlCol="0" anchor="ctr"/>
+          <a:lstStyle/>
+          <a:p>
+            <a:pPr algn="ctr"/>
+          </a:p>
+        </p:txBody>
+      </p:sp>
+      <p:sp>
+        <p:nvSpPr>
+          <p:cNvPr id="23" name="TextBox 22"/>
+          <p:cNvSpPr txBox="1"/>
+          <p:nvPr/>
+        </p:nvSpPr>
+        <p:spPr>
+          <a:xfrm>
+            <a:off x="8503920" y="3794760"/>
+            <a:ext cx="2926080" cy="365760"/>
+          </a:xfrm>
+          <a:prstGeom prst="rect">
+            <a:avLst/>
+          </a:prstGeom>
+          <a:noFill/>
+        </p:spPr>
+        <p:txBody>
+          <a:bodyPr wrap="square">
+            <a:spAutoFit/>
+          </a:bodyPr>
+          <a:lstStyle/>
+          <a:p>
+            <a:pPr algn="ctr">
+              <a:defRPr sz="1700" b="1">
+                <a:solidFill>
+                  <a:srgbClr val="89B4FA"/>
+                </a:solidFill>
+                <a:latin typeface="Yu Gothic UI"/>
+              </a:defRPr>
+            </a:pPr>
+            <a:r>
+              <a:t>書籍管理</a:t>
+            </a:r>
+          </a:p>
+        </p:txBody>
+      </p:sp>
+      <p:sp>
+        <p:nvSpPr>
+          <p:cNvPr id="24" name="TextBox 23"/>
+          <p:cNvSpPr txBox="1"/>
+          <p:nvPr/>
+        </p:nvSpPr>
+        <p:spPr>
+          <a:xfrm>
+            <a:off x="8503920" y="4206240"/>
+            <a:ext cx="2926080" cy="457200"/>
+          </a:xfrm>
+          <a:prstGeom prst="rect">
+            <a:avLst/>
+          </a:prstGeom>
+          <a:noFill/>
+        </p:spPr>
+        <p:txBody>
+          <a:bodyPr wrap="square">
+            <a:spAutoFit/>
+          </a:bodyPr>
+          <a:lstStyle/>
+          <a:p>
+            <a:pPr algn="ctr">
+              <a:defRPr sz="1400" b="0">
                 <a:solidFill>
                   <a:srgbClr val="A6ADC8"/>
                 </a:solidFill>
@@ -6919,21 +9723,64 @@
               </a:defRPr>
             </a:pPr>
             <a:r>
-              <a:t>アプリとして形にしたのがユメログです。</a:t>
-            </a:r>
-          </a:p>
-        </p:txBody>
-      </p:sp>
-      <p:sp>
-        <p:nvSpPr>
-          <p:cNvPr id="5" name="TextBox 4"/>
-          <p:cNvSpPr txBox="1"/>
-          <p:nvPr/>
-        </p:nvSpPr>
-        <p:spPr>
-          <a:xfrm>
-            <a:off x="2286000" y="5669280"/>
-            <a:ext cx="7315200" cy="548640"/>
+              <a:t>本棚風UI + 読了レビュー</a:t>
+            </a:r>
+          </a:p>
+        </p:txBody>
+      </p:sp>
+      <p:sp>
+        <p:nvSpPr>
+          <p:cNvPr id="25" name="Rounded Rectangle 24"/>
+          <p:cNvSpPr/>
+          <p:nvPr/>
+        </p:nvSpPr>
+        <p:spPr>
+          <a:xfrm>
+            <a:off x="731520" y="5120640"/>
+            <a:ext cx="3474720" cy="1188720"/>
+          </a:xfrm>
+          <a:prstGeom prst="roundRect">
+            <a:avLst/>
+          </a:prstGeom>
+          <a:solidFill>
+            <a:srgbClr val="313244"/>
+          </a:solidFill>
+          <a:ln>
+            <a:noFill/>
+          </a:ln>
+        </p:spPr>
+        <p:style>
+          <a:lnRef idx="1">
+            <a:schemeClr val="accent1"/>
+          </a:lnRef>
+          <a:fillRef idx="3">
+            <a:schemeClr val="accent1"/>
+          </a:fillRef>
+          <a:effectRef idx="2">
+            <a:schemeClr val="accent1"/>
+          </a:effectRef>
+          <a:fontRef idx="minor">
+            <a:schemeClr val="lt1"/>
+          </a:fontRef>
+        </p:style>
+        <p:txBody>
+          <a:bodyPr rtlCol="0" anchor="ctr"/>
+          <a:lstStyle/>
+          <a:p>
+            <a:pPr algn="ctr"/>
+          </a:p>
+        </p:txBody>
+      </p:sp>
+      <p:sp>
+        <p:nvSpPr>
+          <p:cNvPr id="26" name="TextBox 25"/>
+          <p:cNvSpPr txBox="1"/>
+          <p:nvPr/>
+        </p:nvSpPr>
+        <p:spPr>
+          <a:xfrm>
+            <a:off x="1005840" y="5257800"/>
+            <a:ext cx="2926080" cy="365760"/>
           </a:xfrm>
           <a:prstGeom prst="rect">
             <a:avLst/>
@@ -6947,15 +9794,281 @@
           <a:lstStyle/>
           <a:p>
             <a:pPr algn="ctr">
-              <a:defRPr sz="2400" b="1">
-                <a:solidFill>
-                  <a:srgbClr val="F9E2AF"/>
-                </a:solidFill>
-                <a:latin typeface="Yu Gothic UI"/>
-              </a:defRPr>
-            </a:pPr>
-            <a:r>
-              <a:t>ユメログは「最初の一歩」を支えるアプリです。</a:t>
+              <a:defRPr sz="1700" b="1">
+                <a:solidFill>
+                  <a:srgbClr val="89B4FA"/>
+                </a:solidFill>
+                <a:latin typeface="Yu Gothic UI"/>
+              </a:defRPr>
+            </a:pPr>
+            <a:r>
+              <a:t>統計・分析</a:t>
+            </a:r>
+          </a:p>
+        </p:txBody>
+      </p:sp>
+      <p:sp>
+        <p:nvSpPr>
+          <p:cNvPr id="27" name="TextBox 26"/>
+          <p:cNvSpPr txBox="1"/>
+          <p:nvPr/>
+        </p:nvSpPr>
+        <p:spPr>
+          <a:xfrm>
+            <a:off x="1005840" y="5669280"/>
+            <a:ext cx="2926080" cy="457200"/>
+          </a:xfrm>
+          <a:prstGeom prst="rect">
+            <a:avLst/>
+          </a:prstGeom>
+          <a:noFill/>
+        </p:spPr>
+        <p:txBody>
+          <a:bodyPr wrap="square">
+            <a:spAutoFit/>
+          </a:bodyPr>
+          <a:lstStyle/>
+          <a:p>
+            <a:pPr algn="ctr">
+              <a:defRPr sz="1400" b="0">
+                <a:solidFill>
+                  <a:srgbClr val="A6ADC8"/>
+                </a:solidFill>
+                <a:latin typeface="Yu Gothic UI"/>
+              </a:defRPr>
+            </a:pPr>
+            <a:r>
+              <a:t>グラフで活動を可視化</a:t>
+            </a:r>
+          </a:p>
+        </p:txBody>
+      </p:sp>
+      <p:sp>
+        <p:nvSpPr>
+          <p:cNvPr id="28" name="Rounded Rectangle 27"/>
+          <p:cNvSpPr/>
+          <p:nvPr/>
+        </p:nvSpPr>
+        <p:spPr>
+          <a:xfrm>
+            <a:off x="4480559" y="5120640"/>
+            <a:ext cx="3474720" cy="1188720"/>
+          </a:xfrm>
+          <a:prstGeom prst="roundRect">
+            <a:avLst/>
+          </a:prstGeom>
+          <a:solidFill>
+            <a:srgbClr val="313244"/>
+          </a:solidFill>
+          <a:ln>
+            <a:noFill/>
+          </a:ln>
+        </p:spPr>
+        <p:style>
+          <a:lnRef idx="1">
+            <a:schemeClr val="accent1"/>
+          </a:lnRef>
+          <a:fillRef idx="3">
+            <a:schemeClr val="accent1"/>
+          </a:fillRef>
+          <a:effectRef idx="2">
+            <a:schemeClr val="accent1"/>
+          </a:effectRef>
+          <a:fontRef idx="minor">
+            <a:schemeClr val="lt1"/>
+          </a:fontRef>
+        </p:style>
+        <p:txBody>
+          <a:bodyPr rtlCol="0" anchor="ctr"/>
+          <a:lstStyle/>
+          <a:p>
+            <a:pPr algn="ctr"/>
+          </a:p>
+        </p:txBody>
+      </p:sp>
+      <p:sp>
+        <p:nvSpPr>
+          <p:cNvPr id="29" name="TextBox 28"/>
+          <p:cNvSpPr txBox="1"/>
+          <p:nvPr/>
+        </p:nvSpPr>
+        <p:spPr>
+          <a:xfrm>
+            <a:off x="4754879" y="5257800"/>
+            <a:ext cx="2926080" cy="365760"/>
+          </a:xfrm>
+          <a:prstGeom prst="rect">
+            <a:avLst/>
+          </a:prstGeom>
+          <a:noFill/>
+        </p:spPr>
+        <p:txBody>
+          <a:bodyPr wrap="square">
+            <a:spAutoFit/>
+          </a:bodyPr>
+          <a:lstStyle/>
+          <a:p>
+            <a:pPr algn="ctr">
+              <a:defRPr sz="1700" b="1">
+                <a:solidFill>
+                  <a:srgbClr val="89B4FA"/>
+                </a:solidFill>
+                <a:latin typeface="Yu Gothic UI"/>
+              </a:defRPr>
+            </a:pPr>
+            <a:r>
+              <a:t>星座システム</a:t>
+            </a:r>
+          </a:p>
+        </p:txBody>
+      </p:sp>
+      <p:sp>
+        <p:nvSpPr>
+          <p:cNvPr id="30" name="TextBox 29"/>
+          <p:cNvSpPr txBox="1"/>
+          <p:nvPr/>
+        </p:nvSpPr>
+        <p:spPr>
+          <a:xfrm>
+            <a:off x="4754879" y="5669280"/>
+            <a:ext cx="2926080" cy="457200"/>
+          </a:xfrm>
+          <a:prstGeom prst="rect">
+            <a:avLst/>
+          </a:prstGeom>
+          <a:noFill/>
+        </p:spPr>
+        <p:txBody>
+          <a:bodyPr wrap="square">
+            <a:spAutoFit/>
+          </a:bodyPr>
+          <a:lstStyle/>
+          <a:p>
+            <a:pPr algn="ctr">
+              <a:defRPr sz="1400" b="0">
+                <a:solidFill>
+                  <a:srgbClr val="A6ADC8"/>
+                </a:solidFill>
+                <a:latin typeface="Yu Gothic UI"/>
+              </a:defRPr>
+            </a:pPr>
+            <a:r>
+              <a:t>ゲーム感覚で継続</a:t>
+            </a:r>
+          </a:p>
+        </p:txBody>
+      </p:sp>
+      <p:sp>
+        <p:nvSpPr>
+          <p:cNvPr id="31" name="Rounded Rectangle 30"/>
+          <p:cNvSpPr/>
+          <p:nvPr/>
+        </p:nvSpPr>
+        <p:spPr>
+          <a:xfrm>
+            <a:off x="8229600" y="5120640"/>
+            <a:ext cx="3474720" cy="1188720"/>
+          </a:xfrm>
+          <a:prstGeom prst="roundRect">
+            <a:avLst/>
+          </a:prstGeom>
+          <a:solidFill>
+            <a:srgbClr val="313244"/>
+          </a:solidFill>
+          <a:ln>
+            <a:noFill/>
+          </a:ln>
+        </p:spPr>
+        <p:style>
+          <a:lnRef idx="1">
+            <a:schemeClr val="accent1"/>
+          </a:lnRef>
+          <a:fillRef idx="3">
+            <a:schemeClr val="accent1"/>
+          </a:fillRef>
+          <a:effectRef idx="2">
+            <a:schemeClr val="accent1"/>
+          </a:effectRef>
+          <a:fontRef idx="minor">
+            <a:schemeClr val="lt1"/>
+          </a:fontRef>
+        </p:style>
+        <p:txBody>
+          <a:bodyPr rtlCol="0" anchor="ctr"/>
+          <a:lstStyle/>
+          <a:p>
+            <a:pPr algn="ctr"/>
+          </a:p>
+        </p:txBody>
+      </p:sp>
+      <p:sp>
+        <p:nvSpPr>
+          <p:cNvPr id="32" name="TextBox 31"/>
+          <p:cNvSpPr txBox="1"/>
+          <p:nvPr/>
+        </p:nvSpPr>
+        <p:spPr>
+          <a:xfrm>
+            <a:off x="8503920" y="5257800"/>
+            <a:ext cx="2926080" cy="365760"/>
+          </a:xfrm>
+          <a:prstGeom prst="rect">
+            <a:avLst/>
+          </a:prstGeom>
+          <a:noFill/>
+        </p:spPr>
+        <p:txBody>
+          <a:bodyPr wrap="square">
+            <a:spAutoFit/>
+          </a:bodyPr>
+          <a:lstStyle/>
+          <a:p>
+            <a:pPr algn="ctr">
+              <a:defRPr sz="1700" b="1">
+                <a:solidFill>
+                  <a:srgbClr val="89B4FA"/>
+                </a:solidFill>
+                <a:latin typeface="Yu Gothic UI"/>
+              </a:defRPr>
+            </a:pPr>
+            <a:r>
+              <a:t>ダッシュボード</a:t>
+            </a:r>
+          </a:p>
+        </p:txBody>
+      </p:sp>
+      <p:sp>
+        <p:nvSpPr>
+          <p:cNvPr id="33" name="TextBox 32"/>
+          <p:cNvSpPr txBox="1"/>
+          <p:nvPr/>
+        </p:nvSpPr>
+        <p:spPr>
+          <a:xfrm>
+            <a:off x="8503920" y="5669280"/>
+            <a:ext cx="2926080" cy="457200"/>
+          </a:xfrm>
+          <a:prstGeom prst="rect">
+            <a:avLst/>
+          </a:prstGeom>
+          <a:noFill/>
+        </p:spPr>
+        <p:txBody>
+          <a:bodyPr wrap="square">
+            <a:spAutoFit/>
+          </a:bodyPr>
+          <a:lstStyle/>
+          <a:p>
+            <a:pPr algn="ctr">
+              <a:defRPr sz="1400" b="0">
+                <a:solidFill>
+                  <a:srgbClr val="A6ADC8"/>
+                </a:solidFill>
+                <a:latin typeface="Yu Gothic UI"/>
+              </a:defRPr>
+            </a:pPr>
+            <a:r>
+              <a:t>カスタマイズ表示</a:t>
             </a:r>
           </a:p>
         </p:txBody>
@@ -6994,7 +10107,287 @@
         </p:nvSpPr>
         <p:spPr>
           <a:xfrm>
-            <a:off x="1371600" y="731520"/>
+            <a:off x="731520" y="365760"/>
+            <a:ext cx="9144000" cy="640080"/>
+          </a:xfrm>
+          <a:prstGeom prst="rect">
+            <a:avLst/>
+          </a:prstGeom>
+          <a:noFill/>
+        </p:spPr>
+        <p:txBody>
+          <a:bodyPr wrap="square">
+            <a:spAutoFit/>
+          </a:bodyPr>
+          <a:lstStyle/>
+          <a:p>
+            <a:pPr algn="l">
+              <a:defRPr sz="3600" b="1">
+                <a:solidFill>
+                  <a:srgbClr val="89B4FA"/>
+                </a:solidFill>
+                <a:latin typeface="Yu Gothic UI"/>
+              </a:defRPr>
+            </a:pPr>
+            <a:r>
+              <a:t>なぜこのアプリを作ったのか</a:t>
+            </a:r>
+          </a:p>
+        </p:txBody>
+      </p:sp>
+      <p:sp>
+        <p:nvSpPr>
+          <p:cNvPr id="3" name="Rounded Rectangle 2"/>
+          <p:cNvSpPr/>
+          <p:nvPr/>
+        </p:nvSpPr>
+        <p:spPr>
+          <a:xfrm>
+            <a:off x="1371600" y="1371600"/>
+            <a:ext cx="9418320" cy="3657600"/>
+          </a:xfrm>
+          <a:prstGeom prst="roundRect">
+            <a:avLst/>
+          </a:prstGeom>
+          <a:solidFill>
+            <a:srgbClr val="313244"/>
+          </a:solidFill>
+          <a:ln>
+            <a:noFill/>
+          </a:ln>
+        </p:spPr>
+        <p:style>
+          <a:lnRef idx="1">
+            <a:schemeClr val="accent1"/>
+          </a:lnRef>
+          <a:fillRef idx="3">
+            <a:schemeClr val="accent1"/>
+          </a:fillRef>
+          <a:effectRef idx="2">
+            <a:schemeClr val="accent1"/>
+          </a:effectRef>
+          <a:fontRef idx="minor">
+            <a:schemeClr val="lt1"/>
+          </a:fontRef>
+        </p:style>
+        <p:txBody>
+          <a:bodyPr rtlCol="0" anchor="ctr"/>
+          <a:lstStyle/>
+          <a:p>
+            <a:pPr algn="ctr"/>
+          </a:p>
+        </p:txBody>
+      </p:sp>
+      <p:sp>
+        <p:nvSpPr>
+          <p:cNvPr id="4" name="TextBox 3"/>
+          <p:cNvSpPr txBox="1"/>
+          <p:nvPr/>
+        </p:nvSpPr>
+        <p:spPr>
+          <a:xfrm>
+            <a:off x="1828800" y="1645920"/>
+            <a:ext cx="8503920" cy="3200400"/>
+          </a:xfrm>
+          <a:prstGeom prst="rect">
+            <a:avLst/>
+          </a:prstGeom>
+          <a:noFill/>
+        </p:spPr>
+        <p:txBody>
+          <a:bodyPr wrap="square">
+            <a:spAutoFit/>
+          </a:bodyPr>
+          <a:lstStyle/>
+          <a:p>
+            <a:pPr algn="l">
+              <a:spcAft>
+                <a:spcPts val="2400"/>
+              </a:spcAft>
+              <a:defRPr sz="2000" b="0">
+                <a:solidFill>
+                  <a:srgbClr val="A6ADC8"/>
+                </a:solidFill>
+                <a:latin typeface="Yu Gothic UI"/>
+              </a:defRPr>
+            </a:pPr>
+            <a:r>
+              <a:t>学生時代、夢を持てず将来に希望を見出せない時期がありました。</a:t>
+            </a:r>
+          </a:p>
+          <a:p>
+            <a:pPr algn="l">
+              <a:spcAft>
+                <a:spcPts val="400"/>
+              </a:spcAft>
+              <a:defRPr sz="2000" b="0">
+                <a:solidFill>
+                  <a:srgbClr val="A6ADC8"/>
+                </a:solidFill>
+                <a:latin typeface="Yu Gothic UI"/>
+              </a:defRPr>
+            </a:pPr>
+            <a:r>
+              <a:t>本との出会いを通じて</a:t>
+            </a:r>
+          </a:p>
+          <a:p>
+            <a:pPr algn="l">
+              <a:spcAft>
+                <a:spcPts val="400"/>
+              </a:spcAft>
+              <a:defRPr sz="2800" b="1">
+                <a:solidFill>
+                  <a:srgbClr val="89B4FA"/>
+                </a:solidFill>
+                <a:latin typeface="Yu Gothic UI"/>
+              </a:defRPr>
+            </a:pPr>
+            <a:r>
+              <a:t>「生き生きと生きるには夢が必要」</a:t>
+            </a:r>
+          </a:p>
+          <a:p>
+            <a:pPr algn="l">
+              <a:spcAft>
+                <a:spcPts val="2400"/>
+              </a:spcAft>
+              <a:defRPr sz="2000" b="0">
+                <a:solidFill>
+                  <a:srgbClr val="A6ADC8"/>
+                </a:solidFill>
+                <a:latin typeface="Yu Gothic UI"/>
+              </a:defRPr>
+            </a:pPr>
+            <a:r>
+              <a:t>と気づきました。</a:t>
+            </a:r>
+          </a:p>
+          <a:p>
+            <a:pPr algn="l">
+              <a:spcAft>
+                <a:spcPts val="800"/>
+              </a:spcAft>
+              <a:defRPr sz="2000" b="0">
+                <a:solidFill>
+                  <a:srgbClr val="A6ADC8"/>
+                </a:solidFill>
+                <a:latin typeface="Yu Gothic UI"/>
+              </a:defRPr>
+            </a:pPr>
+            <a:r>
+              <a:t>夢を言語化し行動に移す仕組みを、アプリとして形にしました。</a:t>
+            </a:r>
+          </a:p>
+        </p:txBody>
+      </p:sp>
+      <p:sp>
+        <p:nvSpPr>
+          <p:cNvPr id="5" name="TextBox 4"/>
+          <p:cNvSpPr txBox="1"/>
+          <p:nvPr/>
+        </p:nvSpPr>
+        <p:spPr>
+          <a:xfrm>
+            <a:off x="1828800" y="5303520"/>
+            <a:ext cx="8229600" cy="457200"/>
+          </a:xfrm>
+          <a:prstGeom prst="rect">
+            <a:avLst/>
+          </a:prstGeom>
+          <a:noFill/>
+        </p:spPr>
+        <p:txBody>
+          <a:bodyPr wrap="square">
+            <a:spAutoFit/>
+          </a:bodyPr>
+          <a:lstStyle/>
+          <a:p>
+            <a:pPr algn="ctr">
+              <a:defRPr sz="2600" b="1">
+                <a:solidFill>
+                  <a:srgbClr val="F9E2AF"/>
+                </a:solidFill>
+                <a:latin typeface="Yu Gothic UI"/>
+              </a:defRPr>
+            </a:pPr>
+            <a:r>
+              <a:t>ユメログは「最初の一歩」を支えるアプリです。</a:t>
+            </a:r>
+          </a:p>
+        </p:txBody>
+      </p:sp>
+      <p:sp>
+        <p:nvSpPr>
+          <p:cNvPr id="6" name="TextBox 5"/>
+          <p:cNvSpPr txBox="1"/>
+          <p:nvPr/>
+        </p:nvSpPr>
+        <p:spPr>
+          <a:xfrm>
+            <a:off x="1828800" y="5943600"/>
+            <a:ext cx="8229600" cy="365760"/>
+          </a:xfrm>
+          <a:prstGeom prst="rect">
+            <a:avLst/>
+          </a:prstGeom>
+          <a:noFill/>
+        </p:spPr>
+        <p:txBody>
+          <a:bodyPr wrap="square">
+            <a:spAutoFit/>
+          </a:bodyPr>
+          <a:lstStyle/>
+          <a:p>
+            <a:pPr algn="ctr">
+              <a:defRPr sz="1600" b="0">
+                <a:solidFill>
+                  <a:srgbClr val="6C7086"/>
+                </a:solidFill>
+                <a:latin typeface="Yu Gothic UI"/>
+              </a:defRPr>
+            </a:pPr>
+            <a:r>
+              <a:t>そしてこのアプリ自体が、AI駆動開発における私の「最初の一歩」でもあります。</a:t>
+            </a:r>
+          </a:p>
+        </p:txBody>
+      </p:sp>
+    </p:spTree>
+  </p:cSld>
+  <p:clrMapOvr>
+    <a:masterClrMapping/>
+  </p:clrMapOvr>
+</p:sld>
+</file>
+
+<file path=ppt/slides/slide9.xml><?xml version="1.0" encoding="utf-8"?>
+<p:sld xmlns:a="http://schemas.openxmlformats.org/drawingml/2006/main" xmlns:p="http://schemas.openxmlformats.org/presentationml/2006/main" xmlns:r="http://schemas.openxmlformats.org/officeDocument/2006/relationships">
+  <p:cSld>
+    <p:bg>
+      <p:bgPr>
+        <a:solidFill>
+          <a:srgbClr val="1E1E2E"/>
+        </a:solidFill>
+        <a:effectLst/>
+      </p:bgPr>
+    </p:bg>
+    <p:spTree>
+      <p:nvGrpSpPr>
+        <p:cNvPr id="1" name=""/>
+        <p:cNvGrpSpPr/>
+        <p:nvPr/>
+      </p:nvGrpSpPr>
+      <p:grpSpPr/>
+      <p:sp>
+        <p:nvSpPr>
+          <p:cNvPr id="2" name="TextBox 1"/>
+          <p:cNvSpPr txBox="1"/>
+          <p:nvPr/>
+        </p:nvSpPr>
+        <p:spPr>
+          <a:xfrm>
+            <a:off x="1371600" y="548640"/>
             <a:ext cx="9144000" cy="731520"/>
           </a:xfrm>
           <a:prstGeom prst="rect">
@@ -7009,7 +10402,7 @@
           <a:lstStyle/>
           <a:p>
             <a:pPr algn="ctr">
-              <a:defRPr sz="4000" b="1">
+              <a:defRPr sz="3400" b="1">
                 <a:solidFill>
                   <a:srgbClr val="89B4FA"/>
                 </a:solidFill>
@@ -7017,7 +10410,11 @@
               </a:defRPr>
             </a:pPr>
             <a:r>
-              <a:t>今すぐ体験してみてください</a:t>
+              <a:t>3週間で作ったアプリの品質、</a:t>
+            </a:r>
+            <a:br/>
+            <a:r>
+              <a:t>自分の目で確かめてみてください</a:t>
             </a:r>
           </a:p>
         </p:txBody>
@@ -7030,8 +10427,8 @@
         </p:nvSpPr>
         <p:spPr>
           <a:xfrm>
-            <a:off x="1371600" y="1645920"/>
-            <a:ext cx="9144000" cy="548640"/>
+            <a:off x="1371600" y="1828800"/>
+            <a:ext cx="9144000" cy="457200"/>
           </a:xfrm>
           <a:prstGeom prst="rect">
             <a:avLst/>
@@ -7045,7 +10442,7 @@
           <a:lstStyle/>
           <a:p>
             <a:pPr algn="ctr">
-              <a:defRPr sz="2000" b="0">
+              <a:defRPr sz="1800" b="0">
                 <a:solidFill>
                   <a:srgbClr val="A6ADC8"/>
                 </a:solidFill>
@@ -7053,7 +10450,7 @@
               </a:defRPr>
             </a:pPr>
             <a:r>
-              <a:t>Webブラウザですぐに使えます。アカウント登録不要・完全無料。</a:t>
+              <a:t>Webブラウザですぐに開けます。登録不要・完全無料。</a:t>
             </a:r>
           </a:p>
         </p:txBody>
@@ -7074,7 +10471,7 @@
         </p:blipFill>
         <p:spPr>
           <a:xfrm>
-            <a:off x="4480560" y="2377440"/>
+            <a:off x="4480560" y="2560320"/>
             <a:ext cx="3200400" cy="3200400"/>
           </a:xfrm>
           <a:prstGeom prst="rect">
@@ -7090,8 +10487,8 @@
         </p:nvSpPr>
         <p:spPr>
           <a:xfrm>
-            <a:off x="1828800" y="5760720"/>
-            <a:ext cx="8229600" cy="457200"/>
+            <a:off x="1828800" y="5943600"/>
+            <a:ext cx="8229600" cy="365760"/>
           </a:xfrm>
           <a:prstGeom prst="rect">
             <a:avLst/>
@@ -7114,42 +10511,6 @@
             </a:pPr>
             <a:r>
               <a:t>https://teppei19980914.github.io/GrowthEngine/</a:t>
-            </a:r>
-          </a:p>
-        </p:txBody>
-      </p:sp>
-      <p:sp>
-        <p:nvSpPr>
-          <p:cNvPr id="6" name="TextBox 5"/>
-          <p:cNvSpPr txBox="1"/>
-          <p:nvPr/>
-        </p:nvSpPr>
-        <p:spPr>
-          <a:xfrm>
-            <a:off x="3657600" y="6309360"/>
-            <a:ext cx="4572000" cy="365760"/>
-          </a:xfrm>
-          <a:prstGeom prst="rect">
-            <a:avLst/>
-          </a:prstGeom>
-          <a:noFill/>
-        </p:spPr>
-        <p:txBody>
-          <a:bodyPr wrap="square">
-            <a:spAutoFit/>
-          </a:bodyPr>
-          <a:lstStyle/>
-          <a:p>
-            <a:pPr algn="ctr">
-              <a:defRPr sz="1600" b="0">
-                <a:solidFill>
-                  <a:srgbClr val="6C7086"/>
-                </a:solidFill>
-                <a:latin typeface="Yu Gothic UI"/>
-              </a:defRPr>
-            </a:pPr>
-            <a:r>
-              <a:t>ご清聴ありがとうございました</a:t>
             </a:r>
           </a:p>
         </p:txBody>
